--- a/Presentacion_Estudio_Mercado_Rural.pptx
+++ b/Presentacion_Estudio_Mercado_Rural.pptx
@@ -14773,7 +14773,7 @@
         </p:nvGraphicFramePr>
         <p:xfrm>
           <a:off x="822960" y="5074920"/>
-          <a:ext cx="10515600" cy="932688"/>
+          <a:ext cx="10515593" cy="932688"/>
         </p:xfrm>
         <a:graphic>
           <a:graphicData uri="http://schemas.openxmlformats.org/drawingml/2006/table">
@@ -14782,13 +14782,13 @@
                 <a:tableStyleId>{5C22544A-7EE6-4342-B048-85BDC9FD1C3A}</a:tableStyleId>
               </a:tblPr>
               <a:tblGrid>
-                <a:gridCol w="1828800"/>
-                <a:gridCol w="1828800"/>
-                <a:gridCol w="1485900"/>
-                <a:gridCol w="1828800"/>
-                <a:gridCol w="1371600"/>
-                <a:gridCol w="1028700"/>
-                <a:gridCol w="1143000"/>
+                <a:gridCol w="1828799"/>
+                <a:gridCol w="1828799"/>
+                <a:gridCol w="1485899"/>
+                <a:gridCol w="1828799"/>
+                <a:gridCol w="1371599"/>
+                <a:gridCol w="1028699"/>
+                <a:gridCol w="1142999"/>
               </a:tblGrid>
               <a:tr h="310896">
                 <a:tc>

--- a/Presentacion_Estudio_Mercado_Rural.pptx
+++ b/Presentacion_Estudio_Mercado_Rural.pptx
@@ -7122,7 +7122,7 @@
                 </a:solidFill>
                 <a:latin typeface="Calibri"/>
               </a:rPr>
-              <a:t>Σ</a:t>
+              <a:t>m²</a:t>
             </a:r>
           </a:p>
         </p:txBody>
@@ -7157,7 +7157,7 @@
                 </a:solidFill>
                 <a:latin typeface="Calibri"/>
               </a:rPr>
-              <a:t>COMBINACIÓN ELEGIDA</a:t>
+              <a:t>VALOR POR m²</a:t>
             </a:r>
           </a:p>
         </p:txBody>
@@ -7186,13 +7186,13 @@
           <a:p>
             <a:pPr algn="l"/>
             <a:r>
-              <a:rPr sz="2600" b="1" i="0">
+              <a:rPr sz="2400" b="1" i="0">
                 <a:solidFill>
                   <a:srgbClr val="1F3864"/>
                 </a:solidFill>
                 <a:latin typeface="Calibri"/>
               </a:rPr>
-              <a:t>$ 525,0 M</a:t>
+              <a:t>$ 44.962</a:t>
             </a:r>
           </a:p>
         </p:txBody>
@@ -7227,7 +7227,7 @@
                 </a:solidFill>
                 <a:latin typeface="Calibri"/>
               </a:rPr>
-              <a:t>Combinación 3 · $ 52.500/m²</a:t>
+              <a:t>terreno · valor adoptado</a:t>
             </a:r>
           </a:p>
         </p:txBody>
@@ -7378,7 +7378,7 @@
                 </a:solidFill>
                 <a:latin typeface="Calibri"/>
               </a:rPr>
-              <a:t>↔</a:t>
+              <a:t>▦</a:t>
             </a:r>
           </a:p>
         </p:txBody>
@@ -7413,7 +7413,7 @@
                 </a:solidFill>
                 <a:latin typeface="Calibri"/>
               </a:rPr>
-              <a:t>RANGO ORIENTATIVO</a:t>
+              <a:t>CONSTRUCCIONES</a:t>
             </a:r>
           </a:p>
         </p:txBody>
@@ -7442,13 +7442,13 @@
           <a:p>
             <a:pPr algn="l"/>
             <a:r>
-              <a:rPr sz="2200" b="1" i="0">
+              <a:rPr sz="2400" b="1" i="0">
                 <a:solidFill>
                   <a:srgbClr val="1F3864"/>
                 </a:solidFill>
                 <a:latin typeface="Calibri"/>
               </a:rPr>
-              <a:t>525 – 630 M</a:t>
+              <a:t>$ 172,7 M</a:t>
             </a:r>
           </a:p>
         </p:txBody>
@@ -7483,7 +7483,7 @@
                 </a:solidFill>
                 <a:latin typeface="Calibri"/>
               </a:rPr>
-              <a:t>amplitud $ 105 M</a:t>
+              <a:t>6 construcciones · Ross-Heidecke</a:t>
             </a:r>
           </a:p>
         </p:txBody>
@@ -7594,7 +7594,7 @@
                 </a:solidFill>
                 <a:latin typeface="Calibri"/>
               </a:rPr>
-              <a:t>COEFICIENTE DE VARIACIÓN</a:t>
+              <a:t>COEFICIENTE DE VARIACIÓN · MUESTRA</a:t>
             </a:r>
           </a:p>
         </p:txBody>
@@ -7629,7 +7629,7 @@
                 </a:solidFill>
                 <a:latin typeface="Calibri"/>
               </a:rPr>
-              <a:t>26,2 %</a:t>
+              <a:t>96,9 %</a:t>
             </a:r>
           </a:p>
         </p:txBody>
@@ -7664,7 +7664,7 @@
                 </a:solidFill>
                 <a:latin typeface="Calibri"/>
               </a:rPr>
-              <a:t>No cumple el máximo de 10 %: valores orientativos; se requieren más ofertas.</a:t>
+              <a:t>Supera el máximo de 10 % (Res. 941): se requieren más ofertas del mismo segmento.</a:t>
             </a:r>
           </a:p>
         </p:txBody>
@@ -9631,7 +9631,7 @@
                 </a:solidFill>
                 <a:latin typeface="Calibri"/>
               </a:rPr>
-              <a:t>Combinaciones</a:t>
+              <a:t>Depuración</a:t>
             </a:r>
           </a:p>
         </p:txBody>
@@ -9666,7 +9666,7 @@
                 </a:solidFill>
                 <a:latin typeface="Calibri"/>
               </a:rPr>
-              <a:t>Grupos de 3 o más ofertas con el menor CV.</a:t>
+              <a:t>Descarte de ofertas no comparables por uso, ubicación o fiabilidad.</a:t>
             </a:r>
           </a:p>
         </p:txBody>
@@ -12507,7 +12507,7 @@
                 </a:solidFill>
                 <a:latin typeface="Calibri"/>
               </a:rPr>
-              <a:t>ESTADÍSTICA</a:t>
+              <a:t>MERCADO</a:t>
             </a:r>
           </a:p>
         </p:txBody>
@@ -12542,7 +12542,7 @@
                 </a:solidFill>
                 <a:latin typeface="Calibri"/>
               </a:rPr>
-              <a:t>Valor por hectárea y estadísticos</a:t>
+              <a:t>Oferta comparable</a:t>
             </a:r>
           </a:p>
         </p:txBody>
@@ -12577,7 +12577,7 @@
                 </a:solidFill>
                 <a:latin typeface="Calibri"/>
               </a:rPr>
-              <a:t>Muestra general · $ millones por ha (escala logarítmica)</a:t>
+              <a:t>Ofertas vigentes con uso agropecuario · detalle de la fuente</a:t>
             </a:r>
           </a:p>
         </p:txBody>
@@ -12704,8 +12704,8 @@
         </p:nvSpPr>
         <p:spPr>
           <a:xfrm>
-            <a:off x="548640" y="1417320"/>
-            <a:ext cx="7223760" cy="4754880"/>
+            <a:off x="548640" y="1463040"/>
+            <a:ext cx="11109960" cy="4617720"/>
           </a:xfrm>
           <a:prstGeom prst="roundRect">
             <a:avLst>
@@ -12750,245 +12750,15 @@
           </a:p>
         </p:txBody>
       </p:sp>
-      <p:graphicFrame>
-        <p:nvGraphicFramePr>
-          <p:cNvPr id="13" name="Chart 12"/>
-          <p:cNvGraphicFramePr>
-            <a:graphicFrameLocks noGrp="1"/>
-          </p:cNvGraphicFramePr>
-          <p:nvPr/>
-        </p:nvGraphicFramePr>
-        <p:xfrm>
-          <a:off x="640080" y="1508760"/>
-          <a:ext cx="7040880" cy="4297680"/>
-        </p:xfrm>
-        <a:graphic>
-          <a:graphicData uri="http://schemas.openxmlformats.org/drawingml/2006/chart">
-            <c:chart xmlns:c="http://schemas.openxmlformats.org/drawingml/2006/chart" r:id="rId2"/>
-          </a:graphicData>
-        </a:graphic>
-      </p:graphicFrame>
-      <p:sp>
-        <p:nvSpPr>
-          <p:cNvPr id="14" name="Rectangle 13"/>
+      <p:sp>
+        <p:nvSpPr>
+          <p:cNvPr id="13" name="Rectangle 12"/>
           <p:cNvSpPr/>
           <p:nvPr/>
         </p:nvSpPr>
         <p:spPr>
           <a:xfrm>
-            <a:off x="868680" y="5870448"/>
-            <a:ext cx="164592" cy="164592"/>
-          </a:xfrm>
-          <a:prstGeom prst="rect">
-            <a:avLst/>
-          </a:prstGeom>
-          <a:solidFill>
-            <a:srgbClr val="1F3864"/>
-          </a:solidFill>
-          <a:ln>
-            <a:noFill/>
-          </a:ln>
-          <a:effectLst/>
-        </p:spPr>
-        <p:style>
-          <a:lnRef idx="1">
-            <a:schemeClr val="accent1"/>
-          </a:lnRef>
-          <a:fillRef idx="3">
-            <a:schemeClr val="accent1"/>
-          </a:fillRef>
-          <a:effectRef idx="2">
-            <a:schemeClr val="accent1"/>
-          </a:effectRef>
-          <a:fontRef idx="minor">
-            <a:schemeClr val="lt1"/>
-          </a:fontRef>
-        </p:style>
-        <p:txBody>
-          <a:bodyPr rtlCol="0" anchor="ctr"/>
-          <a:lstStyle/>
-          <a:p>
-            <a:pPr algn="ctr"/>
-          </a:p>
-        </p:txBody>
-      </p:sp>
-      <p:sp>
-        <p:nvSpPr>
-          <p:cNvPr id="15" name="TextBox 14"/>
-          <p:cNvSpPr txBox="1"/>
-          <p:nvPr/>
-        </p:nvSpPr>
-        <p:spPr>
-          <a:xfrm>
-            <a:off x="1078992" y="5815584"/>
-            <a:ext cx="2286000" cy="274320"/>
-          </a:xfrm>
-          <a:prstGeom prst="rect">
-            <a:avLst/>
-          </a:prstGeom>
-          <a:noFill/>
-        </p:spPr>
-        <p:txBody>
-          <a:bodyPr wrap="square" anchor="t" lIns="36576" rIns="36576" tIns="18288" bIns="18288">
-            <a:spAutoFit/>
-          </a:bodyPr>
-          <a:lstStyle/>
-          <a:p>
-            <a:pPr algn="l"/>
-            <a:r>
-              <a:rPr sz="1000" b="0" i="0">
-                <a:solidFill>
-                  <a:srgbClr val="3A4457"/>
-                </a:solidFill>
-                <a:latin typeface="Calibri"/>
-              </a:rPr>
-              <a:t>Oferta vigente</a:t>
-            </a:r>
-          </a:p>
-        </p:txBody>
-      </p:sp>
-      <p:sp>
-        <p:nvSpPr>
-          <p:cNvPr id="16" name="Rectangle 15"/>
-          <p:cNvSpPr/>
-          <p:nvPr/>
-        </p:nvSpPr>
-        <p:spPr>
-          <a:xfrm>
-            <a:off x="2743200" y="5870448"/>
-            <a:ext cx="164592" cy="164592"/>
-          </a:xfrm>
-          <a:prstGeom prst="rect">
-            <a:avLst/>
-          </a:prstGeom>
-          <a:solidFill>
-            <a:srgbClr val="BFBFBF"/>
-          </a:solidFill>
-          <a:ln>
-            <a:noFill/>
-          </a:ln>
-          <a:effectLst/>
-        </p:spPr>
-        <p:style>
-          <a:lnRef idx="1">
-            <a:schemeClr val="accent1"/>
-          </a:lnRef>
-          <a:fillRef idx="3">
-            <a:schemeClr val="accent1"/>
-          </a:fillRef>
-          <a:effectRef idx="2">
-            <a:schemeClr val="accent1"/>
-          </a:effectRef>
-          <a:fontRef idx="minor">
-            <a:schemeClr val="lt1"/>
-          </a:fontRef>
-        </p:style>
-        <p:txBody>
-          <a:bodyPr rtlCol="0" anchor="ctr"/>
-          <a:lstStyle/>
-          <a:p>
-            <a:pPr algn="ctr"/>
-          </a:p>
-        </p:txBody>
-      </p:sp>
-      <p:sp>
-        <p:nvSpPr>
-          <p:cNvPr id="17" name="TextBox 16"/>
-          <p:cNvSpPr txBox="1"/>
-          <p:nvPr/>
-        </p:nvSpPr>
-        <p:spPr>
-          <a:xfrm>
-            <a:off x="2953512" y="5815584"/>
-            <a:ext cx="2286000" cy="274320"/>
-          </a:xfrm>
-          <a:prstGeom prst="rect">
-            <a:avLst/>
-          </a:prstGeom>
-          <a:noFill/>
-        </p:spPr>
-        <p:txBody>
-          <a:bodyPr wrap="square" anchor="t" lIns="36576" rIns="36576" tIns="18288" bIns="18288">
-            <a:spAutoFit/>
-          </a:bodyPr>
-          <a:lstStyle/>
-          <a:p>
-            <a:pPr algn="l"/>
-            <a:r>
-              <a:rPr sz="1000" b="0" i="0">
-                <a:solidFill>
-                  <a:srgbClr val="3A4457"/>
-                </a:solidFill>
-                <a:latin typeface="Calibri"/>
-              </a:rPr>
-              <a:t>Oferta descartada</a:t>
-            </a:r>
-          </a:p>
-        </p:txBody>
-      </p:sp>
-      <p:sp>
-        <p:nvSpPr>
-          <p:cNvPr id="18" name="Rounded Rectangle 17"/>
-          <p:cNvSpPr/>
-          <p:nvPr/>
-        </p:nvSpPr>
-        <p:spPr>
-          <a:xfrm>
-            <a:off x="8001000" y="1417320"/>
-            <a:ext cx="1783080" cy="914400"/>
-          </a:xfrm>
-          <a:prstGeom prst="roundRect">
-            <a:avLst>
-              <a:gd name="adj" fmla="val 5000"/>
-            </a:avLst>
-          </a:prstGeom>
-          <a:solidFill>
-            <a:srgbClr val="FFFFFF"/>
-          </a:solidFill>
-          <a:ln w="9525">
-            <a:solidFill>
-              <a:srgbClr val="E1E6EF"/>
-            </a:solidFill>
-          </a:ln>
-          <a:effectLst>
-            <a:outerShdw blurRad="114300" dist="38100" dir="5400000" algn="t" rotWithShape="0">
-              <a:srgbClr val="0F1F3D">
-                <a:alpha val="18000"/>
-              </a:srgbClr>
-            </a:outerShdw>
-          </a:effectLst>
-        </p:spPr>
-        <p:style>
-          <a:lnRef idx="1">
-            <a:schemeClr val="accent1"/>
-          </a:lnRef>
-          <a:fillRef idx="3">
-            <a:schemeClr val="accent1"/>
-          </a:fillRef>
-          <a:effectRef idx="2">
-            <a:schemeClr val="accent1"/>
-          </a:effectRef>
-          <a:fontRef idx="minor">
-            <a:schemeClr val="lt1"/>
-          </a:fontRef>
-        </p:style>
-        <p:txBody>
-          <a:bodyPr rtlCol="0" anchor="ctr"/>
-          <a:lstStyle/>
-          <a:p>
-            <a:pPr algn="ctr"/>
-          </a:p>
-        </p:txBody>
-      </p:sp>
-      <p:sp>
-        <p:nvSpPr>
-          <p:cNvPr id="19" name="Rectangle 18"/>
-          <p:cNvSpPr/>
-          <p:nvPr/>
-        </p:nvSpPr>
-        <p:spPr>
-          <a:xfrm>
-            <a:off x="8165592" y="1417320"/>
+            <a:off x="713232" y="1463040"/>
             <a:ext cx="548640" cy="54864"/>
           </a:xfrm>
           <a:prstGeom prst="rect">
@@ -13026,928 +12796,18 @@
       </p:sp>
       <p:sp>
         <p:nvSpPr>
-          <p:cNvPr id="20" name="TextBox 19"/>
-          <p:cNvSpPr txBox="1"/>
-          <p:nvPr/>
-        </p:nvSpPr>
-        <p:spPr>
-          <a:xfrm>
-            <a:off x="8092440" y="1527048"/>
-            <a:ext cx="1645920" cy="320040"/>
-          </a:xfrm>
-          <a:prstGeom prst="rect">
-            <a:avLst/>
-          </a:prstGeom>
-          <a:noFill/>
-        </p:spPr>
-        <p:txBody>
-          <a:bodyPr wrap="square" anchor="t" lIns="36576" rIns="36576" tIns="18288" bIns="18288">
-            <a:spAutoFit/>
-          </a:bodyPr>
-          <a:lstStyle/>
-          <a:p>
-            <a:pPr algn="l"/>
-            <a:r>
-              <a:rPr sz="900" b="1" i="0">
-                <a:solidFill>
-                  <a:srgbClr val="6B7280"/>
-                </a:solidFill>
-                <a:latin typeface="Calibri"/>
-              </a:rPr>
-              <a:t>Promedio</a:t>
-            </a:r>
-          </a:p>
-        </p:txBody>
-      </p:sp>
-      <p:sp>
-        <p:nvSpPr>
-          <p:cNvPr id="21" name="TextBox 20"/>
-          <p:cNvSpPr txBox="1"/>
-          <p:nvPr/>
-        </p:nvSpPr>
-        <p:spPr>
-          <a:xfrm>
-            <a:off x="8092440" y="1801368"/>
-            <a:ext cx="1645920" cy="457200"/>
-          </a:xfrm>
-          <a:prstGeom prst="rect">
-            <a:avLst/>
-          </a:prstGeom>
-          <a:noFill/>
-        </p:spPr>
-        <p:txBody>
-          <a:bodyPr wrap="square" anchor="ctr" lIns="36576" rIns="36576" tIns="18288" bIns="18288">
-            <a:spAutoFit/>
-          </a:bodyPr>
-          <a:lstStyle/>
-          <a:p>
-            <a:pPr algn="l"/>
-            <a:r>
-              <a:rPr sz="1700" b="1" i="0">
-                <a:solidFill>
-                  <a:srgbClr val="1F3864"/>
-                </a:solidFill>
-                <a:latin typeface="Calibri"/>
-              </a:rPr>
-              <a:t>$ 449,6 M</a:t>
-            </a:r>
-          </a:p>
-        </p:txBody>
-      </p:sp>
-      <p:sp>
-        <p:nvSpPr>
-          <p:cNvPr id="22" name="Rounded Rectangle 21"/>
+          <p:cNvPr id="14" name="Rounded Rectangle 13"/>
           <p:cNvSpPr/>
           <p:nvPr/>
         </p:nvSpPr>
         <p:spPr>
           <a:xfrm>
-            <a:off x="9875520" y="1417320"/>
-            <a:ext cx="1783080" cy="914400"/>
+            <a:off x="731520" y="1645920"/>
+            <a:ext cx="3108960" cy="4251959"/>
           </a:xfrm>
           <a:prstGeom prst="roundRect">
             <a:avLst>
-              <a:gd name="adj" fmla="val 5000"/>
-            </a:avLst>
-          </a:prstGeom>
-          <a:solidFill>
-            <a:srgbClr val="FFFFFF"/>
-          </a:solidFill>
-          <a:ln w="9525">
-            <a:solidFill>
-              <a:srgbClr val="E1E6EF"/>
-            </a:solidFill>
-          </a:ln>
-          <a:effectLst>
-            <a:outerShdw blurRad="114300" dist="38100" dir="5400000" algn="t" rotWithShape="0">
-              <a:srgbClr val="0F1F3D">
-                <a:alpha val="18000"/>
-              </a:srgbClr>
-            </a:outerShdw>
-          </a:effectLst>
-        </p:spPr>
-        <p:style>
-          <a:lnRef idx="1">
-            <a:schemeClr val="accent1"/>
-          </a:lnRef>
-          <a:fillRef idx="3">
-            <a:schemeClr val="accent1"/>
-          </a:fillRef>
-          <a:effectRef idx="2">
-            <a:schemeClr val="accent1"/>
-          </a:effectRef>
-          <a:fontRef idx="minor">
-            <a:schemeClr val="lt1"/>
-          </a:fontRef>
-        </p:style>
-        <p:txBody>
-          <a:bodyPr rtlCol="0" anchor="ctr"/>
-          <a:lstStyle/>
-          <a:p>
-            <a:pPr algn="ctr"/>
-          </a:p>
-        </p:txBody>
-      </p:sp>
-      <p:sp>
-        <p:nvSpPr>
-          <p:cNvPr id="23" name="Rectangle 22"/>
-          <p:cNvSpPr/>
-          <p:nvPr/>
-        </p:nvSpPr>
-        <p:spPr>
-          <a:xfrm>
-            <a:off x="10040112" y="1417320"/>
-            <a:ext cx="548640" cy="54864"/>
-          </a:xfrm>
-          <a:prstGeom prst="rect">
-            <a:avLst/>
-          </a:prstGeom>
-          <a:solidFill>
-            <a:srgbClr val="92D050"/>
-          </a:solidFill>
-          <a:ln>
-            <a:noFill/>
-          </a:ln>
-          <a:effectLst/>
-        </p:spPr>
-        <p:style>
-          <a:lnRef idx="1">
-            <a:schemeClr val="accent1"/>
-          </a:lnRef>
-          <a:fillRef idx="3">
-            <a:schemeClr val="accent1"/>
-          </a:fillRef>
-          <a:effectRef idx="2">
-            <a:schemeClr val="accent1"/>
-          </a:effectRef>
-          <a:fontRef idx="minor">
-            <a:schemeClr val="lt1"/>
-          </a:fontRef>
-        </p:style>
-        <p:txBody>
-          <a:bodyPr rtlCol="0" anchor="ctr"/>
-          <a:lstStyle/>
-          <a:p>
-            <a:pPr algn="ctr"/>
-          </a:p>
-        </p:txBody>
-      </p:sp>
-      <p:sp>
-        <p:nvSpPr>
-          <p:cNvPr id="24" name="TextBox 23"/>
-          <p:cNvSpPr txBox="1"/>
-          <p:nvPr/>
-        </p:nvSpPr>
-        <p:spPr>
-          <a:xfrm>
-            <a:off x="9966960" y="1527048"/>
-            <a:ext cx="1645920" cy="320040"/>
-          </a:xfrm>
-          <a:prstGeom prst="rect">
-            <a:avLst/>
-          </a:prstGeom>
-          <a:noFill/>
-        </p:spPr>
-        <p:txBody>
-          <a:bodyPr wrap="square" anchor="t" lIns="36576" rIns="36576" tIns="18288" bIns="18288">
-            <a:spAutoFit/>
-          </a:bodyPr>
-          <a:lstStyle/>
-          <a:p>
-            <a:pPr algn="l"/>
-            <a:r>
-              <a:rPr sz="900" b="1" i="0">
-                <a:solidFill>
-                  <a:srgbClr val="6B7280"/>
-                </a:solidFill>
-                <a:latin typeface="Calibri"/>
-              </a:rPr>
-              <a:t>Desviación estándar</a:t>
-            </a:r>
-          </a:p>
-        </p:txBody>
-      </p:sp>
-      <p:sp>
-        <p:nvSpPr>
-          <p:cNvPr id="25" name="TextBox 24"/>
-          <p:cNvSpPr txBox="1"/>
-          <p:nvPr/>
-        </p:nvSpPr>
-        <p:spPr>
-          <a:xfrm>
-            <a:off x="9966960" y="1801368"/>
-            <a:ext cx="1645920" cy="457200"/>
-          </a:xfrm>
-          <a:prstGeom prst="rect">
-            <a:avLst/>
-          </a:prstGeom>
-          <a:noFill/>
-        </p:spPr>
-        <p:txBody>
-          <a:bodyPr wrap="square" anchor="ctr" lIns="36576" rIns="36576" tIns="18288" bIns="18288">
-            <a:spAutoFit/>
-          </a:bodyPr>
-          <a:lstStyle/>
-          <a:p>
-            <a:pPr algn="l"/>
-            <a:r>
-              <a:rPr sz="1700" b="1" i="0">
-                <a:solidFill>
-                  <a:srgbClr val="1F3864"/>
-                </a:solidFill>
-                <a:latin typeface="Calibri"/>
-              </a:rPr>
-              <a:t>$ 435,8 M</a:t>
-            </a:r>
-          </a:p>
-        </p:txBody>
-      </p:sp>
-      <p:sp>
-        <p:nvSpPr>
-          <p:cNvPr id="26" name="Rounded Rectangle 25"/>
-          <p:cNvSpPr/>
-          <p:nvPr/>
-        </p:nvSpPr>
-        <p:spPr>
-          <a:xfrm>
-            <a:off x="8001000" y="2441448"/>
-            <a:ext cx="1783080" cy="914400"/>
-          </a:xfrm>
-          <a:prstGeom prst="roundRect">
-            <a:avLst>
-              <a:gd name="adj" fmla="val 5000"/>
-            </a:avLst>
-          </a:prstGeom>
-          <a:solidFill>
-            <a:srgbClr val="FFFFFF"/>
-          </a:solidFill>
-          <a:ln w="9525">
-            <a:solidFill>
-              <a:srgbClr val="E1E6EF"/>
-            </a:solidFill>
-          </a:ln>
-          <a:effectLst>
-            <a:outerShdw blurRad="114300" dist="38100" dir="5400000" algn="t" rotWithShape="0">
-              <a:srgbClr val="0F1F3D">
-                <a:alpha val="18000"/>
-              </a:srgbClr>
-            </a:outerShdw>
-          </a:effectLst>
-        </p:spPr>
-        <p:style>
-          <a:lnRef idx="1">
-            <a:schemeClr val="accent1"/>
-          </a:lnRef>
-          <a:fillRef idx="3">
-            <a:schemeClr val="accent1"/>
-          </a:fillRef>
-          <a:effectRef idx="2">
-            <a:schemeClr val="accent1"/>
-          </a:effectRef>
-          <a:fontRef idx="minor">
-            <a:schemeClr val="lt1"/>
-          </a:fontRef>
-        </p:style>
-        <p:txBody>
-          <a:bodyPr rtlCol="0" anchor="ctr"/>
-          <a:lstStyle/>
-          <a:p>
-            <a:pPr algn="ctr"/>
-          </a:p>
-        </p:txBody>
-      </p:sp>
-      <p:sp>
-        <p:nvSpPr>
-          <p:cNvPr id="27" name="Rectangle 26"/>
-          <p:cNvSpPr/>
-          <p:nvPr/>
-        </p:nvSpPr>
-        <p:spPr>
-          <a:xfrm>
-            <a:off x="8165592" y="2441448"/>
-            <a:ext cx="548640" cy="54864"/>
-          </a:xfrm>
-          <a:prstGeom prst="rect">
-            <a:avLst/>
-          </a:prstGeom>
-          <a:solidFill>
-            <a:srgbClr val="C0392B"/>
-          </a:solidFill>
-          <a:ln>
-            <a:noFill/>
-          </a:ln>
-          <a:effectLst/>
-        </p:spPr>
-        <p:style>
-          <a:lnRef idx="1">
-            <a:schemeClr val="accent1"/>
-          </a:lnRef>
-          <a:fillRef idx="3">
-            <a:schemeClr val="accent1"/>
-          </a:fillRef>
-          <a:effectRef idx="2">
-            <a:schemeClr val="accent1"/>
-          </a:effectRef>
-          <a:fontRef idx="minor">
-            <a:schemeClr val="lt1"/>
-          </a:fontRef>
-        </p:style>
-        <p:txBody>
-          <a:bodyPr rtlCol="0" anchor="ctr"/>
-          <a:lstStyle/>
-          <a:p>
-            <a:pPr algn="ctr"/>
-          </a:p>
-        </p:txBody>
-      </p:sp>
-      <p:sp>
-        <p:nvSpPr>
-          <p:cNvPr id="28" name="TextBox 27"/>
-          <p:cNvSpPr txBox="1"/>
-          <p:nvPr/>
-        </p:nvSpPr>
-        <p:spPr>
-          <a:xfrm>
-            <a:off x="8092440" y="2551176"/>
-            <a:ext cx="1645920" cy="320040"/>
-          </a:xfrm>
-          <a:prstGeom prst="rect">
-            <a:avLst/>
-          </a:prstGeom>
-          <a:noFill/>
-        </p:spPr>
-        <p:txBody>
-          <a:bodyPr wrap="square" anchor="t" lIns="36576" rIns="36576" tIns="18288" bIns="18288">
-            <a:spAutoFit/>
-          </a:bodyPr>
-          <a:lstStyle/>
-          <a:p>
-            <a:pPr algn="l"/>
-            <a:r>
-              <a:rPr sz="900" b="1" i="0">
-                <a:solidFill>
-                  <a:srgbClr val="6B7280"/>
-                </a:solidFill>
-                <a:latin typeface="Calibri"/>
-              </a:rPr>
-              <a:t>Coeficiente de variación</a:t>
-            </a:r>
-          </a:p>
-        </p:txBody>
-      </p:sp>
-      <p:sp>
-        <p:nvSpPr>
-          <p:cNvPr id="29" name="TextBox 28"/>
-          <p:cNvSpPr txBox="1"/>
-          <p:nvPr/>
-        </p:nvSpPr>
-        <p:spPr>
-          <a:xfrm>
-            <a:off x="8092440" y="2825496"/>
-            <a:ext cx="1645920" cy="457200"/>
-          </a:xfrm>
-          <a:prstGeom prst="rect">
-            <a:avLst/>
-          </a:prstGeom>
-          <a:noFill/>
-        </p:spPr>
-        <p:txBody>
-          <a:bodyPr wrap="square" anchor="ctr" lIns="36576" rIns="36576" tIns="18288" bIns="18288">
-            <a:spAutoFit/>
-          </a:bodyPr>
-          <a:lstStyle/>
-          <a:p>
-            <a:pPr algn="l"/>
-            <a:r>
-              <a:rPr sz="1700" b="1" i="0">
-                <a:solidFill>
-                  <a:srgbClr val="C0392B"/>
-                </a:solidFill>
-                <a:latin typeface="Calibri"/>
-              </a:rPr>
-              <a:t>96,9 %</a:t>
-            </a:r>
-          </a:p>
-        </p:txBody>
-      </p:sp>
-      <p:sp>
-        <p:nvSpPr>
-          <p:cNvPr id="30" name="Rounded Rectangle 29"/>
-          <p:cNvSpPr/>
-          <p:nvPr/>
-        </p:nvSpPr>
-        <p:spPr>
-          <a:xfrm>
-            <a:off x="9875520" y="2441448"/>
-            <a:ext cx="1783080" cy="914400"/>
-          </a:xfrm>
-          <a:prstGeom prst="roundRect">
-            <a:avLst>
-              <a:gd name="adj" fmla="val 5000"/>
-            </a:avLst>
-          </a:prstGeom>
-          <a:solidFill>
-            <a:srgbClr val="FFFFFF"/>
-          </a:solidFill>
-          <a:ln w="9525">
-            <a:solidFill>
-              <a:srgbClr val="E1E6EF"/>
-            </a:solidFill>
-          </a:ln>
-          <a:effectLst>
-            <a:outerShdw blurRad="114300" dist="38100" dir="5400000" algn="t" rotWithShape="0">
-              <a:srgbClr val="0F1F3D">
-                <a:alpha val="18000"/>
-              </a:srgbClr>
-            </a:outerShdw>
-          </a:effectLst>
-        </p:spPr>
-        <p:style>
-          <a:lnRef idx="1">
-            <a:schemeClr val="accent1"/>
-          </a:lnRef>
-          <a:fillRef idx="3">
-            <a:schemeClr val="accent1"/>
-          </a:fillRef>
-          <a:effectRef idx="2">
-            <a:schemeClr val="accent1"/>
-          </a:effectRef>
-          <a:fontRef idx="minor">
-            <a:schemeClr val="lt1"/>
-          </a:fontRef>
-        </p:style>
-        <p:txBody>
-          <a:bodyPr rtlCol="0" anchor="ctr"/>
-          <a:lstStyle/>
-          <a:p>
-            <a:pPr algn="ctr"/>
-          </a:p>
-        </p:txBody>
-      </p:sp>
-      <p:sp>
-        <p:nvSpPr>
-          <p:cNvPr id="31" name="Rectangle 30"/>
-          <p:cNvSpPr/>
-          <p:nvPr/>
-        </p:nvSpPr>
-        <p:spPr>
-          <a:xfrm>
-            <a:off x="10040112" y="2441448"/>
-            <a:ext cx="548640" cy="54864"/>
-          </a:xfrm>
-          <a:prstGeom prst="rect">
-            <a:avLst/>
-          </a:prstGeom>
-          <a:solidFill>
-            <a:srgbClr val="92D050"/>
-          </a:solidFill>
-          <a:ln>
-            <a:noFill/>
-          </a:ln>
-          <a:effectLst/>
-        </p:spPr>
-        <p:style>
-          <a:lnRef idx="1">
-            <a:schemeClr val="accent1"/>
-          </a:lnRef>
-          <a:fillRef idx="3">
-            <a:schemeClr val="accent1"/>
-          </a:fillRef>
-          <a:effectRef idx="2">
-            <a:schemeClr val="accent1"/>
-          </a:effectRef>
-          <a:fontRef idx="minor">
-            <a:schemeClr val="lt1"/>
-          </a:fontRef>
-        </p:style>
-        <p:txBody>
-          <a:bodyPr rtlCol="0" anchor="ctr"/>
-          <a:lstStyle/>
-          <a:p>
-            <a:pPr algn="ctr"/>
-          </a:p>
-        </p:txBody>
-      </p:sp>
-      <p:sp>
-        <p:nvSpPr>
-          <p:cNvPr id="32" name="TextBox 31"/>
-          <p:cNvSpPr txBox="1"/>
-          <p:nvPr/>
-        </p:nvSpPr>
-        <p:spPr>
-          <a:xfrm>
-            <a:off x="9966960" y="2551176"/>
-            <a:ext cx="1645920" cy="320040"/>
-          </a:xfrm>
-          <a:prstGeom prst="rect">
-            <a:avLst/>
-          </a:prstGeom>
-          <a:noFill/>
-        </p:spPr>
-        <p:txBody>
-          <a:bodyPr wrap="square" anchor="t" lIns="36576" rIns="36576" tIns="18288" bIns="18288">
-            <a:spAutoFit/>
-          </a:bodyPr>
-          <a:lstStyle/>
-          <a:p>
-            <a:pPr algn="l"/>
-            <a:r>
-              <a:rPr sz="900" b="1" i="0">
-                <a:solidFill>
-                  <a:srgbClr val="6B7280"/>
-                </a:solidFill>
-                <a:latin typeface="Calibri"/>
-              </a:rPr>
-              <a:t>Coeficiente de asimetría</a:t>
-            </a:r>
-          </a:p>
-        </p:txBody>
-      </p:sp>
-      <p:sp>
-        <p:nvSpPr>
-          <p:cNvPr id="33" name="TextBox 32"/>
-          <p:cNvSpPr txBox="1"/>
-          <p:nvPr/>
-        </p:nvSpPr>
-        <p:spPr>
-          <a:xfrm>
-            <a:off x="9966960" y="2825496"/>
-            <a:ext cx="1645920" cy="457200"/>
-          </a:xfrm>
-          <a:prstGeom prst="rect">
-            <a:avLst/>
-          </a:prstGeom>
-          <a:noFill/>
-        </p:spPr>
-        <p:txBody>
-          <a:bodyPr wrap="square" anchor="ctr" lIns="36576" rIns="36576" tIns="18288" bIns="18288">
-            <a:spAutoFit/>
-          </a:bodyPr>
-          <a:lstStyle/>
-          <a:p>
-            <a:pPr algn="l"/>
-            <a:r>
-              <a:rPr sz="1700" b="1" i="0">
-                <a:solidFill>
-                  <a:srgbClr val="1F3864"/>
-                </a:solidFill>
-                <a:latin typeface="Calibri"/>
-              </a:rPr>
-              <a:t>0,69</a:t>
-            </a:r>
-          </a:p>
-        </p:txBody>
-      </p:sp>
-      <p:sp>
-        <p:nvSpPr>
-          <p:cNvPr id="34" name="Rounded Rectangle 33"/>
-          <p:cNvSpPr/>
-          <p:nvPr/>
-        </p:nvSpPr>
-        <p:spPr>
-          <a:xfrm>
-            <a:off x="8001000" y="3465576"/>
-            <a:ext cx="1783080" cy="914400"/>
-          </a:xfrm>
-          <a:prstGeom prst="roundRect">
-            <a:avLst>
-              <a:gd name="adj" fmla="val 5000"/>
-            </a:avLst>
-          </a:prstGeom>
-          <a:solidFill>
-            <a:srgbClr val="FFFFFF"/>
-          </a:solidFill>
-          <a:ln w="9525">
-            <a:solidFill>
-              <a:srgbClr val="E1E6EF"/>
-            </a:solidFill>
-          </a:ln>
-          <a:effectLst>
-            <a:outerShdw blurRad="114300" dist="38100" dir="5400000" algn="t" rotWithShape="0">
-              <a:srgbClr val="0F1F3D">
-                <a:alpha val="18000"/>
-              </a:srgbClr>
-            </a:outerShdw>
-          </a:effectLst>
-        </p:spPr>
-        <p:style>
-          <a:lnRef idx="1">
-            <a:schemeClr val="accent1"/>
-          </a:lnRef>
-          <a:fillRef idx="3">
-            <a:schemeClr val="accent1"/>
-          </a:fillRef>
-          <a:effectRef idx="2">
-            <a:schemeClr val="accent1"/>
-          </a:effectRef>
-          <a:fontRef idx="minor">
-            <a:schemeClr val="lt1"/>
-          </a:fontRef>
-        </p:style>
-        <p:txBody>
-          <a:bodyPr rtlCol="0" anchor="ctr"/>
-          <a:lstStyle/>
-          <a:p>
-            <a:pPr algn="ctr"/>
-          </a:p>
-        </p:txBody>
-      </p:sp>
-      <p:sp>
-        <p:nvSpPr>
-          <p:cNvPr id="35" name="Rectangle 34"/>
-          <p:cNvSpPr/>
-          <p:nvPr/>
-        </p:nvSpPr>
-        <p:spPr>
-          <a:xfrm>
-            <a:off x="8165592" y="3465576"/>
-            <a:ext cx="548640" cy="54864"/>
-          </a:xfrm>
-          <a:prstGeom prst="rect">
-            <a:avLst/>
-          </a:prstGeom>
-          <a:solidFill>
-            <a:srgbClr val="92D050"/>
-          </a:solidFill>
-          <a:ln>
-            <a:noFill/>
-          </a:ln>
-          <a:effectLst/>
-        </p:spPr>
-        <p:style>
-          <a:lnRef idx="1">
-            <a:schemeClr val="accent1"/>
-          </a:lnRef>
-          <a:fillRef idx="3">
-            <a:schemeClr val="accent1"/>
-          </a:fillRef>
-          <a:effectRef idx="2">
-            <a:schemeClr val="accent1"/>
-          </a:effectRef>
-          <a:fontRef idx="minor">
-            <a:schemeClr val="lt1"/>
-          </a:fontRef>
-        </p:style>
-        <p:txBody>
-          <a:bodyPr rtlCol="0" anchor="ctr"/>
-          <a:lstStyle/>
-          <a:p>
-            <a:pPr algn="ctr"/>
-          </a:p>
-        </p:txBody>
-      </p:sp>
-      <p:sp>
-        <p:nvSpPr>
-          <p:cNvPr id="36" name="TextBox 35"/>
-          <p:cNvSpPr txBox="1"/>
-          <p:nvPr/>
-        </p:nvSpPr>
-        <p:spPr>
-          <a:xfrm>
-            <a:off x="8092440" y="3575304"/>
-            <a:ext cx="1645920" cy="320040"/>
-          </a:xfrm>
-          <a:prstGeom prst="rect">
-            <a:avLst/>
-          </a:prstGeom>
-          <a:noFill/>
-        </p:spPr>
-        <p:txBody>
-          <a:bodyPr wrap="square" anchor="t" lIns="36576" rIns="36576" tIns="18288" bIns="18288">
-            <a:spAutoFit/>
-          </a:bodyPr>
-          <a:lstStyle/>
-          <a:p>
-            <a:pPr algn="l"/>
-            <a:r>
-              <a:rPr sz="900" b="1" i="0">
-                <a:solidFill>
-                  <a:srgbClr val="6B7280"/>
-                </a:solidFill>
-                <a:latin typeface="Calibri"/>
-              </a:rPr>
-              <a:t>Límite inferior</a:t>
-            </a:r>
-          </a:p>
-        </p:txBody>
-      </p:sp>
-      <p:sp>
-        <p:nvSpPr>
-          <p:cNvPr id="37" name="TextBox 36"/>
-          <p:cNvSpPr txBox="1"/>
-          <p:nvPr/>
-        </p:nvSpPr>
-        <p:spPr>
-          <a:xfrm>
-            <a:off x="8092440" y="3849624"/>
-            <a:ext cx="1645920" cy="457200"/>
-          </a:xfrm>
-          <a:prstGeom prst="rect">
-            <a:avLst/>
-          </a:prstGeom>
-          <a:noFill/>
-        </p:spPr>
-        <p:txBody>
-          <a:bodyPr wrap="square" anchor="ctr" lIns="36576" rIns="36576" tIns="18288" bIns="18288">
-            <a:spAutoFit/>
-          </a:bodyPr>
-          <a:lstStyle/>
-          <a:p>
-            <a:pPr algn="l"/>
-            <a:r>
-              <a:rPr sz="1700" b="1" i="0">
-                <a:solidFill>
-                  <a:srgbClr val="1F3864"/>
-                </a:solidFill>
-                <a:latin typeface="Calibri"/>
-              </a:rPr>
-              <a:t>$ 13,8 M</a:t>
-            </a:r>
-          </a:p>
-        </p:txBody>
-      </p:sp>
-      <p:sp>
-        <p:nvSpPr>
-          <p:cNvPr id="38" name="Rounded Rectangle 37"/>
-          <p:cNvSpPr/>
-          <p:nvPr/>
-        </p:nvSpPr>
-        <p:spPr>
-          <a:xfrm>
-            <a:off x="9875520" y="3465576"/>
-            <a:ext cx="1783080" cy="914400"/>
-          </a:xfrm>
-          <a:prstGeom prst="roundRect">
-            <a:avLst>
-              <a:gd name="adj" fmla="val 5000"/>
-            </a:avLst>
-          </a:prstGeom>
-          <a:solidFill>
-            <a:srgbClr val="FFFFFF"/>
-          </a:solidFill>
-          <a:ln w="9525">
-            <a:solidFill>
-              <a:srgbClr val="E1E6EF"/>
-            </a:solidFill>
-          </a:ln>
-          <a:effectLst>
-            <a:outerShdw blurRad="114300" dist="38100" dir="5400000" algn="t" rotWithShape="0">
-              <a:srgbClr val="0F1F3D">
-                <a:alpha val="18000"/>
-              </a:srgbClr>
-            </a:outerShdw>
-          </a:effectLst>
-        </p:spPr>
-        <p:style>
-          <a:lnRef idx="1">
-            <a:schemeClr val="accent1"/>
-          </a:lnRef>
-          <a:fillRef idx="3">
-            <a:schemeClr val="accent1"/>
-          </a:fillRef>
-          <a:effectRef idx="2">
-            <a:schemeClr val="accent1"/>
-          </a:effectRef>
-          <a:fontRef idx="minor">
-            <a:schemeClr val="lt1"/>
-          </a:fontRef>
-        </p:style>
-        <p:txBody>
-          <a:bodyPr rtlCol="0" anchor="ctr"/>
-          <a:lstStyle/>
-          <a:p>
-            <a:pPr algn="ctr"/>
-          </a:p>
-        </p:txBody>
-      </p:sp>
-      <p:sp>
-        <p:nvSpPr>
-          <p:cNvPr id="39" name="Rectangle 38"/>
-          <p:cNvSpPr/>
-          <p:nvPr/>
-        </p:nvSpPr>
-        <p:spPr>
-          <a:xfrm>
-            <a:off x="10040112" y="3465576"/>
-            <a:ext cx="548640" cy="54864"/>
-          </a:xfrm>
-          <a:prstGeom prst="rect">
-            <a:avLst/>
-          </a:prstGeom>
-          <a:solidFill>
-            <a:srgbClr val="92D050"/>
-          </a:solidFill>
-          <a:ln>
-            <a:noFill/>
-          </a:ln>
-          <a:effectLst/>
-        </p:spPr>
-        <p:style>
-          <a:lnRef idx="1">
-            <a:schemeClr val="accent1"/>
-          </a:lnRef>
-          <a:fillRef idx="3">
-            <a:schemeClr val="accent1"/>
-          </a:fillRef>
-          <a:effectRef idx="2">
-            <a:schemeClr val="accent1"/>
-          </a:effectRef>
-          <a:fontRef idx="minor">
-            <a:schemeClr val="lt1"/>
-          </a:fontRef>
-        </p:style>
-        <p:txBody>
-          <a:bodyPr rtlCol="0" anchor="ctr"/>
-          <a:lstStyle/>
-          <a:p>
-            <a:pPr algn="ctr"/>
-          </a:p>
-        </p:txBody>
-      </p:sp>
-      <p:sp>
-        <p:nvSpPr>
-          <p:cNvPr id="40" name="TextBox 39"/>
-          <p:cNvSpPr txBox="1"/>
-          <p:nvPr/>
-        </p:nvSpPr>
-        <p:spPr>
-          <a:xfrm>
-            <a:off x="9966960" y="3575304"/>
-            <a:ext cx="1645920" cy="320040"/>
-          </a:xfrm>
-          <a:prstGeom prst="rect">
-            <a:avLst/>
-          </a:prstGeom>
-          <a:noFill/>
-        </p:spPr>
-        <p:txBody>
-          <a:bodyPr wrap="square" anchor="t" lIns="36576" rIns="36576" tIns="18288" bIns="18288">
-            <a:spAutoFit/>
-          </a:bodyPr>
-          <a:lstStyle/>
-          <a:p>
-            <a:pPr algn="l"/>
-            <a:r>
-              <a:rPr sz="900" b="1" i="0">
-                <a:solidFill>
-                  <a:srgbClr val="6B7280"/>
-                </a:solidFill>
-                <a:latin typeface="Calibri"/>
-              </a:rPr>
-              <a:t>Límite superior</a:t>
-            </a:r>
-          </a:p>
-        </p:txBody>
-      </p:sp>
-      <p:sp>
-        <p:nvSpPr>
-          <p:cNvPr id="41" name="TextBox 40"/>
-          <p:cNvSpPr txBox="1"/>
-          <p:nvPr/>
-        </p:nvSpPr>
-        <p:spPr>
-          <a:xfrm>
-            <a:off x="9966960" y="3849624"/>
-            <a:ext cx="1645920" cy="457200"/>
-          </a:xfrm>
-          <a:prstGeom prst="rect">
-            <a:avLst/>
-          </a:prstGeom>
-          <a:noFill/>
-        </p:spPr>
-        <p:txBody>
-          <a:bodyPr wrap="square" anchor="ctr" lIns="36576" rIns="36576" tIns="18288" bIns="18288">
-            <a:spAutoFit/>
-          </a:bodyPr>
-          <a:lstStyle/>
-          <a:p>
-            <a:pPr algn="l"/>
-            <a:r>
-              <a:rPr sz="1700" b="1" i="0">
-                <a:solidFill>
-                  <a:srgbClr val="1F3864"/>
-                </a:solidFill>
-                <a:latin typeface="Calibri"/>
-              </a:rPr>
-              <a:t>$ 885,4 M</a:t>
-            </a:r>
-          </a:p>
-        </p:txBody>
-      </p:sp>
-      <p:sp>
-        <p:nvSpPr>
-          <p:cNvPr id="42" name="Rounded Rectangle 41"/>
-          <p:cNvSpPr/>
-          <p:nvPr/>
-        </p:nvSpPr>
-        <p:spPr>
-          <a:xfrm>
-            <a:off x="8001000" y="4526280"/>
-            <a:ext cx="3657600" cy="1645920"/>
-          </a:xfrm>
-          <a:prstGeom prst="roundRect">
-            <a:avLst>
-              <a:gd name="adj" fmla="val 7000"/>
+              <a:gd name="adj" fmla="val 6000"/>
             </a:avLst>
           </a:prstGeom>
           <a:gradFill rotWithShape="1">
@@ -13959,18 +12819,12 @@
                 <a:srgbClr val="2F5597"/>
               </a:gs>
             </a:gsLst>
-            <a:lin scaled="0" ang="18900000"/>
+            <a:lin scaled="0" ang="18000000"/>
           </a:gradFill>
           <a:ln>
             <a:noFill/>
           </a:ln>
-          <a:effectLst>
-            <a:outerShdw blurRad="114300" dist="38100" dir="5400000" algn="t" rotWithShape="0">
-              <a:srgbClr val="0F1F3D">
-                <a:alpha val="18000"/>
-              </a:srgbClr>
-            </a:outerShdw>
-          </a:effectLst>
+          <a:effectLst/>
         </p:spPr>
         <p:style>
           <a:lnRef idx="1">
@@ -13996,14 +12850,14 @@
       </p:sp>
       <p:sp>
         <p:nvSpPr>
-          <p:cNvPr id="43" name="TextBox 42"/>
+          <p:cNvPr id="15" name="TextBox 14"/>
           <p:cNvSpPr txBox="1"/>
           <p:nvPr/>
         </p:nvSpPr>
         <p:spPr>
           <a:xfrm>
-            <a:off x="8229600" y="4663440"/>
-            <a:ext cx="3291840" cy="274320"/>
+            <a:off x="914400" y="1737360"/>
+            <a:ext cx="2743200" cy="274320"/>
           </a:xfrm>
           <a:prstGeom prst="rect">
             <a:avLst/>
@@ -14018,27 +12872,27 @@
           <a:p>
             <a:pPr algn="l"/>
             <a:r>
-              <a:rPr sz="1000" b="1" i="0" spc="250">
+              <a:rPr sz="1100" b="1" i="0" spc="250">
                 <a:solidFill>
                   <a:srgbClr val="92D050"/>
                 </a:solidFill>
                 <a:latin typeface="Calibri"/>
               </a:rPr>
-              <a:t>VALOR ADOPTADO</a:t>
-            </a:r>
-          </a:p>
-        </p:txBody>
-      </p:sp>
-      <p:sp>
-        <p:nvSpPr>
-          <p:cNvPr id="44" name="TextBox 43"/>
+              <a:t>OFERTA 01</a:t>
+            </a:r>
+          </a:p>
+        </p:txBody>
+      </p:sp>
+      <p:sp>
+        <p:nvSpPr>
+          <p:cNvPr id="16" name="TextBox 15"/>
           <p:cNvSpPr txBox="1"/>
           <p:nvPr/>
         </p:nvSpPr>
         <p:spPr>
           <a:xfrm>
-            <a:off x="8229600" y="4983480"/>
-            <a:ext cx="3291840" cy="731520"/>
+            <a:off x="914400" y="2103120"/>
+            <a:ext cx="2743200" cy="822960"/>
           </a:xfrm>
           <a:prstGeom prst="rect">
             <a:avLst/>
@@ -14053,27 +12907,27 @@
           <a:p>
             <a:pPr algn="l"/>
             <a:r>
-              <a:rPr sz="3600" b="1" i="0">
+              <a:rPr sz="3400" b="1" i="0">
                 <a:solidFill>
                   <a:srgbClr val="FFFFFF"/>
                 </a:solidFill>
                 <a:latin typeface="Calibri"/>
               </a:rPr>
-              <a:t>$ 449,6 M</a:t>
-            </a:r>
-          </a:p>
-        </p:txBody>
-      </p:sp>
-      <p:sp>
-        <p:nvSpPr>
-          <p:cNvPr id="45" name="TextBox 44"/>
+              <a:t>$ 23,4 M</a:t>
+            </a:r>
+          </a:p>
+        </p:txBody>
+      </p:sp>
+      <p:sp>
+        <p:nvSpPr>
+          <p:cNvPr id="17" name="TextBox 16"/>
           <p:cNvSpPr txBox="1"/>
           <p:nvPr/>
         </p:nvSpPr>
         <p:spPr>
           <a:xfrm>
-            <a:off x="8229600" y="5669280"/>
-            <a:ext cx="3291840" cy="365760"/>
+            <a:off x="914400" y="2834640"/>
+            <a:ext cx="2743200" cy="274320"/>
           </a:xfrm>
           <a:prstGeom prst="rect">
             <a:avLst/>
@@ -14094,7 +12948,322 @@
                 </a:solidFill>
                 <a:latin typeface="Calibri"/>
               </a:rPr>
-              <a:t>por hectárea · muestra general</a:t>
+              <a:t>por hectárea (depurado)</a:t>
+            </a:r>
+          </a:p>
+        </p:txBody>
+      </p:sp>
+      <p:sp>
+        <p:nvSpPr>
+          <p:cNvPr id="18" name="TextBox 17"/>
+          <p:cNvSpPr txBox="1"/>
+          <p:nvPr/>
+        </p:nvSpPr>
+        <p:spPr>
+          <a:xfrm>
+            <a:off x="914400" y="3337560"/>
+            <a:ext cx="2743200" cy="274320"/>
+          </a:xfrm>
+          <a:prstGeom prst="rect">
+            <a:avLst/>
+          </a:prstGeom>
+          <a:noFill/>
+        </p:spPr>
+        <p:txBody>
+          <a:bodyPr wrap="square" anchor="t" lIns="36576" rIns="36576" tIns="18288" bIns="18288">
+            <a:spAutoFit/>
+          </a:bodyPr>
+          <a:lstStyle/>
+          <a:p>
+            <a:pPr algn="l"/>
+            <a:r>
+              <a:rPr sz="1100" b="1" i="0">
+                <a:solidFill>
+                  <a:srgbClr val="FFFFFF"/>
+                </a:solidFill>
+                <a:latin typeface="Calibri"/>
+              </a:rPr>
+              <a:t>301,00 ha  ·  pedido $ 7.826 M</a:t>
+            </a:r>
+          </a:p>
+        </p:txBody>
+      </p:sp>
+      <p:sp>
+        <p:nvSpPr>
+          <p:cNvPr id="19" name="TextBox 18"/>
+          <p:cNvSpPr txBox="1"/>
+          <p:nvPr/>
+        </p:nvSpPr>
+        <p:spPr>
+          <a:xfrm>
+            <a:off x="4114800" y="1645920"/>
+            <a:ext cx="7315200" cy="228600"/>
+          </a:xfrm>
+          <a:prstGeom prst="rect">
+            <a:avLst/>
+          </a:prstGeom>
+          <a:noFill/>
+        </p:spPr>
+        <p:txBody>
+          <a:bodyPr wrap="square" anchor="t" lIns="36576" rIns="36576" tIns="18288" bIns="18288">
+            <a:spAutoFit/>
+          </a:bodyPr>
+          <a:lstStyle/>
+          <a:p>
+            <a:pPr algn="l"/>
+            <a:r>
+              <a:rPr sz="900" b="1" i="0" spc="120">
+                <a:solidFill>
+                  <a:srgbClr val="6B7280"/>
+                </a:solidFill>
+                <a:latin typeface="Calibri"/>
+              </a:rPr>
+              <a:t>UBICACIÓN</a:t>
+            </a:r>
+          </a:p>
+        </p:txBody>
+      </p:sp>
+      <p:sp>
+        <p:nvSpPr>
+          <p:cNvPr id="20" name="TextBox 19"/>
+          <p:cNvSpPr txBox="1"/>
+          <p:nvPr/>
+        </p:nvSpPr>
+        <p:spPr>
+          <a:xfrm>
+            <a:off x="4114800" y="1847088"/>
+            <a:ext cx="7406640" cy="548640"/>
+          </a:xfrm>
+          <a:prstGeom prst="rect">
+            <a:avLst/>
+          </a:prstGeom>
+          <a:noFill/>
+        </p:spPr>
+        <p:txBody>
+          <a:bodyPr wrap="square" anchor="t" lIns="36576" rIns="36576" tIns="18288" bIns="18288">
+            <a:spAutoFit/>
+          </a:bodyPr>
+          <a:lstStyle/>
+          <a:p>
+            <a:pPr algn="l"/>
+            <a:r>
+              <a:rPr sz="1200" b="0" i="0">
+                <a:solidFill>
+                  <a:srgbClr val="3A4457"/>
+                </a:solidFill>
+                <a:latin typeface="Calibri"/>
+              </a:rPr>
+              <a:t>Dibulla, sobre Troncal del Caribe, cerca a Ciénaga de Mamavita / La Punta de los Remedios</a:t>
+            </a:r>
+          </a:p>
+        </p:txBody>
+      </p:sp>
+      <p:sp>
+        <p:nvSpPr>
+          <p:cNvPr id="21" name="TextBox 20"/>
+          <p:cNvSpPr txBox="1"/>
+          <p:nvPr/>
+        </p:nvSpPr>
+        <p:spPr>
+          <a:xfrm>
+            <a:off x="4114800" y="2395728"/>
+            <a:ext cx="7315200" cy="228600"/>
+          </a:xfrm>
+          <a:prstGeom prst="rect">
+            <a:avLst/>
+          </a:prstGeom>
+          <a:noFill/>
+        </p:spPr>
+        <p:txBody>
+          <a:bodyPr wrap="square" anchor="t" lIns="36576" rIns="36576" tIns="18288" bIns="18288">
+            <a:spAutoFit/>
+          </a:bodyPr>
+          <a:lstStyle/>
+          <a:p>
+            <a:pPr algn="l"/>
+            <a:r>
+              <a:rPr sz="900" b="1" i="0" spc="120">
+                <a:solidFill>
+                  <a:srgbClr val="6B7280"/>
+                </a:solidFill>
+                <a:latin typeface="Calibri"/>
+              </a:rPr>
+              <a:t>DESCRIPCIÓN</a:t>
+            </a:r>
+          </a:p>
+        </p:txBody>
+      </p:sp>
+      <p:sp>
+        <p:nvSpPr>
+          <p:cNvPr id="22" name="TextBox 21"/>
+          <p:cNvSpPr txBox="1"/>
+          <p:nvPr/>
+        </p:nvSpPr>
+        <p:spPr>
+          <a:xfrm>
+            <a:off x="4114800" y="2596896"/>
+            <a:ext cx="7406640" cy="1143000"/>
+          </a:xfrm>
+          <a:prstGeom prst="rect">
+            <a:avLst/>
+          </a:prstGeom>
+          <a:noFill/>
+        </p:spPr>
+        <p:txBody>
+          <a:bodyPr wrap="square" anchor="t" lIns="36576" rIns="36576" tIns="18288" bIns="18288">
+            <a:spAutoFit/>
+          </a:bodyPr>
+          <a:lstStyle/>
+          <a:p>
+            <a:pPr algn="l"/>
+            <a:r>
+              <a:rPr sz="1200" b="0" i="0">
+                <a:solidFill>
+                  <a:srgbClr val="3A4457"/>
+                </a:solidFill>
+                <a:latin typeface="Calibri"/>
+              </a:rPr>
+              <a:t>Finca agroindustrial y ganadera con potencial turístico, 200 m de frente sobre vía nacional, recursos hídricos abundantes, topografía plana a ondulada, 5 km de la playa y 4 km del casco urbano. Construcciones no detalladas en el anuncio.</a:t>
+            </a:r>
+          </a:p>
+        </p:txBody>
+      </p:sp>
+      <p:sp>
+        <p:nvSpPr>
+          <p:cNvPr id="23" name="TextBox 22"/>
+          <p:cNvSpPr txBox="1"/>
+          <p:nvPr/>
+        </p:nvSpPr>
+        <p:spPr>
+          <a:xfrm>
+            <a:off x="4114800" y="3739896"/>
+            <a:ext cx="7315200" cy="228600"/>
+          </a:xfrm>
+          <a:prstGeom prst="rect">
+            <a:avLst/>
+          </a:prstGeom>
+          <a:noFill/>
+        </p:spPr>
+        <p:txBody>
+          <a:bodyPr wrap="square" anchor="t" lIns="36576" rIns="36576" tIns="18288" bIns="18288">
+            <a:spAutoFit/>
+          </a:bodyPr>
+          <a:lstStyle/>
+          <a:p>
+            <a:pPr algn="l"/>
+            <a:r>
+              <a:rPr sz="900" b="1" i="0" spc="120">
+                <a:solidFill>
+                  <a:srgbClr val="6B7280"/>
+                </a:solidFill>
+                <a:latin typeface="Calibri"/>
+              </a:rPr>
+              <a:t>FUENTE</a:t>
+            </a:r>
+          </a:p>
+        </p:txBody>
+      </p:sp>
+      <p:sp>
+        <p:nvSpPr>
+          <p:cNvPr id="24" name="TextBox 23"/>
+          <p:cNvSpPr txBox="1"/>
+          <p:nvPr/>
+        </p:nvSpPr>
+        <p:spPr>
+          <a:xfrm>
+            <a:off x="4114800" y="3941063"/>
+            <a:ext cx="7406640" cy="548640"/>
+          </a:xfrm>
+          <a:prstGeom prst="rect">
+            <a:avLst/>
+          </a:prstGeom>
+          <a:noFill/>
+        </p:spPr>
+        <p:txBody>
+          <a:bodyPr wrap="square" anchor="t" lIns="36576" rIns="36576" tIns="18288" bIns="18288">
+            <a:spAutoFit/>
+          </a:bodyPr>
+          <a:lstStyle/>
+          <a:p>
+            <a:pPr algn="l"/>
+            <a:r>
+              <a:rPr sz="1200" b="0" i="0">
+                <a:solidFill>
+                  <a:srgbClr val="3A4457"/>
+                </a:solidFill>
+                <a:latin typeface="Calibri"/>
+              </a:rPr>
+              <a:t>Hilton López Inmobiliaria – Luis López Y.M. (cód. 193716709)  ·  publicada 2026-05-06</a:t>
+            </a:r>
+          </a:p>
+        </p:txBody>
+      </p:sp>
+      <p:sp>
+        <p:nvSpPr>
+          <p:cNvPr id="25" name="TextBox 24"/>
+          <p:cNvSpPr txBox="1"/>
+          <p:nvPr/>
+        </p:nvSpPr>
+        <p:spPr>
+          <a:xfrm>
+            <a:off x="4114800" y="4489704"/>
+            <a:ext cx="7315200" cy="228600"/>
+          </a:xfrm>
+          <a:prstGeom prst="rect">
+            <a:avLst/>
+          </a:prstGeom>
+          <a:noFill/>
+        </p:spPr>
+        <p:txBody>
+          <a:bodyPr wrap="square" anchor="t" lIns="36576" rIns="36576" tIns="18288" bIns="18288">
+            <a:spAutoFit/>
+          </a:bodyPr>
+          <a:lstStyle/>
+          <a:p>
+            <a:pPr algn="l"/>
+            <a:r>
+              <a:rPr sz="900" b="1" i="0" spc="120">
+                <a:solidFill>
+                  <a:srgbClr val="6B7280"/>
+                </a:solidFill>
+                <a:latin typeface="Calibri"/>
+              </a:rPr>
+              <a:t>COMPARABILIDAD</a:t>
+            </a:r>
+          </a:p>
+        </p:txBody>
+      </p:sp>
+      <p:sp>
+        <p:nvSpPr>
+          <p:cNvPr id="26" name="TextBox 25"/>
+          <p:cNvSpPr txBox="1"/>
+          <p:nvPr/>
+        </p:nvSpPr>
+        <p:spPr>
+          <a:xfrm>
+            <a:off x="4114800" y="4690872"/>
+            <a:ext cx="7406640" cy="777240"/>
+          </a:xfrm>
+          <a:prstGeom prst="rect">
+            <a:avLst/>
+          </a:prstGeom>
+          <a:noFill/>
+        </p:spPr>
+        <p:txBody>
+          <a:bodyPr wrap="square" anchor="t" lIns="36576" rIns="36576" tIns="18288" bIns="18288">
+            <a:spAutoFit/>
+          </a:bodyPr>
+          <a:lstStyle/>
+          <a:p>
+            <a:pPr algn="l"/>
+            <a:r>
+              <a:rPr sz="1200" b="0" i="0">
+                <a:solidFill>
+                  <a:srgbClr val="3A4457"/>
+                </a:solidFill>
+                <a:latin typeface="Calibri"/>
+              </a:rPr>
+              <a:t>ALTA en uso agropecuario y corredor. Diferencias: tamaño (301 ha) y frente sobre la Troncal.</a:t>
             </a:r>
           </a:p>
         </p:txBody>
@@ -14348,7 +13517,7 @@
                 </a:solidFill>
                 <a:latin typeface="Calibri"/>
               </a:rPr>
-              <a:t>COMBINACIONES</a:t>
+              <a:t>DEPURACIÓN</a:t>
             </a:r>
           </a:p>
         </p:txBody>
@@ -14383,7 +13552,7 @@
                 </a:solidFill>
                 <a:latin typeface="Calibri"/>
               </a:rPr>
-              <a:t>Combinaciones de ofertas</a:t>
+              <a:t>Ofertas revisadas y descartadas</a:t>
             </a:r>
           </a:p>
         </p:txBody>
@@ -14418,7 +13587,7 @@
                 </a:solidFill>
                 <a:latin typeface="Calibri"/>
               </a:rPr>
-              <a:t>Grupos de 3 o más ofertas · CV máximo admisible 10 % (Res. 941)</a:t>
+              <a:t>Criterios por los cuales no se incluyeron en el valor adoptado</a:t>
             </a:r>
           </a:p>
         </p:txBody>
@@ -14545,8 +13714,8 @@
         </p:nvSpPr>
         <p:spPr>
           <a:xfrm>
-            <a:off x="548640" y="1463040"/>
-            <a:ext cx="3550920" cy="3063240"/>
+            <a:off x="548640" y="1417320"/>
+            <a:ext cx="11109960" cy="4754880"/>
           </a:xfrm>
           <a:prstGeom prst="roundRect">
             <a:avLst>
@@ -14599,14 +13768,14 @@
         </p:nvSpPr>
         <p:spPr>
           <a:xfrm>
-            <a:off x="713232" y="1463040"/>
-            <a:ext cx="548640" cy="54864"/>
+            <a:off x="685800" y="1508760"/>
+            <a:ext cx="10835640" cy="566928"/>
           </a:xfrm>
           <a:prstGeom prst="rect">
             <a:avLst/>
           </a:prstGeom>
           <a:solidFill>
-            <a:srgbClr val="92D050"/>
+            <a:srgbClr val="F7F9FC"/>
           </a:solidFill>
           <a:ln>
             <a:noFill/>
@@ -14637,127 +13806,20 @@
       </p:sp>
       <p:sp>
         <p:nvSpPr>
-          <p:cNvPr id="14" name="TextBox 13"/>
-          <p:cNvSpPr txBox="1"/>
-          <p:nvPr/>
-        </p:nvSpPr>
-        <p:spPr>
-          <a:xfrm>
-            <a:off x="731520" y="1600200"/>
-            <a:ext cx="1904999" cy="365760"/>
-          </a:xfrm>
-          <a:prstGeom prst="rect">
-            <a:avLst/>
-          </a:prstGeom>
-          <a:noFill/>
-        </p:spPr>
-        <p:txBody>
-          <a:bodyPr wrap="square" anchor="t" lIns="36576" rIns="36576" tIns="18288" bIns="18288">
-            <a:spAutoFit/>
-          </a:bodyPr>
-          <a:lstStyle/>
-          <a:p>
-            <a:pPr algn="l"/>
-            <a:r>
-              <a:rPr sz="1600" b="1" i="0">
-                <a:solidFill>
-                  <a:srgbClr val="1F3864"/>
-                </a:solidFill>
-                <a:latin typeface="Calibri"/>
-              </a:rPr>
-              <a:t>Combinación 1</a:t>
-            </a:r>
-          </a:p>
-        </p:txBody>
-      </p:sp>
-      <p:sp>
-        <p:nvSpPr>
-          <p:cNvPr id="15" name="TextBox 14"/>
-          <p:cNvSpPr txBox="1"/>
-          <p:nvPr/>
-        </p:nvSpPr>
-        <p:spPr>
-          <a:xfrm>
-            <a:off x="731520" y="2011680"/>
-            <a:ext cx="3185160" cy="274320"/>
-          </a:xfrm>
-          <a:prstGeom prst="rect">
-            <a:avLst/>
-          </a:prstGeom>
-          <a:noFill/>
-        </p:spPr>
-        <p:txBody>
-          <a:bodyPr wrap="square" anchor="t" lIns="36576" rIns="36576" tIns="18288" bIns="18288">
-            <a:spAutoFit/>
-          </a:bodyPr>
-          <a:lstStyle/>
-          <a:p>
-            <a:pPr algn="l"/>
-            <a:r>
-              <a:rPr sz="1000" b="1" i="0" spc="100">
-                <a:solidFill>
-                  <a:srgbClr val="6B7280"/>
-                </a:solidFill>
-                <a:latin typeface="Calibri"/>
-              </a:rPr>
-              <a:t>OFERTAS: 3, 4, 6</a:t>
-            </a:r>
-          </a:p>
-        </p:txBody>
-      </p:sp>
-      <p:sp>
-        <p:nvSpPr>
-          <p:cNvPr id="16" name="TextBox 15"/>
-          <p:cNvSpPr txBox="1"/>
-          <p:nvPr/>
-        </p:nvSpPr>
-        <p:spPr>
-          <a:xfrm>
-            <a:off x="731520" y="2331720"/>
-            <a:ext cx="2194560" cy="822960"/>
-          </a:xfrm>
-          <a:prstGeom prst="rect">
-            <a:avLst/>
-          </a:prstGeom>
-          <a:noFill/>
-        </p:spPr>
-        <p:txBody>
-          <a:bodyPr wrap="square" anchor="t" lIns="36576" rIns="36576" tIns="18288" bIns="18288">
-            <a:spAutoFit/>
-          </a:bodyPr>
-          <a:lstStyle/>
-          <a:p>
-            <a:pPr algn="l"/>
-            <a:r>
-              <a:rPr sz="3600" b="1" i="0">
-                <a:solidFill>
-                  <a:srgbClr val="C0392B"/>
-                </a:solidFill>
-                <a:latin typeface="Calibri"/>
-              </a:rPr>
-              <a:t>18,9 %</a:t>
-            </a:r>
-          </a:p>
-        </p:txBody>
-      </p:sp>
-      <p:sp>
-        <p:nvSpPr>
-          <p:cNvPr id="17" name="Rounded Rectangle 16"/>
+          <p:cNvPr id="14" name="Oval 13"/>
           <p:cNvSpPr/>
           <p:nvPr/>
         </p:nvSpPr>
         <p:spPr>
           <a:xfrm>
-            <a:off x="2819400" y="2606040"/>
-            <a:ext cx="1097280" cy="310896"/>
-          </a:xfrm>
-          <a:prstGeom prst="roundRect">
-            <a:avLst>
-              <a:gd name="adj" fmla="val 50000"/>
-            </a:avLst>
+            <a:off x="822960" y="1609344"/>
+            <a:ext cx="365760" cy="365760"/>
+          </a:xfrm>
+          <a:prstGeom prst="ellipse">
+            <a:avLst/>
           </a:prstGeom>
           <a:solidFill>
-            <a:srgbClr val="C0392B"/>
+            <a:srgbClr val="BFBFBF"/>
           </a:solidFill>
           <a:ln>
             <a:noFill/>
@@ -14784,35 +13846,138 @@
           <a:p>
             <a:pPr algn="ctr"/>
             <a:r>
-              <a:rPr sz="900" b="1">
-                <a:solidFill>
-                  <a:srgbClr val="FFFFFF"/>
-                </a:solidFill>
-                <a:latin typeface="Calibri"/>
-              </a:rPr>
-              <a:t>NO CUMPLE</a:t>
-            </a:r>
-          </a:p>
-        </p:txBody>
-      </p:sp>
-      <p:sp>
-        <p:nvSpPr>
-          <p:cNvPr id="18" name="Rounded Rectangle 17"/>
+              <a:rPr sz="1200" b="1">
+                <a:solidFill>
+                  <a:srgbClr val="1F3864"/>
+                </a:solidFill>
+                <a:latin typeface="Calibri"/>
+              </a:rPr>
+              <a:t>2</a:t>
+            </a:r>
+          </a:p>
+        </p:txBody>
+      </p:sp>
+      <p:sp>
+        <p:nvSpPr>
+          <p:cNvPr id="15" name="TextBox 14"/>
+          <p:cNvSpPr txBox="1"/>
+          <p:nvPr/>
+        </p:nvSpPr>
+        <p:spPr>
+          <a:xfrm>
+            <a:off x="1371600" y="1508760"/>
+            <a:ext cx="3931920" cy="566928"/>
+          </a:xfrm>
+          <a:prstGeom prst="rect">
+            <a:avLst/>
+          </a:prstGeom>
+          <a:noFill/>
+        </p:spPr>
+        <p:txBody>
+          <a:bodyPr wrap="square" anchor="ctr" lIns="36576" rIns="36576" tIns="18288" bIns="18288">
+            <a:spAutoFit/>
+          </a:bodyPr>
+          <a:lstStyle/>
+          <a:p>
+            <a:pPr algn="l"/>
+            <a:r>
+              <a:rPr sz="1050" b="1" i="0">
+                <a:solidFill>
+                  <a:srgbClr val="1F3864"/>
+                </a:solidFill>
+                <a:latin typeface="Calibri"/>
+              </a:rPr>
+              <a:t>Camarones II, sector Cachaca 1, Riohacha – frente a vía principal, ~800 m de la…</a:t>
+            </a:r>
+          </a:p>
+        </p:txBody>
+      </p:sp>
+      <p:sp>
+        <p:nvSpPr>
+          <p:cNvPr id="16" name="TextBox 15"/>
+          <p:cNvSpPr txBox="1"/>
+          <p:nvPr/>
+        </p:nvSpPr>
+        <p:spPr>
+          <a:xfrm>
+            <a:off x="5394960" y="1508760"/>
+            <a:ext cx="1371600" cy="566928"/>
+          </a:xfrm>
+          <a:prstGeom prst="rect">
+            <a:avLst/>
+          </a:prstGeom>
+          <a:noFill/>
+        </p:spPr>
+        <p:txBody>
+          <a:bodyPr wrap="square" anchor="ctr" lIns="36576" rIns="36576" tIns="18288" bIns="18288">
+            <a:spAutoFit/>
+          </a:bodyPr>
+          <a:lstStyle/>
+          <a:p>
+            <a:pPr algn="r"/>
+            <a:r>
+              <a:rPr sz="1100" b="1" i="0">
+                <a:solidFill>
+                  <a:srgbClr val="3A4457"/>
+                </a:solidFill>
+                <a:latin typeface="Calibri"/>
+              </a:rPr>
+              <a:t>$ 1.250,0 M/ha</a:t>
+            </a:r>
+          </a:p>
+        </p:txBody>
+      </p:sp>
+      <p:sp>
+        <p:nvSpPr>
+          <p:cNvPr id="17" name="TextBox 16"/>
+          <p:cNvSpPr txBox="1"/>
+          <p:nvPr/>
+        </p:nvSpPr>
+        <p:spPr>
+          <a:xfrm>
+            <a:off x="6949440" y="1508760"/>
+            <a:ext cx="4572000" cy="566928"/>
+          </a:xfrm>
+          <a:prstGeom prst="rect">
+            <a:avLst/>
+          </a:prstGeom>
+          <a:noFill/>
+        </p:spPr>
+        <p:txBody>
+          <a:bodyPr wrap="square" anchor="ctr" lIns="36576" rIns="36576" tIns="18288" bIns="18288">
+            <a:spAutoFit/>
+          </a:bodyPr>
+          <a:lstStyle/>
+          <a:p>
+            <a:pPr algn="l"/>
+            <a:r>
+              <a:rPr sz="1000" b="0" i="0">
+                <a:solidFill>
+                  <a:srgbClr val="3A4457"/>
+                </a:solidFill>
+                <a:latin typeface="Calibri"/>
+              </a:rPr>
+              <a:t>Lote pequeño con frente a vía y vocación comercial/turística; ~$1.389 M/ha, fuera del rango de suelo agropecuario interior.</a:t>
+            </a:r>
+          </a:p>
+        </p:txBody>
+      </p:sp>
+      <p:sp>
+        <p:nvSpPr>
+          <p:cNvPr id="18" name="Oval 17"/>
           <p:cNvSpPr/>
           <p:nvPr/>
         </p:nvSpPr>
         <p:spPr>
           <a:xfrm>
-            <a:off x="731520" y="3310128"/>
-            <a:ext cx="3185160" cy="146304"/>
-          </a:xfrm>
-          <a:prstGeom prst="roundRect">
-            <a:avLst>
-              <a:gd name="adj" fmla="val 50000"/>
-            </a:avLst>
+            <a:off x="822960" y="2176272"/>
+            <a:ext cx="365760" cy="365760"/>
+          </a:xfrm>
+          <a:prstGeom prst="ellipse">
+            <a:avLst/>
           </a:prstGeom>
           <a:solidFill>
-            <a:srgbClr val="D9D9D9"/>
+            <a:srgbClr val="BFBFBF"/>
           </a:solidFill>
           <a:ln>
             <a:noFill/>
@@ -14834,31 +13999,143 @@
           </a:fontRef>
         </p:style>
         <p:txBody>
-          <a:bodyPr rtlCol="0" anchor="ctr"/>
+          <a:bodyPr rtlCol="0" anchor="ctr" lIns="0" rIns="0" tIns="0" bIns="0"/>
           <a:lstStyle/>
           <a:p>
             <a:pPr algn="ctr"/>
-          </a:p>
-        </p:txBody>
-      </p:sp>
-      <p:sp>
-        <p:nvSpPr>
-          <p:cNvPr id="19" name="Rounded Rectangle 18"/>
+            <a:r>
+              <a:rPr sz="1200" b="1">
+                <a:solidFill>
+                  <a:srgbClr val="1F3864"/>
+                </a:solidFill>
+                <a:latin typeface="Calibri"/>
+              </a:rPr>
+              <a:t>3</a:t>
+            </a:r>
+          </a:p>
+        </p:txBody>
+      </p:sp>
+      <p:sp>
+        <p:nvSpPr>
+          <p:cNvPr id="19" name="TextBox 18"/>
+          <p:cNvSpPr txBox="1"/>
+          <p:nvPr/>
+        </p:nvSpPr>
+        <p:spPr>
+          <a:xfrm>
+            <a:off x="1371600" y="2075688"/>
+            <a:ext cx="3931920" cy="566928"/>
+          </a:xfrm>
+          <a:prstGeom prst="rect">
+            <a:avLst/>
+          </a:prstGeom>
+          <a:noFill/>
+        </p:spPr>
+        <p:txBody>
+          <a:bodyPr wrap="square" anchor="ctr" lIns="36576" rIns="36576" tIns="18288" bIns="18288">
+            <a:spAutoFit/>
+          </a:bodyPr>
+          <a:lstStyle/>
+          <a:p>
+            <a:pPr algn="l"/>
+            <a:r>
+              <a:rPr sz="1050" b="1" i="0">
+                <a:solidFill>
+                  <a:srgbClr val="1F3864"/>
+                </a:solidFill>
+                <a:latin typeface="Calibri"/>
+              </a:rPr>
+              <a:t>La Guija, a 5 km de El Retiro, Riohacha (vía destapada)</a:t>
+            </a:r>
+          </a:p>
+        </p:txBody>
+      </p:sp>
+      <p:sp>
+        <p:nvSpPr>
+          <p:cNvPr id="20" name="TextBox 19"/>
+          <p:cNvSpPr txBox="1"/>
+          <p:nvPr/>
+        </p:nvSpPr>
+        <p:spPr>
+          <a:xfrm>
+            <a:off x="5394960" y="2075688"/>
+            <a:ext cx="1371600" cy="566928"/>
+          </a:xfrm>
+          <a:prstGeom prst="rect">
+            <a:avLst/>
+          </a:prstGeom>
+          <a:noFill/>
+        </p:spPr>
+        <p:txBody>
+          <a:bodyPr wrap="square" anchor="ctr" lIns="36576" rIns="36576" tIns="18288" bIns="18288">
+            <a:spAutoFit/>
+          </a:bodyPr>
+          <a:lstStyle/>
+          <a:p>
+            <a:pPr algn="r"/>
+            <a:r>
+              <a:rPr sz="1100" b="1" i="0">
+                <a:solidFill>
+                  <a:srgbClr val="3A4457"/>
+                </a:solidFill>
+                <a:latin typeface="Calibri"/>
+              </a:rPr>
+              <a:t>$ 495,0 M/ha</a:t>
+            </a:r>
+          </a:p>
+        </p:txBody>
+      </p:sp>
+      <p:sp>
+        <p:nvSpPr>
+          <p:cNvPr id="21" name="TextBox 20"/>
+          <p:cNvSpPr txBox="1"/>
+          <p:nvPr/>
+        </p:nvSpPr>
+        <p:spPr>
+          <a:xfrm>
+            <a:off x="6949440" y="2075688"/>
+            <a:ext cx="4572000" cy="566928"/>
+          </a:xfrm>
+          <a:prstGeom prst="rect">
+            <a:avLst/>
+          </a:prstGeom>
+          <a:noFill/>
+        </p:spPr>
+        <p:txBody>
+          <a:bodyPr wrap="square" anchor="ctr" lIns="36576" rIns="36576" tIns="18288" bIns="18288">
+            <a:spAutoFit/>
+          </a:bodyPr>
+          <a:lstStyle/>
+          <a:p>
+            <a:pPr algn="l"/>
+            <a:r>
+              <a:rPr sz="1000" b="0" i="0">
+                <a:solidFill>
+                  <a:srgbClr val="3A4457"/>
+                </a:solidFill>
+                <a:latin typeface="Calibri"/>
+              </a:rPr>
+              <a:t>Vocación campestre de parcelación (~3 viviendas/ha); ~$550 M/ha, no comparable con uso agropecuario.</a:t>
+            </a:r>
+          </a:p>
+        </p:txBody>
+      </p:sp>
+      <p:sp>
+        <p:nvSpPr>
+          <p:cNvPr id="22" name="Rectangle 21"/>
           <p:cNvSpPr/>
           <p:nvPr/>
         </p:nvSpPr>
         <p:spPr>
           <a:xfrm>
-            <a:off x="731520" y="3310128"/>
-            <a:ext cx="1998861" cy="146304"/>
-          </a:xfrm>
-          <a:prstGeom prst="roundRect">
-            <a:avLst>
-              <a:gd name="adj" fmla="val 50000"/>
-            </a:avLst>
+            <a:off x="685800" y="2642615"/>
+            <a:ext cx="10835640" cy="566928"/>
+          </a:xfrm>
+          <a:prstGeom prst="rect">
+            <a:avLst/>
           </a:prstGeom>
           <a:solidFill>
-            <a:srgbClr val="C0392B"/>
+            <a:srgbClr val="F7F9FC"/>
           </a:solidFill>
           <a:ln>
             <a:noFill/>
@@ -14889,20 +14166,20 @@
       </p:sp>
       <p:sp>
         <p:nvSpPr>
-          <p:cNvPr id="20" name="Rectangle 19"/>
+          <p:cNvPr id="23" name="Oval 22"/>
           <p:cNvSpPr/>
           <p:nvPr/>
         </p:nvSpPr>
         <p:spPr>
           <a:xfrm>
-            <a:off x="1777218" y="3264408"/>
-            <a:ext cx="24000" cy="237744"/>
-          </a:xfrm>
-          <a:prstGeom prst="rect">
+            <a:off x="822960" y="2743199"/>
+            <a:ext cx="365760" cy="365760"/>
+          </a:xfrm>
+          <a:prstGeom prst="ellipse">
             <a:avLst/>
           </a:prstGeom>
           <a:solidFill>
-            <a:srgbClr val="37863C"/>
+            <a:srgbClr val="BFBFBF"/>
           </a:solidFill>
           <a:ln>
             <a:noFill/>
@@ -14924,23 +14201,32 @@
           </a:fontRef>
         </p:style>
         <p:txBody>
-          <a:bodyPr rtlCol="0" anchor="ctr"/>
+          <a:bodyPr rtlCol="0" anchor="ctr" lIns="0" rIns="0" tIns="0" bIns="0"/>
           <a:lstStyle/>
           <a:p>
             <a:pPr algn="ctr"/>
-          </a:p>
-        </p:txBody>
-      </p:sp>
-      <p:sp>
-        <p:nvSpPr>
-          <p:cNvPr id="21" name="TextBox 20"/>
+            <a:r>
+              <a:rPr sz="1200" b="1">
+                <a:solidFill>
+                  <a:srgbClr val="1F3864"/>
+                </a:solidFill>
+                <a:latin typeface="Calibri"/>
+              </a:rPr>
+              <a:t>4</a:t>
+            </a:r>
+          </a:p>
+        </p:txBody>
+      </p:sp>
+      <p:sp>
+        <p:nvSpPr>
+          <p:cNvPr id="24" name="TextBox 23"/>
           <p:cNvSpPr txBox="1"/>
           <p:nvPr/>
         </p:nvSpPr>
         <p:spPr>
           <a:xfrm>
-            <a:off x="731520" y="3474720"/>
-            <a:ext cx="3185160" cy="256032"/>
+            <a:off x="1371600" y="2642615"/>
+            <a:ext cx="3931920" cy="566928"/>
           </a:xfrm>
           <a:prstGeom prst="rect">
             <a:avLst/>
@@ -14948,34 +14234,34 @@
           <a:noFill/>
         </p:spPr>
         <p:txBody>
-          <a:bodyPr wrap="square" anchor="t" lIns="36576" rIns="36576" tIns="18288" bIns="18288">
+          <a:bodyPr wrap="square" anchor="ctr" lIns="36576" rIns="36576" tIns="18288" bIns="18288">
             <a:spAutoFit/>
           </a:bodyPr>
           <a:lstStyle/>
           <a:p>
             <a:pPr algn="l"/>
             <a:r>
-              <a:rPr sz="900" b="0" i="0">
-                <a:solidFill>
-                  <a:srgbClr val="37863C"/>
-                </a:solidFill>
-                <a:latin typeface="Calibri"/>
-              </a:rPr>
-              <a:t>│ máximo admisible 10 %</a:t>
-            </a:r>
-          </a:p>
-        </p:txBody>
-      </p:sp>
-      <p:sp>
-        <p:nvSpPr>
-          <p:cNvPr id="22" name="TextBox 21"/>
+              <a:rPr sz="1050" b="1" i="0">
+                <a:solidFill>
+                  <a:srgbClr val="1F3864"/>
+                </a:solidFill>
+                <a:latin typeface="Calibri"/>
+              </a:rPr>
+              <a:t>Riohacha, frente al mar (~40 m de playa)</a:t>
+            </a:r>
+          </a:p>
+        </p:txBody>
+      </p:sp>
+      <p:sp>
+        <p:nvSpPr>
+          <p:cNvPr id="25" name="TextBox 24"/>
           <p:cNvSpPr txBox="1"/>
           <p:nvPr/>
         </p:nvSpPr>
         <p:spPr>
           <a:xfrm>
-            <a:off x="731520" y="3840480"/>
-            <a:ext cx="1645920" cy="256032"/>
+            <a:off x="5394960" y="2642615"/>
+            <a:ext cx="1371600" cy="566928"/>
           </a:xfrm>
           <a:prstGeom prst="rect">
             <a:avLst/>
@@ -14983,34 +14269,34 @@
           <a:noFill/>
         </p:spPr>
         <p:txBody>
-          <a:bodyPr wrap="square" anchor="t" lIns="36576" rIns="36576" tIns="18288" bIns="18288">
+          <a:bodyPr wrap="square" anchor="ctr" lIns="36576" rIns="36576" tIns="18288" bIns="18288">
             <a:spAutoFit/>
           </a:bodyPr>
           <a:lstStyle/>
           <a:p>
-            <a:pPr algn="l"/>
-            <a:r>
-              <a:rPr sz="900" b="1" i="0">
-                <a:solidFill>
-                  <a:srgbClr val="6B7280"/>
-                </a:solidFill>
-                <a:latin typeface="Calibri"/>
-              </a:rPr>
-              <a:t>Promedio $/ha</a:t>
-            </a:r>
-          </a:p>
-        </p:txBody>
-      </p:sp>
-      <p:sp>
-        <p:nvSpPr>
-          <p:cNvPr id="23" name="TextBox 22"/>
+            <a:pPr algn="r"/>
+            <a:r>
+              <a:rPr sz="1100" b="1" i="0">
+                <a:solidFill>
+                  <a:srgbClr val="3A4457"/>
+                </a:solidFill>
+                <a:latin typeface="Calibri"/>
+              </a:rPr>
+              <a:t>$ 675,0 M/ha</a:t>
+            </a:r>
+          </a:p>
+        </p:txBody>
+      </p:sp>
+      <p:sp>
+        <p:nvSpPr>
+          <p:cNvPr id="26" name="TextBox 25"/>
           <p:cNvSpPr txBox="1"/>
           <p:nvPr/>
         </p:nvSpPr>
         <p:spPr>
           <a:xfrm>
-            <a:off x="731520" y="4050791"/>
-            <a:ext cx="1737360" cy="365760"/>
+            <a:off x="6949440" y="2642615"/>
+            <a:ext cx="4572000" cy="566928"/>
           </a:xfrm>
           <a:prstGeom prst="rect">
             <a:avLst/>
@@ -15018,125 +14304,45 @@
           <a:noFill/>
         </p:spPr>
         <p:txBody>
-          <a:bodyPr wrap="square" anchor="t" lIns="36576" rIns="36576" tIns="18288" bIns="18288">
+          <a:bodyPr wrap="square" anchor="ctr" lIns="36576" rIns="36576" tIns="18288" bIns="18288">
             <a:spAutoFit/>
           </a:bodyPr>
           <a:lstStyle/>
           <a:p>
             <a:pPr algn="l"/>
             <a:r>
-              <a:rPr sz="1500" b="1" i="0">
-                <a:solidFill>
-                  <a:srgbClr val="1F3864"/>
-                </a:solidFill>
-                <a:latin typeface="Calibri"/>
-              </a:rPr>
-              <a:t>$ 630,0 M</a:t>
-            </a:r>
-          </a:p>
-        </p:txBody>
-      </p:sp>
-      <p:sp>
-        <p:nvSpPr>
-          <p:cNvPr id="24" name="TextBox 23"/>
-          <p:cNvSpPr txBox="1"/>
-          <p:nvPr/>
-        </p:nvSpPr>
-        <p:spPr>
-          <a:xfrm>
-            <a:off x="2324100" y="3840480"/>
-            <a:ext cx="1645920" cy="256032"/>
-          </a:xfrm>
-          <a:prstGeom prst="rect">
-            <a:avLst/>
-          </a:prstGeom>
-          <a:noFill/>
-        </p:spPr>
-        <p:txBody>
-          <a:bodyPr wrap="square" anchor="t" lIns="36576" rIns="36576" tIns="18288" bIns="18288">
-            <a:spAutoFit/>
-          </a:bodyPr>
-          <a:lstStyle/>
-          <a:p>
-            <a:pPr algn="l"/>
-            <a:r>
-              <a:rPr sz="900" b="1" i="0">
-                <a:solidFill>
-                  <a:srgbClr val="6B7280"/>
-                </a:solidFill>
-                <a:latin typeface="Calibri"/>
-              </a:rPr>
-              <a:t>Desv. estándar</a:t>
-            </a:r>
-          </a:p>
-        </p:txBody>
-      </p:sp>
-      <p:sp>
-        <p:nvSpPr>
-          <p:cNvPr id="25" name="TextBox 24"/>
-          <p:cNvSpPr txBox="1"/>
-          <p:nvPr/>
-        </p:nvSpPr>
-        <p:spPr>
-          <a:xfrm>
-            <a:off x="2324100" y="4050791"/>
-            <a:ext cx="1737360" cy="365760"/>
-          </a:xfrm>
-          <a:prstGeom prst="rect">
-            <a:avLst/>
-          </a:prstGeom>
-          <a:noFill/>
-        </p:spPr>
-        <p:txBody>
-          <a:bodyPr wrap="square" anchor="t" lIns="36576" rIns="36576" tIns="18288" bIns="18288">
-            <a:spAutoFit/>
-          </a:bodyPr>
-          <a:lstStyle/>
-          <a:p>
-            <a:pPr algn="l"/>
-            <a:r>
-              <a:rPr sz="1500" b="1" i="0">
-                <a:solidFill>
-                  <a:srgbClr val="1F3864"/>
-                </a:solidFill>
-                <a:latin typeface="Calibri"/>
-              </a:rPr>
-              <a:t>$ 119,1 M</a:t>
-            </a:r>
-          </a:p>
-        </p:txBody>
-      </p:sp>
-      <p:sp>
-        <p:nvSpPr>
-          <p:cNvPr id="26" name="Rounded Rectangle 25"/>
+              <a:rPr sz="1000" b="0" i="0">
+                <a:solidFill>
+                  <a:srgbClr val="3A4457"/>
+                </a:solidFill>
+                <a:latin typeface="Calibri"/>
+              </a:rPr>
+              <a:t>Frente de playa; mercado turístico costero distinto al del predio.</a:t>
+            </a:r>
+          </a:p>
+        </p:txBody>
+      </p:sp>
+      <p:sp>
+        <p:nvSpPr>
+          <p:cNvPr id="27" name="Oval 26"/>
           <p:cNvSpPr/>
           <p:nvPr/>
         </p:nvSpPr>
         <p:spPr>
           <a:xfrm>
-            <a:off x="4328159" y="1463040"/>
-            <a:ext cx="3550920" cy="3063240"/>
-          </a:xfrm>
-          <a:prstGeom prst="roundRect">
-            <a:avLst>
-              <a:gd name="adj" fmla="val 5000"/>
-            </a:avLst>
+            <a:off x="822960" y="3310127"/>
+            <a:ext cx="365760" cy="365760"/>
+          </a:xfrm>
+          <a:prstGeom prst="ellipse">
+            <a:avLst/>
           </a:prstGeom>
           <a:solidFill>
-            <a:srgbClr val="FFFFFF"/>
+            <a:srgbClr val="BFBFBF"/>
           </a:solidFill>
-          <a:ln w="9525">
-            <a:solidFill>
-              <a:srgbClr val="E1E6EF"/>
-            </a:solidFill>
+          <a:ln>
+            <a:noFill/>
           </a:ln>
-          <a:effectLst>
-            <a:outerShdw blurRad="114300" dist="38100" dir="5400000" algn="t" rotWithShape="0">
-              <a:srgbClr val="0F1F3D">
-                <a:alpha val="18000"/>
-              </a:srgbClr>
-            </a:outerShdw>
-          </a:effectLst>
+          <a:effectLst/>
         </p:spPr>
         <p:style>
           <a:lnRef idx="1">
@@ -15153,29 +14359,143 @@
           </a:fontRef>
         </p:style>
         <p:txBody>
-          <a:bodyPr rtlCol="0" anchor="ctr"/>
+          <a:bodyPr rtlCol="0" anchor="ctr" lIns="0" rIns="0" tIns="0" bIns="0"/>
           <a:lstStyle/>
           <a:p>
             <a:pPr algn="ctr"/>
-          </a:p>
-        </p:txBody>
-      </p:sp>
-      <p:sp>
-        <p:nvSpPr>
-          <p:cNvPr id="27" name="Rectangle 26"/>
+            <a:r>
+              <a:rPr sz="1200" b="1">
+                <a:solidFill>
+                  <a:srgbClr val="1F3864"/>
+                </a:solidFill>
+                <a:latin typeface="Calibri"/>
+              </a:rPr>
+              <a:t>5</a:t>
+            </a:r>
+          </a:p>
+        </p:txBody>
+      </p:sp>
+      <p:sp>
+        <p:nvSpPr>
+          <p:cNvPr id="28" name="TextBox 27"/>
+          <p:cNvSpPr txBox="1"/>
+          <p:nvPr/>
+        </p:nvSpPr>
+        <p:spPr>
+          <a:xfrm>
+            <a:off x="1371600" y="3209544"/>
+            <a:ext cx="3931920" cy="566928"/>
+          </a:xfrm>
+          <a:prstGeom prst="rect">
+            <a:avLst/>
+          </a:prstGeom>
+          <a:noFill/>
+        </p:spPr>
+        <p:txBody>
+          <a:bodyPr wrap="square" anchor="ctr" lIns="36576" rIns="36576" tIns="18288" bIns="18288">
+            <a:spAutoFit/>
+          </a:bodyPr>
+          <a:lstStyle/>
+          <a:p>
+            <a:pPr algn="l"/>
+            <a:r>
+              <a:rPr sz="1050" b="1" i="0">
+                <a:solidFill>
+                  <a:srgbClr val="1F3864"/>
+                </a:solidFill>
+                <a:latin typeface="Calibri"/>
+              </a:rPr>
+              <a:t>Chingale / Mingueo, Dibulla – 250 m de frente de playa</a:t>
+            </a:r>
+          </a:p>
+        </p:txBody>
+      </p:sp>
+      <p:sp>
+        <p:nvSpPr>
+          <p:cNvPr id="29" name="TextBox 28"/>
+          <p:cNvSpPr txBox="1"/>
+          <p:nvPr/>
+        </p:nvSpPr>
+        <p:spPr>
+          <a:xfrm>
+            <a:off x="5394960" y="3209544"/>
+            <a:ext cx="1371600" cy="566928"/>
+          </a:xfrm>
+          <a:prstGeom prst="rect">
+            <a:avLst/>
+          </a:prstGeom>
+          <a:noFill/>
+        </p:spPr>
+        <p:txBody>
+          <a:bodyPr wrap="square" anchor="ctr" lIns="36576" rIns="36576" tIns="18288" bIns="18288">
+            <a:spAutoFit/>
+          </a:bodyPr>
+          <a:lstStyle/>
+          <a:p>
+            <a:pPr algn="r"/>
+            <a:r>
+              <a:rPr sz="1100" b="1" i="0">
+                <a:solidFill>
+                  <a:srgbClr val="3A4457"/>
+                </a:solidFill>
+                <a:latin typeface="Calibri"/>
+              </a:rPr>
+              <a:t>$ 405,0 M/ha</a:t>
+            </a:r>
+          </a:p>
+        </p:txBody>
+      </p:sp>
+      <p:sp>
+        <p:nvSpPr>
+          <p:cNvPr id="30" name="TextBox 29"/>
+          <p:cNvSpPr txBox="1"/>
+          <p:nvPr/>
+        </p:nvSpPr>
+        <p:spPr>
+          <a:xfrm>
+            <a:off x="6949440" y="3209544"/>
+            <a:ext cx="4572000" cy="566928"/>
+          </a:xfrm>
+          <a:prstGeom prst="rect">
+            <a:avLst/>
+          </a:prstGeom>
+          <a:noFill/>
+        </p:spPr>
+        <p:txBody>
+          <a:bodyPr wrap="square" anchor="ctr" lIns="36576" rIns="36576" tIns="18288" bIns="18288">
+            <a:spAutoFit/>
+          </a:bodyPr>
+          <a:lstStyle/>
+          <a:p>
+            <a:pPr algn="l"/>
+            <a:r>
+              <a:rPr sz="1000" b="0" i="0">
+                <a:solidFill>
+                  <a:srgbClr val="3A4457"/>
+                </a:solidFill>
+                <a:latin typeface="Calibri"/>
+              </a:rPr>
+              <a:t>Frente de playa; ~$450 M/ha refleja valor turístico costero.</a:t>
+            </a:r>
+          </a:p>
+        </p:txBody>
+      </p:sp>
+      <p:sp>
+        <p:nvSpPr>
+          <p:cNvPr id="31" name="Rectangle 30"/>
           <p:cNvSpPr/>
           <p:nvPr/>
         </p:nvSpPr>
         <p:spPr>
           <a:xfrm>
-            <a:off x="4492751" y="1463040"/>
-            <a:ext cx="548640" cy="54864"/>
+            <a:off x="685800" y="3776472"/>
+            <a:ext cx="10835640" cy="566928"/>
           </a:xfrm>
           <a:prstGeom prst="rect">
             <a:avLst/>
           </a:prstGeom>
           <a:solidFill>
-            <a:srgbClr val="92D050"/>
+            <a:srgbClr val="F7F9FC"/>
           </a:solidFill>
           <a:ln>
             <a:noFill/>
@@ -15206,127 +14526,20 @@
       </p:sp>
       <p:sp>
         <p:nvSpPr>
-          <p:cNvPr id="28" name="TextBox 27"/>
-          <p:cNvSpPr txBox="1"/>
-          <p:nvPr/>
-        </p:nvSpPr>
-        <p:spPr>
-          <a:xfrm>
-            <a:off x="4511039" y="1600200"/>
-            <a:ext cx="1904999" cy="365760"/>
-          </a:xfrm>
-          <a:prstGeom prst="rect">
-            <a:avLst/>
-          </a:prstGeom>
-          <a:noFill/>
-        </p:spPr>
-        <p:txBody>
-          <a:bodyPr wrap="square" anchor="t" lIns="36576" rIns="36576" tIns="18288" bIns="18288">
-            <a:spAutoFit/>
-          </a:bodyPr>
-          <a:lstStyle/>
-          <a:p>
-            <a:pPr algn="l"/>
-            <a:r>
-              <a:rPr sz="1600" b="1" i="0">
-                <a:solidFill>
-                  <a:srgbClr val="1F3864"/>
-                </a:solidFill>
-                <a:latin typeface="Calibri"/>
-              </a:rPr>
-              <a:t>Combinación 2</a:t>
-            </a:r>
-          </a:p>
-        </p:txBody>
-      </p:sp>
-      <p:sp>
-        <p:nvSpPr>
-          <p:cNvPr id="29" name="TextBox 28"/>
-          <p:cNvSpPr txBox="1"/>
-          <p:nvPr/>
-        </p:nvSpPr>
-        <p:spPr>
-          <a:xfrm>
-            <a:off x="4511039" y="2011680"/>
-            <a:ext cx="3185160" cy="274320"/>
-          </a:xfrm>
-          <a:prstGeom prst="rect">
-            <a:avLst/>
-          </a:prstGeom>
-          <a:noFill/>
-        </p:spPr>
-        <p:txBody>
-          <a:bodyPr wrap="square" anchor="t" lIns="36576" rIns="36576" tIns="18288" bIns="18288">
-            <a:spAutoFit/>
-          </a:bodyPr>
-          <a:lstStyle/>
-          <a:p>
-            <a:pPr algn="l"/>
-            <a:r>
-              <a:rPr sz="1000" b="1" i="0" spc="100">
-                <a:solidFill>
-                  <a:srgbClr val="6B7280"/>
-                </a:solidFill>
-                <a:latin typeface="Calibri"/>
-              </a:rPr>
-              <a:t>OFERTAS: 5, 3, 4, 6</a:t>
-            </a:r>
-          </a:p>
-        </p:txBody>
-      </p:sp>
-      <p:sp>
-        <p:nvSpPr>
-          <p:cNvPr id="30" name="TextBox 29"/>
-          <p:cNvSpPr txBox="1"/>
-          <p:nvPr/>
-        </p:nvSpPr>
-        <p:spPr>
-          <a:xfrm>
-            <a:off x="4511039" y="2331720"/>
-            <a:ext cx="2194560" cy="822960"/>
-          </a:xfrm>
-          <a:prstGeom prst="rect">
-            <a:avLst/>
-          </a:prstGeom>
-          <a:noFill/>
-        </p:spPr>
-        <p:txBody>
-          <a:bodyPr wrap="square" anchor="t" lIns="36576" rIns="36576" tIns="18288" bIns="18288">
-            <a:spAutoFit/>
-          </a:bodyPr>
-          <a:lstStyle/>
-          <a:p>
-            <a:pPr algn="l"/>
-            <a:r>
-              <a:rPr sz="3600" b="1" i="0">
-                <a:solidFill>
-                  <a:srgbClr val="C0392B"/>
-                </a:solidFill>
-                <a:latin typeface="Calibri"/>
-              </a:rPr>
-              <a:t>25,9 %</a:t>
-            </a:r>
-          </a:p>
-        </p:txBody>
-      </p:sp>
-      <p:sp>
-        <p:nvSpPr>
-          <p:cNvPr id="31" name="Rounded Rectangle 30"/>
+          <p:cNvPr id="32" name="Oval 31"/>
           <p:cNvSpPr/>
           <p:nvPr/>
         </p:nvSpPr>
         <p:spPr>
           <a:xfrm>
-            <a:off x="6598919" y="2606040"/>
-            <a:ext cx="1097280" cy="310896"/>
-          </a:xfrm>
-          <a:prstGeom prst="roundRect">
-            <a:avLst>
-              <a:gd name="adj" fmla="val 50000"/>
-            </a:avLst>
+            <a:off x="822960" y="3877055"/>
+            <a:ext cx="365760" cy="365760"/>
+          </a:xfrm>
+          <a:prstGeom prst="ellipse">
+            <a:avLst/>
           </a:prstGeom>
           <a:solidFill>
-            <a:srgbClr val="C0392B"/>
+            <a:srgbClr val="BFBFBF"/>
           </a:solidFill>
           <a:ln>
             <a:noFill/>
@@ -15353,35 +14566,138 @@
           <a:p>
             <a:pPr algn="ctr"/>
             <a:r>
-              <a:rPr sz="900" b="1">
-                <a:solidFill>
-                  <a:srgbClr val="FFFFFF"/>
-                </a:solidFill>
-                <a:latin typeface="Calibri"/>
-              </a:rPr>
-              <a:t>NO CUMPLE</a:t>
-            </a:r>
-          </a:p>
-        </p:txBody>
-      </p:sp>
-      <p:sp>
-        <p:nvSpPr>
-          <p:cNvPr id="32" name="Rounded Rectangle 31"/>
+              <a:rPr sz="1200" b="1">
+                <a:solidFill>
+                  <a:srgbClr val="1F3864"/>
+                </a:solidFill>
+                <a:latin typeface="Calibri"/>
+              </a:rPr>
+              <a:t>6</a:t>
+            </a:r>
+          </a:p>
+        </p:txBody>
+      </p:sp>
+      <p:sp>
+        <p:nvSpPr>
+          <p:cNvPr id="33" name="TextBox 32"/>
+          <p:cNvSpPr txBox="1"/>
+          <p:nvPr/>
+        </p:nvSpPr>
+        <p:spPr>
+          <a:xfrm>
+            <a:off x="1371600" y="3776472"/>
+            <a:ext cx="3931920" cy="566928"/>
+          </a:xfrm>
+          <a:prstGeom prst="rect">
+            <a:avLst/>
+          </a:prstGeom>
+          <a:noFill/>
+        </p:spPr>
+        <p:txBody>
+          <a:bodyPr wrap="square" anchor="ctr" lIns="36576" rIns="36576" tIns="18288" bIns="18288">
+            <a:spAutoFit/>
+          </a:bodyPr>
+          <a:lstStyle/>
+          <a:p>
+            <a:pPr algn="l"/>
+            <a:r>
+              <a:rPr sz="1050" b="1" i="0">
+                <a:solidFill>
+                  <a:srgbClr val="1F3864"/>
+                </a:solidFill>
+                <a:latin typeface="Calibri"/>
+              </a:rPr>
+              <a:t>Palomino, Dibulla – 25 m de frente de playa × 400 m</a:t>
+            </a:r>
+          </a:p>
+        </p:txBody>
+      </p:sp>
+      <p:sp>
+        <p:nvSpPr>
+          <p:cNvPr id="34" name="TextBox 33"/>
+          <p:cNvSpPr txBox="1"/>
+          <p:nvPr/>
+        </p:nvSpPr>
+        <p:spPr>
+          <a:xfrm>
+            <a:off x="5394960" y="3776472"/>
+            <a:ext cx="1371600" cy="566928"/>
+          </a:xfrm>
+          <a:prstGeom prst="rect">
+            <a:avLst/>
+          </a:prstGeom>
+          <a:noFill/>
+        </p:spPr>
+        <p:txBody>
+          <a:bodyPr wrap="square" anchor="ctr" lIns="36576" rIns="36576" tIns="18288" bIns="18288">
+            <a:spAutoFit/>
+          </a:bodyPr>
+          <a:lstStyle/>
+          <a:p>
+            <a:pPr algn="r"/>
+            <a:r>
+              <a:rPr sz="1100" b="1" i="0">
+                <a:solidFill>
+                  <a:srgbClr val="3A4457"/>
+                </a:solidFill>
+                <a:latin typeface="Calibri"/>
+              </a:rPr>
+              <a:t>$ 720,0 M/ha</a:t>
+            </a:r>
+          </a:p>
+        </p:txBody>
+      </p:sp>
+      <p:sp>
+        <p:nvSpPr>
+          <p:cNvPr id="35" name="TextBox 34"/>
+          <p:cNvSpPr txBox="1"/>
+          <p:nvPr/>
+        </p:nvSpPr>
+        <p:spPr>
+          <a:xfrm>
+            <a:off x="6949440" y="3776472"/>
+            <a:ext cx="4572000" cy="566928"/>
+          </a:xfrm>
+          <a:prstGeom prst="rect">
+            <a:avLst/>
+          </a:prstGeom>
+          <a:noFill/>
+        </p:spPr>
+        <p:txBody>
+          <a:bodyPr wrap="square" anchor="ctr" lIns="36576" rIns="36576" tIns="18288" bIns="18288">
+            <a:spAutoFit/>
+          </a:bodyPr>
+          <a:lstStyle/>
+          <a:p>
+            <a:pPr algn="l"/>
+            <a:r>
+              <a:rPr sz="1000" b="0" i="0">
+                <a:solidFill>
+                  <a:srgbClr val="3A4457"/>
+                </a:solidFill>
+                <a:latin typeface="Calibri"/>
+              </a:rPr>
+              <a:t>Frente de playa en el polo turístico de Palomino.</a:t>
+            </a:r>
+          </a:p>
+        </p:txBody>
+      </p:sp>
+      <p:sp>
+        <p:nvSpPr>
+          <p:cNvPr id="36" name="Oval 35"/>
           <p:cNvSpPr/>
           <p:nvPr/>
         </p:nvSpPr>
         <p:spPr>
           <a:xfrm>
-            <a:off x="4511039" y="3310128"/>
-            <a:ext cx="3185160" cy="146304"/>
-          </a:xfrm>
-          <a:prstGeom prst="roundRect">
-            <a:avLst>
-              <a:gd name="adj" fmla="val 50000"/>
-            </a:avLst>
+            <a:off x="822960" y="4443983"/>
+            <a:ext cx="365760" cy="365760"/>
+          </a:xfrm>
+          <a:prstGeom prst="ellipse">
+            <a:avLst/>
           </a:prstGeom>
           <a:solidFill>
-            <a:srgbClr val="D9D9D9"/>
+            <a:srgbClr val="BFBFBF"/>
           </a:solidFill>
           <a:ln>
             <a:noFill/>
@@ -15403,31 +14719,143 @@
           </a:fontRef>
         </p:style>
         <p:txBody>
-          <a:bodyPr rtlCol="0" anchor="ctr"/>
+          <a:bodyPr rtlCol="0" anchor="ctr" lIns="0" rIns="0" tIns="0" bIns="0"/>
           <a:lstStyle/>
           <a:p>
             <a:pPr algn="ctr"/>
-          </a:p>
-        </p:txBody>
-      </p:sp>
-      <p:sp>
-        <p:nvSpPr>
-          <p:cNvPr id="33" name="Rounded Rectangle 32"/>
+            <a:r>
+              <a:rPr sz="1200" b="1">
+                <a:solidFill>
+                  <a:srgbClr val="1F3864"/>
+                </a:solidFill>
+                <a:latin typeface="Calibri"/>
+              </a:rPr>
+              <a:t>7</a:t>
+            </a:r>
+          </a:p>
+        </p:txBody>
+      </p:sp>
+      <p:sp>
+        <p:nvSpPr>
+          <p:cNvPr id="37" name="TextBox 36"/>
+          <p:cNvSpPr txBox="1"/>
+          <p:nvPr/>
+        </p:nvSpPr>
+        <p:spPr>
+          <a:xfrm>
+            <a:off x="1371600" y="4343400"/>
+            <a:ext cx="3931920" cy="566928"/>
+          </a:xfrm>
+          <a:prstGeom prst="rect">
+            <a:avLst/>
+          </a:prstGeom>
+          <a:noFill/>
+        </p:spPr>
+        <p:txBody>
+          <a:bodyPr wrap="square" anchor="ctr" lIns="36576" rIns="36576" tIns="18288" bIns="18288">
+            <a:spAutoFit/>
+          </a:bodyPr>
+          <a:lstStyle/>
+          <a:p>
+            <a:pPr algn="l"/>
+            <a:r>
+              <a:rPr sz="1050" b="1" i="0">
+                <a:solidFill>
+                  <a:srgbClr val="1F3864"/>
+                </a:solidFill>
+                <a:latin typeface="Calibri"/>
+              </a:rPr>
+              <a:t>Estribaciones Sierra Nevada, Riohacha – 10 min del mar, riego en 12 ha, 2 casas</a:t>
+            </a:r>
+          </a:p>
+        </p:txBody>
+      </p:sp>
+      <p:sp>
+        <p:nvSpPr>
+          <p:cNvPr id="38" name="TextBox 37"/>
+          <p:cNvSpPr txBox="1"/>
+          <p:nvPr/>
+        </p:nvSpPr>
+        <p:spPr>
+          <a:xfrm>
+            <a:off x="5394960" y="4343400"/>
+            <a:ext cx="1371600" cy="566928"/>
+          </a:xfrm>
+          <a:prstGeom prst="rect">
+            <a:avLst/>
+          </a:prstGeom>
+          <a:noFill/>
+        </p:spPr>
+        <p:txBody>
+          <a:bodyPr wrap="square" anchor="ctr" lIns="36576" rIns="36576" tIns="18288" bIns="18288">
+            <a:spAutoFit/>
+          </a:bodyPr>
+          <a:lstStyle/>
+          <a:p>
+            <a:pPr algn="r"/>
+            <a:r>
+              <a:rPr sz="1100" b="1" i="0">
+                <a:solidFill>
+                  <a:srgbClr val="3A4457"/>
+                </a:solidFill>
+                <a:latin typeface="Calibri"/>
+              </a:rPr>
+              <a:t>$ 27,0 M/ha</a:t>
+            </a:r>
+          </a:p>
+        </p:txBody>
+      </p:sp>
+      <p:sp>
+        <p:nvSpPr>
+          <p:cNvPr id="39" name="TextBox 38"/>
+          <p:cNvSpPr txBox="1"/>
+          <p:nvPr/>
+        </p:nvSpPr>
+        <p:spPr>
+          <a:xfrm>
+            <a:off x="6949440" y="4343400"/>
+            <a:ext cx="4572000" cy="566928"/>
+          </a:xfrm>
+          <a:prstGeom prst="rect">
+            <a:avLst/>
+          </a:prstGeom>
+          <a:noFill/>
+        </p:spPr>
+        <p:txBody>
+          <a:bodyPr wrap="square" anchor="ctr" lIns="36576" rIns="36576" tIns="18288" bIns="18288">
+            <a:spAutoFit/>
+          </a:bodyPr>
+          <a:lstStyle/>
+          <a:p>
+            <a:pPr algn="l"/>
+            <a:r>
+              <a:rPr sz="1000" b="0" i="0">
+                <a:solidFill>
+                  <a:srgbClr val="3A4457"/>
+                </a:solidFill>
+                <a:latin typeface="Calibri"/>
+              </a:rPr>
+              <a:t>Comparable en uso (~$30 M/ha), pero el anuncio es de 2019 y figura como NO DISPONIBLE. Solo referencia histórica.</a:t>
+            </a:r>
+          </a:p>
+        </p:txBody>
+      </p:sp>
+      <p:sp>
+        <p:nvSpPr>
+          <p:cNvPr id="40" name="Rectangle 39"/>
           <p:cNvSpPr/>
           <p:nvPr/>
         </p:nvSpPr>
         <p:spPr>
           <a:xfrm>
-            <a:off x="4511039" y="3310128"/>
-            <a:ext cx="2740921" cy="146304"/>
-          </a:xfrm>
-          <a:prstGeom prst="roundRect">
-            <a:avLst>
-              <a:gd name="adj" fmla="val 50000"/>
-            </a:avLst>
+            <a:off x="685800" y="4910327"/>
+            <a:ext cx="10835640" cy="566928"/>
+          </a:xfrm>
+          <a:prstGeom prst="rect">
+            <a:avLst/>
           </a:prstGeom>
           <a:solidFill>
-            <a:srgbClr val="C0392B"/>
+            <a:srgbClr val="F7F9FC"/>
           </a:solidFill>
           <a:ln>
             <a:noFill/>
@@ -15458,20 +14886,20 @@
       </p:sp>
       <p:sp>
         <p:nvSpPr>
-          <p:cNvPr id="34" name="Rectangle 33"/>
+          <p:cNvPr id="41" name="Oval 40"/>
           <p:cNvSpPr/>
           <p:nvPr/>
         </p:nvSpPr>
         <p:spPr>
           <a:xfrm>
-            <a:off x="5556737" y="3264408"/>
-            <a:ext cx="24000" cy="237744"/>
-          </a:xfrm>
-          <a:prstGeom prst="rect">
+            <a:off x="822960" y="5010911"/>
+            <a:ext cx="365760" cy="365760"/>
+          </a:xfrm>
+          <a:prstGeom prst="ellipse">
             <a:avLst/>
           </a:prstGeom>
           <a:solidFill>
-            <a:srgbClr val="37863C"/>
+            <a:srgbClr val="BFBFBF"/>
           </a:solidFill>
           <a:ln>
             <a:noFill/>
@@ -15493,23 +14921,32 @@
           </a:fontRef>
         </p:style>
         <p:txBody>
-          <a:bodyPr rtlCol="0" anchor="ctr"/>
+          <a:bodyPr rtlCol="0" anchor="ctr" lIns="0" rIns="0" tIns="0" bIns="0"/>
           <a:lstStyle/>
           <a:p>
             <a:pPr algn="ctr"/>
-          </a:p>
-        </p:txBody>
-      </p:sp>
-      <p:sp>
-        <p:nvSpPr>
-          <p:cNvPr id="35" name="TextBox 34"/>
+            <a:r>
+              <a:rPr sz="1200" b="1">
+                <a:solidFill>
+                  <a:srgbClr val="1F3864"/>
+                </a:solidFill>
+                <a:latin typeface="Calibri"/>
+              </a:rPr>
+              <a:t>8</a:t>
+            </a:r>
+          </a:p>
+        </p:txBody>
+      </p:sp>
+      <p:sp>
+        <p:nvSpPr>
+          <p:cNvPr id="42" name="TextBox 41"/>
           <p:cNvSpPr txBox="1"/>
           <p:nvPr/>
         </p:nvSpPr>
         <p:spPr>
           <a:xfrm>
-            <a:off x="4511039" y="3474720"/>
-            <a:ext cx="3185160" cy="256032"/>
+            <a:off x="1371600" y="4910327"/>
+            <a:ext cx="3931920" cy="566928"/>
           </a:xfrm>
           <a:prstGeom prst="rect">
             <a:avLst/>
@@ -15517,34 +14954,34 @@
           <a:noFill/>
         </p:spPr>
         <p:txBody>
-          <a:bodyPr wrap="square" anchor="t" lIns="36576" rIns="36576" tIns="18288" bIns="18288">
+          <a:bodyPr wrap="square" anchor="ctr" lIns="36576" rIns="36576" tIns="18288" bIns="18288">
             <a:spAutoFit/>
           </a:bodyPr>
           <a:lstStyle/>
           <a:p>
             <a:pPr algn="l"/>
             <a:r>
-              <a:rPr sz="900" b="0" i="0">
-                <a:solidFill>
-                  <a:srgbClr val="37863C"/>
-                </a:solidFill>
-                <a:latin typeface="Calibri"/>
-              </a:rPr>
-              <a:t>│ máximo admisible 10 %</a:t>
-            </a:r>
-          </a:p>
-        </p:txBody>
-      </p:sp>
-      <p:sp>
-        <p:nvSpPr>
-          <p:cNvPr id="36" name="TextBox 35"/>
+              <a:rPr sz="1050" b="1" i="0">
+                <a:solidFill>
+                  <a:srgbClr val="1F3864"/>
+                </a:solidFill>
+                <a:latin typeface="Calibri"/>
+              </a:rPr>
+              <a:t>Riohacha – "lotes para proyectos turísticos", mínimo 50 ha</a:t>
+            </a:r>
+          </a:p>
+        </p:txBody>
+      </p:sp>
+      <p:sp>
+        <p:nvSpPr>
+          <p:cNvPr id="43" name="TextBox 42"/>
           <p:cNvSpPr txBox="1"/>
           <p:nvPr/>
         </p:nvSpPr>
         <p:spPr>
           <a:xfrm>
-            <a:off x="4511039" y="3840480"/>
-            <a:ext cx="1645920" cy="256032"/>
+            <a:off x="5394960" y="4910327"/>
+            <a:ext cx="1371600" cy="566928"/>
           </a:xfrm>
           <a:prstGeom prst="rect">
             <a:avLst/>
@@ -15552,34 +14989,34 @@
           <a:noFill/>
         </p:spPr>
         <p:txBody>
-          <a:bodyPr wrap="square" anchor="t" lIns="36576" rIns="36576" tIns="18288" bIns="18288">
+          <a:bodyPr wrap="square" anchor="ctr" lIns="36576" rIns="36576" tIns="18288" bIns="18288">
             <a:spAutoFit/>
           </a:bodyPr>
           <a:lstStyle/>
           <a:p>
-            <a:pPr algn="l"/>
-            <a:r>
-              <a:rPr sz="900" b="1" i="0">
-                <a:solidFill>
-                  <a:srgbClr val="6B7280"/>
-                </a:solidFill>
-                <a:latin typeface="Calibri"/>
-              </a:rPr>
-              <a:t>Promedio $/ha</a:t>
-            </a:r>
-          </a:p>
-        </p:txBody>
-      </p:sp>
-      <p:sp>
-        <p:nvSpPr>
-          <p:cNvPr id="37" name="TextBox 36"/>
+            <a:pPr algn="r"/>
+            <a:r>
+              <a:rPr sz="1100" b="1" i="0">
+                <a:solidFill>
+                  <a:srgbClr val="3A4457"/>
+                </a:solidFill>
+                <a:latin typeface="Calibri"/>
+              </a:rPr>
+              <a:t>$ 1,6 M/ha</a:t>
+            </a:r>
+          </a:p>
+        </p:txBody>
+      </p:sp>
+      <p:sp>
+        <p:nvSpPr>
+          <p:cNvPr id="44" name="TextBox 43"/>
           <p:cNvSpPr txBox="1"/>
           <p:nvPr/>
         </p:nvSpPr>
         <p:spPr>
           <a:xfrm>
-            <a:off x="4511039" y="4050791"/>
-            <a:ext cx="1737360" cy="365760"/>
+            <a:off x="6949440" y="4910327"/>
+            <a:ext cx="4572000" cy="566928"/>
           </a:xfrm>
           <a:prstGeom prst="rect">
             <a:avLst/>
@@ -15587,1389 +15024,20 @@
           <a:noFill/>
         </p:spPr>
         <p:txBody>
-          <a:bodyPr wrap="square" anchor="t" lIns="36576" rIns="36576" tIns="18288" bIns="18288">
+          <a:bodyPr wrap="square" anchor="ctr" lIns="36576" rIns="36576" tIns="18288" bIns="18288">
             <a:spAutoFit/>
           </a:bodyPr>
           <a:lstStyle/>
           <a:p>
             <a:pPr algn="l"/>
             <a:r>
-              <a:rPr sz="1500" b="1" i="0">
-                <a:solidFill>
-                  <a:srgbClr val="1F3864"/>
-                </a:solidFill>
-                <a:latin typeface="Calibri"/>
-              </a:rPr>
-              <a:t>$ 573,8 M</a:t>
-            </a:r>
-          </a:p>
-        </p:txBody>
-      </p:sp>
-      <p:sp>
-        <p:nvSpPr>
-          <p:cNvPr id="38" name="TextBox 37"/>
-          <p:cNvSpPr txBox="1"/>
-          <p:nvPr/>
-        </p:nvSpPr>
-        <p:spPr>
-          <a:xfrm>
-            <a:off x="6103619" y="3840480"/>
-            <a:ext cx="1645920" cy="256032"/>
-          </a:xfrm>
-          <a:prstGeom prst="rect">
-            <a:avLst/>
-          </a:prstGeom>
-          <a:noFill/>
-        </p:spPr>
-        <p:txBody>
-          <a:bodyPr wrap="square" anchor="t" lIns="36576" rIns="36576" tIns="18288" bIns="18288">
-            <a:spAutoFit/>
-          </a:bodyPr>
-          <a:lstStyle/>
-          <a:p>
-            <a:pPr algn="l"/>
-            <a:r>
-              <a:rPr sz="900" b="1" i="0">
-                <a:solidFill>
-                  <a:srgbClr val="6B7280"/>
-                </a:solidFill>
-                <a:latin typeface="Calibri"/>
-              </a:rPr>
-              <a:t>Desv. estándar</a:t>
-            </a:r>
-          </a:p>
-        </p:txBody>
-      </p:sp>
-      <p:sp>
-        <p:nvSpPr>
-          <p:cNvPr id="39" name="TextBox 38"/>
-          <p:cNvSpPr txBox="1"/>
-          <p:nvPr/>
-        </p:nvSpPr>
-        <p:spPr>
-          <a:xfrm>
-            <a:off x="6103619" y="4050791"/>
-            <a:ext cx="1737360" cy="365760"/>
-          </a:xfrm>
-          <a:prstGeom prst="rect">
-            <a:avLst/>
-          </a:prstGeom>
-          <a:noFill/>
-        </p:spPr>
-        <p:txBody>
-          <a:bodyPr wrap="square" anchor="t" lIns="36576" rIns="36576" tIns="18288" bIns="18288">
-            <a:spAutoFit/>
-          </a:bodyPr>
-          <a:lstStyle/>
-          <a:p>
-            <a:pPr algn="l"/>
-            <a:r>
-              <a:rPr sz="1500" b="1" i="0">
-                <a:solidFill>
-                  <a:srgbClr val="1F3864"/>
-                </a:solidFill>
-                <a:latin typeface="Calibri"/>
-              </a:rPr>
-              <a:t>$ 148,7 M</a:t>
-            </a:r>
-          </a:p>
-        </p:txBody>
-      </p:sp>
-      <p:sp>
-        <p:nvSpPr>
-          <p:cNvPr id="40" name="Rounded Rectangle 39"/>
-          <p:cNvSpPr/>
-          <p:nvPr/>
-        </p:nvSpPr>
-        <p:spPr>
-          <a:xfrm>
-            <a:off x="8107679" y="1463040"/>
-            <a:ext cx="3550920" cy="3063240"/>
-          </a:xfrm>
-          <a:prstGeom prst="roundRect">
-            <a:avLst>
-              <a:gd name="adj" fmla="val 5000"/>
-            </a:avLst>
-          </a:prstGeom>
-          <a:solidFill>
-            <a:srgbClr val="FFFFFF"/>
-          </a:solidFill>
-          <a:ln w="9525">
-            <a:solidFill>
-              <a:srgbClr val="E1E6EF"/>
-            </a:solidFill>
-          </a:ln>
-          <a:effectLst>
-            <a:outerShdw blurRad="114300" dist="38100" dir="5400000" algn="t" rotWithShape="0">
-              <a:srgbClr val="0F1F3D">
-                <a:alpha val="18000"/>
-              </a:srgbClr>
-            </a:outerShdw>
-          </a:effectLst>
-        </p:spPr>
-        <p:style>
-          <a:lnRef idx="1">
-            <a:schemeClr val="accent1"/>
-          </a:lnRef>
-          <a:fillRef idx="3">
-            <a:schemeClr val="accent1"/>
-          </a:fillRef>
-          <a:effectRef idx="2">
-            <a:schemeClr val="accent1"/>
-          </a:effectRef>
-          <a:fontRef idx="minor">
-            <a:schemeClr val="lt1"/>
-          </a:fontRef>
-        </p:style>
-        <p:txBody>
-          <a:bodyPr rtlCol="0" anchor="ctr"/>
-          <a:lstStyle/>
-          <a:p>
-            <a:pPr algn="ctr"/>
-          </a:p>
-        </p:txBody>
-      </p:sp>
-      <p:sp>
-        <p:nvSpPr>
-          <p:cNvPr id="41" name="Rectangle 40"/>
-          <p:cNvSpPr/>
-          <p:nvPr/>
-        </p:nvSpPr>
-        <p:spPr>
-          <a:xfrm>
-            <a:off x="8272271" y="1463040"/>
-            <a:ext cx="548640" cy="54864"/>
-          </a:xfrm>
-          <a:prstGeom prst="rect">
-            <a:avLst/>
-          </a:prstGeom>
-          <a:solidFill>
-            <a:srgbClr val="92D050"/>
-          </a:solidFill>
-          <a:ln>
-            <a:noFill/>
-          </a:ln>
-          <a:effectLst/>
-        </p:spPr>
-        <p:style>
-          <a:lnRef idx="1">
-            <a:schemeClr val="accent1"/>
-          </a:lnRef>
-          <a:fillRef idx="3">
-            <a:schemeClr val="accent1"/>
-          </a:fillRef>
-          <a:effectRef idx="2">
-            <a:schemeClr val="accent1"/>
-          </a:effectRef>
-          <a:fontRef idx="minor">
-            <a:schemeClr val="lt1"/>
-          </a:fontRef>
-        </p:style>
-        <p:txBody>
-          <a:bodyPr rtlCol="0" anchor="ctr"/>
-          <a:lstStyle/>
-          <a:p>
-            <a:pPr algn="ctr"/>
-          </a:p>
-        </p:txBody>
-      </p:sp>
-      <p:sp>
-        <p:nvSpPr>
-          <p:cNvPr id="42" name="Rounded Rectangle 41"/>
-          <p:cNvSpPr/>
-          <p:nvPr/>
-        </p:nvSpPr>
-        <p:spPr>
-          <a:xfrm>
-            <a:off x="8107679" y="1463040"/>
-            <a:ext cx="3550920" cy="3063240"/>
-          </a:xfrm>
-          <a:prstGeom prst="roundRect">
-            <a:avLst>
-              <a:gd name="adj" fmla="val 5000"/>
-            </a:avLst>
-          </a:prstGeom>
-          <a:noFill/>
-          <a:ln w="9525">
-            <a:solidFill>
-              <a:srgbClr val="2F5597"/>
-            </a:solidFill>
-          </a:ln>
-          <a:effectLst/>
-        </p:spPr>
-        <p:style>
-          <a:lnRef idx="1">
-            <a:schemeClr val="accent1"/>
-          </a:lnRef>
-          <a:fillRef idx="3">
-            <a:schemeClr val="accent1"/>
-          </a:fillRef>
-          <a:effectRef idx="2">
-            <a:schemeClr val="accent1"/>
-          </a:effectRef>
-          <a:fontRef idx="minor">
-            <a:schemeClr val="lt1"/>
-          </a:fontRef>
-        </p:style>
-        <p:txBody>
-          <a:bodyPr rtlCol="0" anchor="ctr"/>
-          <a:lstStyle/>
-          <a:p>
-            <a:pPr algn="ctr"/>
-          </a:p>
-        </p:txBody>
-      </p:sp>
-      <p:sp>
-        <p:nvSpPr>
-          <p:cNvPr id="43" name="Rounded Rectangle 42"/>
-          <p:cNvSpPr/>
-          <p:nvPr/>
-        </p:nvSpPr>
-        <p:spPr>
-          <a:xfrm>
-            <a:off x="10195559" y="1627632"/>
-            <a:ext cx="1325880" cy="274320"/>
-          </a:xfrm>
-          <a:prstGeom prst="roundRect">
-            <a:avLst>
-              <a:gd name="adj" fmla="val 50000"/>
-            </a:avLst>
-          </a:prstGeom>
-          <a:solidFill>
-            <a:srgbClr val="2F5597"/>
-          </a:solidFill>
-          <a:ln>
-            <a:noFill/>
-          </a:ln>
-          <a:effectLst/>
-        </p:spPr>
-        <p:style>
-          <a:lnRef idx="1">
-            <a:schemeClr val="accent1"/>
-          </a:lnRef>
-          <a:fillRef idx="3">
-            <a:schemeClr val="accent1"/>
-          </a:fillRef>
-          <a:effectRef idx="2">
-            <a:schemeClr val="accent1"/>
-          </a:effectRef>
-          <a:fontRef idx="minor">
-            <a:schemeClr val="lt1"/>
-          </a:fontRef>
-        </p:style>
-        <p:txBody>
-          <a:bodyPr rtlCol="0" anchor="ctr" lIns="0" rIns="0" tIns="0" bIns="0"/>
-          <a:lstStyle/>
-          <a:p>
-            <a:pPr algn="ctr"/>
-            <a:r>
-              <a:rPr sz="900" b="1">
-                <a:solidFill>
-                  <a:srgbClr val="FFFFFF"/>
-                </a:solidFill>
-                <a:latin typeface="Calibri"/>
-              </a:rPr>
-              <a:t>SELECCIONADA</a:t>
-            </a:r>
-          </a:p>
-        </p:txBody>
-      </p:sp>
-      <p:sp>
-        <p:nvSpPr>
-          <p:cNvPr id="44" name="TextBox 43"/>
-          <p:cNvSpPr txBox="1"/>
-          <p:nvPr/>
-        </p:nvSpPr>
-        <p:spPr>
-          <a:xfrm>
-            <a:off x="8290559" y="1600200"/>
-            <a:ext cx="1904999" cy="365760"/>
-          </a:xfrm>
-          <a:prstGeom prst="rect">
-            <a:avLst/>
-          </a:prstGeom>
-          <a:noFill/>
-        </p:spPr>
-        <p:txBody>
-          <a:bodyPr wrap="square" anchor="t" lIns="36576" rIns="36576" tIns="18288" bIns="18288">
-            <a:spAutoFit/>
-          </a:bodyPr>
-          <a:lstStyle/>
-          <a:p>
-            <a:pPr algn="l"/>
-            <a:r>
-              <a:rPr sz="1600" b="1" i="0">
-                <a:solidFill>
-                  <a:srgbClr val="1F3864"/>
-                </a:solidFill>
-                <a:latin typeface="Calibri"/>
-              </a:rPr>
-              <a:t>Combinación 3</a:t>
-            </a:r>
-          </a:p>
-        </p:txBody>
-      </p:sp>
-      <p:sp>
-        <p:nvSpPr>
-          <p:cNvPr id="45" name="TextBox 44"/>
-          <p:cNvSpPr txBox="1"/>
-          <p:nvPr/>
-        </p:nvSpPr>
-        <p:spPr>
-          <a:xfrm>
-            <a:off x="8290559" y="2011680"/>
-            <a:ext cx="3185160" cy="274320"/>
-          </a:xfrm>
-          <a:prstGeom prst="rect">
-            <a:avLst/>
-          </a:prstGeom>
-          <a:noFill/>
-        </p:spPr>
-        <p:txBody>
-          <a:bodyPr wrap="square" anchor="t" lIns="36576" rIns="36576" tIns="18288" bIns="18288">
-            <a:spAutoFit/>
-          </a:bodyPr>
-          <a:lstStyle/>
-          <a:p>
-            <a:pPr algn="l"/>
-            <a:r>
-              <a:rPr sz="1000" b="1" i="0" spc="100">
-                <a:solidFill>
-                  <a:srgbClr val="6B7280"/>
-                </a:solidFill>
-                <a:latin typeface="Calibri"/>
-              </a:rPr>
-              <a:t>OFERTAS: 5, 3, 4</a:t>
-            </a:r>
-          </a:p>
-        </p:txBody>
-      </p:sp>
-      <p:sp>
-        <p:nvSpPr>
-          <p:cNvPr id="46" name="TextBox 45"/>
-          <p:cNvSpPr txBox="1"/>
-          <p:nvPr/>
-        </p:nvSpPr>
-        <p:spPr>
-          <a:xfrm>
-            <a:off x="8290559" y="2331720"/>
-            <a:ext cx="2194560" cy="822960"/>
-          </a:xfrm>
-          <a:prstGeom prst="rect">
-            <a:avLst/>
-          </a:prstGeom>
-          <a:noFill/>
-        </p:spPr>
-        <p:txBody>
-          <a:bodyPr wrap="square" anchor="t" lIns="36576" rIns="36576" tIns="18288" bIns="18288">
-            <a:spAutoFit/>
-          </a:bodyPr>
-          <a:lstStyle/>
-          <a:p>
-            <a:pPr algn="l"/>
-            <a:r>
-              <a:rPr sz="3600" b="1" i="0">
-                <a:solidFill>
-                  <a:srgbClr val="C0392B"/>
-                </a:solidFill>
-                <a:latin typeface="Calibri"/>
-              </a:rPr>
-              <a:t>26,2 %</a:t>
-            </a:r>
-          </a:p>
-        </p:txBody>
-      </p:sp>
-      <p:sp>
-        <p:nvSpPr>
-          <p:cNvPr id="47" name="Rounded Rectangle 46"/>
-          <p:cNvSpPr/>
-          <p:nvPr/>
-        </p:nvSpPr>
-        <p:spPr>
-          <a:xfrm>
-            <a:off x="10378439" y="2606040"/>
-            <a:ext cx="1097280" cy="310896"/>
-          </a:xfrm>
-          <a:prstGeom prst="roundRect">
-            <a:avLst>
-              <a:gd name="adj" fmla="val 50000"/>
-            </a:avLst>
-          </a:prstGeom>
-          <a:solidFill>
-            <a:srgbClr val="C0392B"/>
-          </a:solidFill>
-          <a:ln>
-            <a:noFill/>
-          </a:ln>
-          <a:effectLst/>
-        </p:spPr>
-        <p:style>
-          <a:lnRef idx="1">
-            <a:schemeClr val="accent1"/>
-          </a:lnRef>
-          <a:fillRef idx="3">
-            <a:schemeClr val="accent1"/>
-          </a:fillRef>
-          <a:effectRef idx="2">
-            <a:schemeClr val="accent1"/>
-          </a:effectRef>
-          <a:fontRef idx="minor">
-            <a:schemeClr val="lt1"/>
-          </a:fontRef>
-        </p:style>
-        <p:txBody>
-          <a:bodyPr rtlCol="0" anchor="ctr" lIns="0" rIns="0" tIns="0" bIns="0"/>
-          <a:lstStyle/>
-          <a:p>
-            <a:pPr algn="ctr"/>
-            <a:r>
-              <a:rPr sz="900" b="1">
-                <a:solidFill>
-                  <a:srgbClr val="FFFFFF"/>
-                </a:solidFill>
-                <a:latin typeface="Calibri"/>
-              </a:rPr>
-              <a:t>NO CUMPLE</a:t>
-            </a:r>
-          </a:p>
-        </p:txBody>
-      </p:sp>
-      <p:sp>
-        <p:nvSpPr>
-          <p:cNvPr id="48" name="Rounded Rectangle 47"/>
-          <p:cNvSpPr/>
-          <p:nvPr/>
-        </p:nvSpPr>
-        <p:spPr>
-          <a:xfrm>
-            <a:off x="8290559" y="3310128"/>
-            <a:ext cx="3185160" cy="146304"/>
-          </a:xfrm>
-          <a:prstGeom prst="roundRect">
-            <a:avLst>
-              <a:gd name="adj" fmla="val 50000"/>
-            </a:avLst>
-          </a:prstGeom>
-          <a:solidFill>
-            <a:srgbClr val="D9D9D9"/>
-          </a:solidFill>
-          <a:ln>
-            <a:noFill/>
-          </a:ln>
-          <a:effectLst/>
-        </p:spPr>
-        <p:style>
-          <a:lnRef idx="1">
-            <a:schemeClr val="accent1"/>
-          </a:lnRef>
-          <a:fillRef idx="3">
-            <a:schemeClr val="accent1"/>
-          </a:fillRef>
-          <a:effectRef idx="2">
-            <a:schemeClr val="accent1"/>
-          </a:effectRef>
-          <a:fontRef idx="minor">
-            <a:schemeClr val="lt1"/>
-          </a:fontRef>
-        </p:style>
-        <p:txBody>
-          <a:bodyPr rtlCol="0" anchor="ctr"/>
-          <a:lstStyle/>
-          <a:p>
-            <a:pPr algn="ctr"/>
-          </a:p>
-        </p:txBody>
-      </p:sp>
-      <p:sp>
-        <p:nvSpPr>
-          <p:cNvPr id="49" name="Rounded Rectangle 48"/>
-          <p:cNvSpPr/>
-          <p:nvPr/>
-        </p:nvSpPr>
-        <p:spPr>
-          <a:xfrm>
-            <a:off x="8290559" y="3310128"/>
-            <a:ext cx="2769704" cy="146304"/>
-          </a:xfrm>
-          <a:prstGeom prst="roundRect">
-            <a:avLst>
-              <a:gd name="adj" fmla="val 50000"/>
-            </a:avLst>
-          </a:prstGeom>
-          <a:solidFill>
-            <a:srgbClr val="C0392B"/>
-          </a:solidFill>
-          <a:ln>
-            <a:noFill/>
-          </a:ln>
-          <a:effectLst/>
-        </p:spPr>
-        <p:style>
-          <a:lnRef idx="1">
-            <a:schemeClr val="accent1"/>
-          </a:lnRef>
-          <a:fillRef idx="3">
-            <a:schemeClr val="accent1"/>
-          </a:fillRef>
-          <a:effectRef idx="2">
-            <a:schemeClr val="accent1"/>
-          </a:effectRef>
-          <a:fontRef idx="minor">
-            <a:schemeClr val="lt1"/>
-          </a:fontRef>
-        </p:style>
-        <p:txBody>
-          <a:bodyPr rtlCol="0" anchor="ctr"/>
-          <a:lstStyle/>
-          <a:p>
-            <a:pPr algn="ctr"/>
-          </a:p>
-        </p:txBody>
-      </p:sp>
-      <p:sp>
-        <p:nvSpPr>
-          <p:cNvPr id="50" name="Rectangle 49"/>
-          <p:cNvSpPr/>
-          <p:nvPr/>
-        </p:nvSpPr>
-        <p:spPr>
-          <a:xfrm>
-            <a:off x="9336257" y="3264408"/>
-            <a:ext cx="24000" cy="237744"/>
-          </a:xfrm>
-          <a:prstGeom prst="rect">
-            <a:avLst/>
-          </a:prstGeom>
-          <a:solidFill>
-            <a:srgbClr val="37863C"/>
-          </a:solidFill>
-          <a:ln>
-            <a:noFill/>
-          </a:ln>
-          <a:effectLst/>
-        </p:spPr>
-        <p:style>
-          <a:lnRef idx="1">
-            <a:schemeClr val="accent1"/>
-          </a:lnRef>
-          <a:fillRef idx="3">
-            <a:schemeClr val="accent1"/>
-          </a:fillRef>
-          <a:effectRef idx="2">
-            <a:schemeClr val="accent1"/>
-          </a:effectRef>
-          <a:fontRef idx="minor">
-            <a:schemeClr val="lt1"/>
-          </a:fontRef>
-        </p:style>
-        <p:txBody>
-          <a:bodyPr rtlCol="0" anchor="ctr"/>
-          <a:lstStyle/>
-          <a:p>
-            <a:pPr algn="ctr"/>
-          </a:p>
-        </p:txBody>
-      </p:sp>
-      <p:sp>
-        <p:nvSpPr>
-          <p:cNvPr id="51" name="TextBox 50"/>
-          <p:cNvSpPr txBox="1"/>
-          <p:nvPr/>
-        </p:nvSpPr>
-        <p:spPr>
-          <a:xfrm>
-            <a:off x="8290559" y="3474720"/>
-            <a:ext cx="3185160" cy="256032"/>
-          </a:xfrm>
-          <a:prstGeom prst="rect">
-            <a:avLst/>
-          </a:prstGeom>
-          <a:noFill/>
-        </p:spPr>
-        <p:txBody>
-          <a:bodyPr wrap="square" anchor="t" lIns="36576" rIns="36576" tIns="18288" bIns="18288">
-            <a:spAutoFit/>
-          </a:bodyPr>
-          <a:lstStyle/>
-          <a:p>
-            <a:pPr algn="l"/>
-            <a:r>
-              <a:rPr sz="900" b="0" i="0">
-                <a:solidFill>
-                  <a:srgbClr val="37863C"/>
-                </a:solidFill>
-                <a:latin typeface="Calibri"/>
-              </a:rPr>
-              <a:t>│ máximo admisible 10 %</a:t>
-            </a:r>
-          </a:p>
-        </p:txBody>
-      </p:sp>
-      <p:sp>
-        <p:nvSpPr>
-          <p:cNvPr id="52" name="TextBox 51"/>
-          <p:cNvSpPr txBox="1"/>
-          <p:nvPr/>
-        </p:nvSpPr>
-        <p:spPr>
-          <a:xfrm>
-            <a:off x="8290559" y="3840480"/>
-            <a:ext cx="1645920" cy="256032"/>
-          </a:xfrm>
-          <a:prstGeom prst="rect">
-            <a:avLst/>
-          </a:prstGeom>
-          <a:noFill/>
-        </p:spPr>
-        <p:txBody>
-          <a:bodyPr wrap="square" anchor="t" lIns="36576" rIns="36576" tIns="18288" bIns="18288">
-            <a:spAutoFit/>
-          </a:bodyPr>
-          <a:lstStyle/>
-          <a:p>
-            <a:pPr algn="l"/>
-            <a:r>
-              <a:rPr sz="900" b="1" i="0">
-                <a:solidFill>
-                  <a:srgbClr val="6B7280"/>
-                </a:solidFill>
-                <a:latin typeface="Calibri"/>
-              </a:rPr>
-              <a:t>Promedio $/ha</a:t>
-            </a:r>
-          </a:p>
-        </p:txBody>
-      </p:sp>
-      <p:sp>
-        <p:nvSpPr>
-          <p:cNvPr id="53" name="TextBox 52"/>
-          <p:cNvSpPr txBox="1"/>
-          <p:nvPr/>
-        </p:nvSpPr>
-        <p:spPr>
-          <a:xfrm>
-            <a:off x="8290559" y="4050791"/>
-            <a:ext cx="1737360" cy="365760"/>
-          </a:xfrm>
-          <a:prstGeom prst="rect">
-            <a:avLst/>
-          </a:prstGeom>
-          <a:noFill/>
-        </p:spPr>
-        <p:txBody>
-          <a:bodyPr wrap="square" anchor="t" lIns="36576" rIns="36576" tIns="18288" bIns="18288">
-            <a:spAutoFit/>
-          </a:bodyPr>
-          <a:lstStyle/>
-          <a:p>
-            <a:pPr algn="l"/>
-            <a:r>
-              <a:rPr sz="1500" b="1" i="0">
-                <a:solidFill>
-                  <a:srgbClr val="1F3864"/>
-                </a:solidFill>
-                <a:latin typeface="Calibri"/>
-              </a:rPr>
-              <a:t>$ 525,0 M</a:t>
-            </a:r>
-          </a:p>
-        </p:txBody>
-      </p:sp>
-      <p:sp>
-        <p:nvSpPr>
-          <p:cNvPr id="54" name="TextBox 53"/>
-          <p:cNvSpPr txBox="1"/>
-          <p:nvPr/>
-        </p:nvSpPr>
-        <p:spPr>
-          <a:xfrm>
-            <a:off x="9883139" y="3840480"/>
-            <a:ext cx="1645920" cy="256032"/>
-          </a:xfrm>
-          <a:prstGeom prst="rect">
-            <a:avLst/>
-          </a:prstGeom>
-          <a:noFill/>
-        </p:spPr>
-        <p:txBody>
-          <a:bodyPr wrap="square" anchor="t" lIns="36576" rIns="36576" tIns="18288" bIns="18288">
-            <a:spAutoFit/>
-          </a:bodyPr>
-          <a:lstStyle/>
-          <a:p>
-            <a:pPr algn="l"/>
-            <a:r>
-              <a:rPr sz="900" b="1" i="0">
-                <a:solidFill>
-                  <a:srgbClr val="6B7280"/>
-                </a:solidFill>
-                <a:latin typeface="Calibri"/>
-              </a:rPr>
-              <a:t>Desv. estándar</a:t>
-            </a:r>
-          </a:p>
-        </p:txBody>
-      </p:sp>
-      <p:sp>
-        <p:nvSpPr>
-          <p:cNvPr id="55" name="TextBox 54"/>
-          <p:cNvSpPr txBox="1"/>
-          <p:nvPr/>
-        </p:nvSpPr>
-        <p:spPr>
-          <a:xfrm>
-            <a:off x="9883139" y="4050791"/>
-            <a:ext cx="1737360" cy="365760"/>
-          </a:xfrm>
-          <a:prstGeom prst="rect">
-            <a:avLst/>
-          </a:prstGeom>
-          <a:noFill/>
-        </p:spPr>
-        <p:txBody>
-          <a:bodyPr wrap="square" anchor="t" lIns="36576" rIns="36576" tIns="18288" bIns="18288">
-            <a:spAutoFit/>
-          </a:bodyPr>
-          <a:lstStyle/>
-          <a:p>
-            <a:pPr algn="l"/>
-            <a:r>
-              <a:rPr sz="1500" b="1" i="0">
-                <a:solidFill>
-                  <a:srgbClr val="1F3864"/>
-                </a:solidFill>
-                <a:latin typeface="Calibri"/>
-              </a:rPr>
-              <a:t>$ 137,5 M</a:t>
-            </a:r>
-          </a:p>
-        </p:txBody>
-      </p:sp>
-      <p:sp>
-        <p:nvSpPr>
-          <p:cNvPr id="56" name="Rounded Rectangle 55"/>
-          <p:cNvSpPr/>
-          <p:nvPr/>
-        </p:nvSpPr>
-        <p:spPr>
-          <a:xfrm>
-            <a:off x="548640" y="4754880"/>
-            <a:ext cx="11109960" cy="1371600"/>
-          </a:xfrm>
-          <a:prstGeom prst="roundRect">
-            <a:avLst>
-              <a:gd name="adj" fmla="val 8000"/>
-            </a:avLst>
-          </a:prstGeom>
-          <a:gradFill rotWithShape="1">
-            <a:gsLst>
-              <a:gs pos="0">
-                <a:srgbClr val="0F1F3D"/>
-              </a:gs>
-              <a:gs pos="100000">
-                <a:srgbClr val="2F5597"/>
-              </a:gs>
-            </a:gsLst>
-            <a:lin scaled="0" ang="0"/>
-          </a:gradFill>
-          <a:ln>
-            <a:noFill/>
-          </a:ln>
-          <a:effectLst>
-            <a:outerShdw blurRad="114300" dist="38100" dir="5400000" algn="t" rotWithShape="0">
-              <a:srgbClr val="0F1F3D">
-                <a:alpha val="18000"/>
-              </a:srgbClr>
-            </a:outerShdw>
-          </a:effectLst>
-        </p:spPr>
-        <p:style>
-          <a:lnRef idx="1">
-            <a:schemeClr val="accent1"/>
-          </a:lnRef>
-          <a:fillRef idx="3">
-            <a:schemeClr val="accent1"/>
-          </a:fillRef>
-          <a:effectRef idx="2">
-            <a:schemeClr val="accent1"/>
-          </a:effectRef>
-          <a:fontRef idx="minor">
-            <a:schemeClr val="lt1"/>
-          </a:fontRef>
-        </p:style>
-        <p:txBody>
-          <a:bodyPr rtlCol="0" anchor="ctr"/>
-          <a:lstStyle/>
-          <a:p>
-            <a:pPr algn="ctr"/>
-          </a:p>
-        </p:txBody>
-      </p:sp>
-      <p:sp>
-        <p:nvSpPr>
-          <p:cNvPr id="57" name="TextBox 56"/>
-          <p:cNvSpPr txBox="1"/>
-          <p:nvPr/>
-        </p:nvSpPr>
-        <p:spPr>
-          <a:xfrm>
-            <a:off x="822960" y="4892040"/>
-            <a:ext cx="3657600" cy="274320"/>
-          </a:xfrm>
-          <a:prstGeom prst="rect">
-            <a:avLst/>
-          </a:prstGeom>
-          <a:noFill/>
-        </p:spPr>
-        <p:txBody>
-          <a:bodyPr wrap="square" anchor="t" lIns="36576" rIns="36576" tIns="18288" bIns="18288">
-            <a:spAutoFit/>
-          </a:bodyPr>
-          <a:lstStyle/>
-          <a:p>
-            <a:pPr algn="l"/>
-            <a:r>
-              <a:rPr sz="1000" b="1" i="0" spc="250">
-                <a:solidFill>
-                  <a:srgbClr val="92D050"/>
-                </a:solidFill>
-                <a:latin typeface="Calibri"/>
-              </a:rPr>
-              <a:t>COMBINACIÓN SELECCIONADA</a:t>
-            </a:r>
-          </a:p>
-        </p:txBody>
-      </p:sp>
-      <p:sp>
-        <p:nvSpPr>
-          <p:cNvPr id="58" name="TextBox 57"/>
-          <p:cNvSpPr txBox="1"/>
-          <p:nvPr/>
-        </p:nvSpPr>
-        <p:spPr>
-          <a:xfrm>
-            <a:off x="822960" y="5212080"/>
-            <a:ext cx="3840480" cy="457200"/>
-          </a:xfrm>
-          <a:prstGeom prst="rect">
-            <a:avLst/>
-          </a:prstGeom>
-          <a:noFill/>
-        </p:spPr>
-        <p:txBody>
-          <a:bodyPr wrap="square" anchor="t" lIns="36576" rIns="36576" tIns="18288" bIns="18288">
-            <a:spAutoFit/>
-          </a:bodyPr>
-          <a:lstStyle/>
-          <a:p>
-            <a:pPr algn="l"/>
-            <a:r>
-              <a:rPr sz="2400" b="1" i="0">
-                <a:solidFill>
-                  <a:srgbClr val="FFFFFF"/>
-                </a:solidFill>
-                <a:latin typeface="Calibri"/>
-              </a:rPr>
-              <a:t>Combinación 3</a:t>
-            </a:r>
-          </a:p>
-        </p:txBody>
-      </p:sp>
-      <p:sp>
-        <p:nvSpPr>
-          <p:cNvPr id="59" name="TextBox 58"/>
-          <p:cNvSpPr txBox="1"/>
-          <p:nvPr/>
-        </p:nvSpPr>
-        <p:spPr>
-          <a:xfrm>
-            <a:off x="822960" y="5669280"/>
-            <a:ext cx="3931920" cy="365760"/>
-          </a:xfrm>
-          <a:prstGeom prst="rect">
-            <a:avLst/>
-          </a:prstGeom>
-          <a:noFill/>
-        </p:spPr>
-        <p:txBody>
-          <a:bodyPr wrap="square" anchor="t" lIns="36576" rIns="36576" tIns="18288" bIns="18288">
-            <a:spAutoFit/>
-          </a:bodyPr>
-          <a:lstStyle/>
-          <a:p>
-            <a:pPr algn="l"/>
-            <a:r>
-              <a:rPr sz="1200" b="0" i="0">
-                <a:solidFill>
-                  <a:srgbClr val="D9D9D9"/>
-                </a:solidFill>
-                <a:latin typeface="Calibri"/>
-              </a:rPr>
-              <a:t>Ofertas 5, 3, 4 (3 ofertas)</a:t>
-            </a:r>
-          </a:p>
-        </p:txBody>
-      </p:sp>
-      <p:sp>
-        <p:nvSpPr>
-          <p:cNvPr id="60" name="Rectangle 59"/>
-          <p:cNvSpPr/>
-          <p:nvPr/>
-        </p:nvSpPr>
-        <p:spPr>
-          <a:xfrm>
-            <a:off x="4736592" y="4983480"/>
-            <a:ext cx="12000" cy="914400"/>
-          </a:xfrm>
-          <a:prstGeom prst="rect">
-            <a:avLst/>
-          </a:prstGeom>
-          <a:solidFill>
-            <a:srgbClr val="8FAADC">
-              <a:alpha val="60000"/>
-            </a:srgbClr>
-          </a:solidFill>
-          <a:ln>
-            <a:noFill/>
-          </a:ln>
-          <a:effectLst/>
-        </p:spPr>
-        <p:style>
-          <a:lnRef idx="1">
-            <a:schemeClr val="accent1"/>
-          </a:lnRef>
-          <a:fillRef idx="3">
-            <a:schemeClr val="accent1"/>
-          </a:fillRef>
-          <a:effectRef idx="2">
-            <a:schemeClr val="accent1"/>
-          </a:effectRef>
-          <a:fontRef idx="minor">
-            <a:schemeClr val="lt1"/>
-          </a:fontRef>
-        </p:style>
-        <p:txBody>
-          <a:bodyPr rtlCol="0" anchor="ctr"/>
-          <a:lstStyle/>
-          <a:p>
-            <a:pPr algn="ctr"/>
-          </a:p>
-        </p:txBody>
-      </p:sp>
-      <p:sp>
-        <p:nvSpPr>
-          <p:cNvPr id="61" name="TextBox 60"/>
-          <p:cNvSpPr txBox="1"/>
-          <p:nvPr/>
-        </p:nvSpPr>
-        <p:spPr>
-          <a:xfrm>
-            <a:off x="4846320" y="4937760"/>
-            <a:ext cx="1645920" cy="274320"/>
-          </a:xfrm>
-          <a:prstGeom prst="rect">
-            <a:avLst/>
-          </a:prstGeom>
-          <a:noFill/>
-        </p:spPr>
-        <p:txBody>
-          <a:bodyPr wrap="square" anchor="t" lIns="36576" rIns="36576" tIns="18288" bIns="18288">
-            <a:spAutoFit/>
-          </a:bodyPr>
-          <a:lstStyle/>
-          <a:p>
-            <a:pPr algn="l"/>
-            <a:r>
-              <a:rPr sz="900" b="1" i="0" spc="150">
-                <a:solidFill>
-                  <a:srgbClr val="8FAADC"/>
-                </a:solidFill>
-                <a:latin typeface="Calibri"/>
-              </a:rPr>
-              <a:t>CV</a:t>
-            </a:r>
-          </a:p>
-        </p:txBody>
-      </p:sp>
-      <p:sp>
-        <p:nvSpPr>
-          <p:cNvPr id="62" name="TextBox 61"/>
-          <p:cNvSpPr txBox="1"/>
-          <p:nvPr/>
-        </p:nvSpPr>
-        <p:spPr>
-          <a:xfrm>
-            <a:off x="4846320" y="5257800"/>
-            <a:ext cx="1691640" cy="640080"/>
-          </a:xfrm>
-          <a:prstGeom prst="rect">
-            <a:avLst/>
-          </a:prstGeom>
-          <a:noFill/>
-        </p:spPr>
-        <p:txBody>
-          <a:bodyPr wrap="square" anchor="t" lIns="36576" rIns="36576" tIns="18288" bIns="18288">
-            <a:spAutoFit/>
-          </a:bodyPr>
-          <a:lstStyle/>
-          <a:p>
-            <a:pPr algn="l"/>
-            <a:r>
-              <a:rPr sz="2000" b="1" i="0">
-                <a:solidFill>
-                  <a:srgbClr val="C0392B"/>
-                </a:solidFill>
-                <a:latin typeface="Calibri"/>
-              </a:rPr>
-              <a:t>26,2 %</a:t>
-            </a:r>
-          </a:p>
-        </p:txBody>
-      </p:sp>
-      <p:sp>
-        <p:nvSpPr>
-          <p:cNvPr id="63" name="Rectangle 62"/>
-          <p:cNvSpPr/>
-          <p:nvPr/>
-        </p:nvSpPr>
-        <p:spPr>
-          <a:xfrm>
-            <a:off x="6519672" y="4983480"/>
-            <a:ext cx="12000" cy="914400"/>
-          </a:xfrm>
-          <a:prstGeom prst="rect">
-            <a:avLst/>
-          </a:prstGeom>
-          <a:solidFill>
-            <a:srgbClr val="8FAADC">
-              <a:alpha val="60000"/>
-            </a:srgbClr>
-          </a:solidFill>
-          <a:ln>
-            <a:noFill/>
-          </a:ln>
-          <a:effectLst/>
-        </p:spPr>
-        <p:style>
-          <a:lnRef idx="1">
-            <a:schemeClr val="accent1"/>
-          </a:lnRef>
-          <a:fillRef idx="3">
-            <a:schemeClr val="accent1"/>
-          </a:fillRef>
-          <a:effectRef idx="2">
-            <a:schemeClr val="accent1"/>
-          </a:effectRef>
-          <a:fontRef idx="minor">
-            <a:schemeClr val="lt1"/>
-          </a:fontRef>
-        </p:style>
-        <p:txBody>
-          <a:bodyPr rtlCol="0" anchor="ctr"/>
-          <a:lstStyle/>
-          <a:p>
-            <a:pPr algn="ctr"/>
-          </a:p>
-        </p:txBody>
-      </p:sp>
-      <p:sp>
-        <p:nvSpPr>
-          <p:cNvPr id="64" name="TextBox 63"/>
-          <p:cNvSpPr txBox="1"/>
-          <p:nvPr/>
-        </p:nvSpPr>
-        <p:spPr>
-          <a:xfrm>
-            <a:off x="6629400" y="4937760"/>
-            <a:ext cx="1645920" cy="274320"/>
-          </a:xfrm>
-          <a:prstGeom prst="rect">
-            <a:avLst/>
-          </a:prstGeom>
-          <a:noFill/>
-        </p:spPr>
-        <p:txBody>
-          <a:bodyPr wrap="square" anchor="t" lIns="36576" rIns="36576" tIns="18288" bIns="18288">
-            <a:spAutoFit/>
-          </a:bodyPr>
-          <a:lstStyle/>
-          <a:p>
-            <a:pPr algn="l"/>
-            <a:r>
-              <a:rPr sz="900" b="1" i="0" spc="150">
-                <a:solidFill>
-                  <a:srgbClr val="8FAADC"/>
-                </a:solidFill>
-                <a:latin typeface="Calibri"/>
-              </a:rPr>
-              <a:t>¿CUMPLE?</a:t>
-            </a:r>
-          </a:p>
-        </p:txBody>
-      </p:sp>
-      <p:sp>
-        <p:nvSpPr>
-          <p:cNvPr id="65" name="TextBox 64"/>
-          <p:cNvSpPr txBox="1"/>
-          <p:nvPr/>
-        </p:nvSpPr>
-        <p:spPr>
-          <a:xfrm>
-            <a:off x="6629400" y="5257800"/>
-            <a:ext cx="1691640" cy="640080"/>
-          </a:xfrm>
-          <a:prstGeom prst="rect">
-            <a:avLst/>
-          </a:prstGeom>
-          <a:noFill/>
-        </p:spPr>
-        <p:txBody>
-          <a:bodyPr wrap="square" anchor="t" lIns="36576" rIns="36576" tIns="18288" bIns="18288">
-            <a:spAutoFit/>
-          </a:bodyPr>
-          <a:lstStyle/>
-          <a:p>
-            <a:pPr algn="l"/>
-            <a:r>
-              <a:rPr sz="2000" b="1" i="0">
-                <a:solidFill>
-                  <a:srgbClr val="C0392B"/>
-                </a:solidFill>
-                <a:latin typeface="Calibri"/>
-              </a:rPr>
-              <a:t>NO</a:t>
-            </a:r>
-          </a:p>
-        </p:txBody>
-      </p:sp>
-      <p:sp>
-        <p:nvSpPr>
-          <p:cNvPr id="66" name="Rectangle 65"/>
-          <p:cNvSpPr/>
-          <p:nvPr/>
-        </p:nvSpPr>
-        <p:spPr>
-          <a:xfrm>
-            <a:off x="8302752" y="4983480"/>
-            <a:ext cx="12000" cy="914400"/>
-          </a:xfrm>
-          <a:prstGeom prst="rect">
-            <a:avLst/>
-          </a:prstGeom>
-          <a:solidFill>
-            <a:srgbClr val="8FAADC">
-              <a:alpha val="60000"/>
-            </a:srgbClr>
-          </a:solidFill>
-          <a:ln>
-            <a:noFill/>
-          </a:ln>
-          <a:effectLst/>
-        </p:spPr>
-        <p:style>
-          <a:lnRef idx="1">
-            <a:schemeClr val="accent1"/>
-          </a:lnRef>
-          <a:fillRef idx="3">
-            <a:schemeClr val="accent1"/>
-          </a:fillRef>
-          <a:effectRef idx="2">
-            <a:schemeClr val="accent1"/>
-          </a:effectRef>
-          <a:fontRef idx="minor">
-            <a:schemeClr val="lt1"/>
-          </a:fontRef>
-        </p:style>
-        <p:txBody>
-          <a:bodyPr rtlCol="0" anchor="ctr"/>
-          <a:lstStyle/>
-          <a:p>
-            <a:pPr algn="ctr"/>
-          </a:p>
-        </p:txBody>
-      </p:sp>
-      <p:sp>
-        <p:nvSpPr>
-          <p:cNvPr id="67" name="TextBox 66"/>
-          <p:cNvSpPr txBox="1"/>
-          <p:nvPr/>
-        </p:nvSpPr>
-        <p:spPr>
-          <a:xfrm>
-            <a:off x="8412480" y="4937760"/>
-            <a:ext cx="1645920" cy="274320"/>
-          </a:xfrm>
-          <a:prstGeom prst="rect">
-            <a:avLst/>
-          </a:prstGeom>
-          <a:noFill/>
-        </p:spPr>
-        <p:txBody>
-          <a:bodyPr wrap="square" anchor="t" lIns="36576" rIns="36576" tIns="18288" bIns="18288">
-            <a:spAutoFit/>
-          </a:bodyPr>
-          <a:lstStyle/>
-          <a:p>
-            <a:pPr algn="l"/>
-            <a:r>
-              <a:rPr sz="900" b="1" i="0" spc="150">
-                <a:solidFill>
-                  <a:srgbClr val="8FAADC"/>
-                </a:solidFill>
-                <a:latin typeface="Calibri"/>
-              </a:rPr>
-              <a:t>VALOR POR HA</a:t>
-            </a:r>
-          </a:p>
-        </p:txBody>
-      </p:sp>
-      <p:sp>
-        <p:nvSpPr>
-          <p:cNvPr id="68" name="TextBox 67"/>
-          <p:cNvSpPr txBox="1"/>
-          <p:nvPr/>
-        </p:nvSpPr>
-        <p:spPr>
-          <a:xfrm>
-            <a:off x="8412480" y="5257800"/>
-            <a:ext cx="1691640" cy="640080"/>
-          </a:xfrm>
-          <a:prstGeom prst="rect">
-            <a:avLst/>
-          </a:prstGeom>
-          <a:noFill/>
-        </p:spPr>
-        <p:txBody>
-          <a:bodyPr wrap="square" anchor="t" lIns="36576" rIns="36576" tIns="18288" bIns="18288">
-            <a:spAutoFit/>
-          </a:bodyPr>
-          <a:lstStyle/>
-          <a:p>
-            <a:pPr algn="l"/>
-            <a:r>
-              <a:rPr sz="2000" b="1" i="0">
-                <a:solidFill>
-                  <a:srgbClr val="FFFFFF"/>
-                </a:solidFill>
-                <a:latin typeface="Calibri"/>
-              </a:rPr>
-              <a:t>$ 525,0 M</a:t>
-            </a:r>
-          </a:p>
-        </p:txBody>
-      </p:sp>
-      <p:sp>
-        <p:nvSpPr>
-          <p:cNvPr id="69" name="Rectangle 68"/>
-          <p:cNvSpPr/>
-          <p:nvPr/>
-        </p:nvSpPr>
-        <p:spPr>
-          <a:xfrm>
-            <a:off x="10085831" y="4983480"/>
-            <a:ext cx="12000" cy="914400"/>
-          </a:xfrm>
-          <a:prstGeom prst="rect">
-            <a:avLst/>
-          </a:prstGeom>
-          <a:solidFill>
-            <a:srgbClr val="8FAADC">
-              <a:alpha val="60000"/>
-            </a:srgbClr>
-          </a:solidFill>
-          <a:ln>
-            <a:noFill/>
-          </a:ln>
-          <a:effectLst/>
-        </p:spPr>
-        <p:style>
-          <a:lnRef idx="1">
-            <a:schemeClr val="accent1"/>
-          </a:lnRef>
-          <a:fillRef idx="3">
-            <a:schemeClr val="accent1"/>
-          </a:fillRef>
-          <a:effectRef idx="2">
-            <a:schemeClr val="accent1"/>
-          </a:effectRef>
-          <a:fontRef idx="minor">
-            <a:schemeClr val="lt1"/>
-          </a:fontRef>
-        </p:style>
-        <p:txBody>
-          <a:bodyPr rtlCol="0" anchor="ctr"/>
-          <a:lstStyle/>
-          <a:p>
-            <a:pPr algn="ctr"/>
-          </a:p>
-        </p:txBody>
-      </p:sp>
-      <p:sp>
-        <p:nvSpPr>
-          <p:cNvPr id="70" name="TextBox 69"/>
-          <p:cNvSpPr txBox="1"/>
-          <p:nvPr/>
-        </p:nvSpPr>
-        <p:spPr>
-          <a:xfrm>
-            <a:off x="10195559" y="4937760"/>
-            <a:ext cx="1645920" cy="274320"/>
-          </a:xfrm>
-          <a:prstGeom prst="rect">
-            <a:avLst/>
-          </a:prstGeom>
-          <a:noFill/>
-        </p:spPr>
-        <p:txBody>
-          <a:bodyPr wrap="square" anchor="t" lIns="36576" rIns="36576" tIns="18288" bIns="18288">
-            <a:spAutoFit/>
-          </a:bodyPr>
-          <a:lstStyle/>
-          <a:p>
-            <a:pPr algn="l"/>
-            <a:r>
-              <a:rPr sz="900" b="1" i="0" spc="150">
-                <a:solidFill>
-                  <a:srgbClr val="8FAADC"/>
-                </a:solidFill>
-                <a:latin typeface="Calibri"/>
-              </a:rPr>
-              <a:t>VALOR POR M²</a:t>
-            </a:r>
-          </a:p>
-        </p:txBody>
-      </p:sp>
-      <p:sp>
-        <p:nvSpPr>
-          <p:cNvPr id="71" name="TextBox 70"/>
-          <p:cNvSpPr txBox="1"/>
-          <p:nvPr/>
-        </p:nvSpPr>
-        <p:spPr>
-          <a:xfrm>
-            <a:off x="10195559" y="5257800"/>
-            <a:ext cx="1691640" cy="640080"/>
-          </a:xfrm>
-          <a:prstGeom prst="rect">
-            <a:avLst/>
-          </a:prstGeom>
-          <a:noFill/>
-        </p:spPr>
-        <p:txBody>
-          <a:bodyPr wrap="square" anchor="t" lIns="36576" rIns="36576" tIns="18288" bIns="18288">
-            <a:spAutoFit/>
-          </a:bodyPr>
-          <a:lstStyle/>
-          <a:p>
-            <a:pPr algn="l"/>
-            <a:r>
-              <a:rPr sz="2000" b="1" i="0">
-                <a:solidFill>
-                  <a:srgbClr val="FFFFFF"/>
-                </a:solidFill>
-                <a:latin typeface="Calibri"/>
-              </a:rPr>
-              <a:t>$ 52.500</a:t>
+              <a:rPr sz="1000" b="0" i="0">
+                <a:solidFill>
+                  <a:srgbClr val="3A4457"/>
+                </a:solidFill>
+                <a:latin typeface="Calibri"/>
+              </a:rPr>
+              <a:t>Datos inconsistentes (implicaría $175/m²); anuncio no confiable.</a:t>
             </a:r>
           </a:p>
         </p:txBody>
@@ -17223,7 +15291,7 @@
                 </a:solidFill>
                 <a:latin typeface="Calibri"/>
               </a:rPr>
-              <a:t>PROYECCIÓN</a:t>
+              <a:t>ESTADÍSTICA</a:t>
             </a:r>
           </a:p>
         </p:txBody>
@@ -17258,7 +15326,7 @@
                 </a:solidFill>
                 <a:latin typeface="Calibri"/>
               </a:rPr>
-              <a:t>Proyección del valor esperado</a:t>
+              <a:t>Valor por hectárea y estadísticos</a:t>
             </a:r>
           </a:p>
         </p:txBody>
@@ -17293,7 +15361,7 @@
                 </a:solidFill>
                 <a:latin typeface="Calibri"/>
               </a:rPr>
-              <a:t>Rango de orientación entre dos combinaciones de referencia · sin valor puntual</a:t>
+              <a:t>Muestra general · $ millones por ha (escala logarítmica)</a:t>
             </a:r>
           </a:p>
         </p:txBody>
@@ -17420,8 +15488,8 @@
         </p:nvSpPr>
         <p:spPr>
           <a:xfrm>
-            <a:off x="548640" y="1463040"/>
-            <a:ext cx="3566160" cy="1325880"/>
+            <a:off x="548640" y="1417320"/>
+            <a:ext cx="7223760" cy="4754880"/>
           </a:xfrm>
           <a:prstGeom prst="roundRect">
             <a:avLst>
@@ -17466,62 +15534,36 @@
           </a:p>
         </p:txBody>
       </p:sp>
-      <p:sp>
-        <p:nvSpPr>
-          <p:cNvPr id="13" name="Rectangle 12"/>
+      <p:graphicFrame>
+        <p:nvGraphicFramePr>
+          <p:cNvPr id="13" name="Chart 12"/>
+          <p:cNvGraphicFramePr>
+            <a:graphicFrameLocks noGrp="1"/>
+          </p:cNvGraphicFramePr>
+          <p:nvPr/>
+        </p:nvGraphicFramePr>
+        <p:xfrm>
+          <a:off x="640080" y="1508760"/>
+          <a:ext cx="7040880" cy="4297680"/>
+        </p:xfrm>
+        <a:graphic>
+          <a:graphicData uri="http://schemas.openxmlformats.org/drawingml/2006/chart">
+            <c:chart xmlns:c="http://schemas.openxmlformats.org/drawingml/2006/chart" r:id="rId2"/>
+          </a:graphicData>
+        </a:graphic>
+      </p:graphicFrame>
+      <p:sp>
+        <p:nvSpPr>
+          <p:cNvPr id="14" name="Rectangle 13"/>
           <p:cNvSpPr/>
           <p:nvPr/>
         </p:nvSpPr>
         <p:spPr>
           <a:xfrm>
-            <a:off x="713232" y="1463040"/>
-            <a:ext cx="548640" cy="54864"/>
-          </a:xfrm>
-          <a:prstGeom prst="rect">
-            <a:avLst/>
-          </a:prstGeom>
-          <a:solidFill>
-            <a:srgbClr val="92D050"/>
-          </a:solidFill>
-          <a:ln>
-            <a:noFill/>
-          </a:ln>
-          <a:effectLst/>
-        </p:spPr>
-        <p:style>
-          <a:lnRef idx="1">
-            <a:schemeClr val="accent1"/>
-          </a:lnRef>
-          <a:fillRef idx="3">
-            <a:schemeClr val="accent1"/>
-          </a:fillRef>
-          <a:effectRef idx="2">
-            <a:schemeClr val="accent1"/>
-          </a:effectRef>
-          <a:fontRef idx="minor">
-            <a:schemeClr val="lt1"/>
-          </a:fontRef>
-        </p:style>
-        <p:txBody>
-          <a:bodyPr rtlCol="0" anchor="ctr"/>
-          <a:lstStyle/>
-          <a:p>
-            <a:pPr algn="ctr"/>
-          </a:p>
-        </p:txBody>
-      </p:sp>
-      <p:sp>
-        <p:nvSpPr>
-          <p:cNvPr id="14" name="Oval 13"/>
-          <p:cNvSpPr/>
-          <p:nvPr/>
-        </p:nvSpPr>
-        <p:spPr>
-          <a:xfrm>
-            <a:off x="749808" y="1691640"/>
-            <a:ext cx="502920" cy="502920"/>
-          </a:xfrm>
-          <a:prstGeom prst="ellipse">
+            <a:off x="868680" y="5870448"/>
+            <a:ext cx="164592" cy="164592"/>
+          </a:xfrm>
+          <a:prstGeom prst="rect">
             <a:avLst/>
           </a:prstGeom>
           <a:solidFill>
@@ -17547,19 +15589,10 @@
           </a:fontRef>
         </p:style>
         <p:txBody>
-          <a:bodyPr rtlCol="0" anchor="ctr" lIns="0" rIns="0" tIns="0" bIns="0"/>
+          <a:bodyPr rtlCol="0" anchor="ctr"/>
           <a:lstStyle/>
           <a:p>
             <a:pPr algn="ctr"/>
-            <a:r>
-              <a:rPr sz="1500" b="1">
-                <a:solidFill>
-                  <a:srgbClr val="FFFFFF"/>
-                </a:solidFill>
-                <a:latin typeface="Calibri"/>
-              </a:rPr>
-              <a:t>↓</a:t>
-            </a:r>
           </a:p>
         </p:txBody>
       </p:sp>
@@ -17571,8 +15604,8 @@
         </p:nvSpPr>
         <p:spPr>
           <a:xfrm>
-            <a:off x="1371600" y="1645920"/>
-            <a:ext cx="2651760" cy="274320"/>
+            <a:off x="1078992" y="5815584"/>
+            <a:ext cx="2286000" cy="274320"/>
           </a:xfrm>
           <a:prstGeom prst="rect">
             <a:avLst/>
@@ -17587,49 +15620,58 @@
           <a:p>
             <a:pPr algn="l"/>
             <a:r>
-              <a:rPr sz="1000" b="1" i="0" spc="100">
-                <a:solidFill>
-                  <a:srgbClr val="6B7280"/>
-                </a:solidFill>
-                <a:latin typeface="Calibri"/>
-              </a:rPr>
-              <a:t>REFERENCIA BAJA · $/ha</a:t>
-            </a:r>
-          </a:p>
-        </p:txBody>
-      </p:sp>
-      <p:sp>
-        <p:nvSpPr>
-          <p:cNvPr id="16" name="TextBox 15"/>
-          <p:cNvSpPr txBox="1"/>
-          <p:nvPr/>
-        </p:nvSpPr>
-        <p:spPr>
-          <a:xfrm>
-            <a:off x="1371600" y="1883664"/>
-            <a:ext cx="2651760" cy="548640"/>
-          </a:xfrm>
-          <a:prstGeom prst="rect">
-            <a:avLst/>
-          </a:prstGeom>
-          <a:noFill/>
-        </p:spPr>
-        <p:txBody>
-          <a:bodyPr wrap="square" anchor="ctr" lIns="36576" rIns="36576" tIns="18288" bIns="18288">
-            <a:spAutoFit/>
-          </a:bodyPr>
-          <a:lstStyle/>
-          <a:p>
-            <a:pPr algn="l"/>
-            <a:r>
-              <a:rPr sz="2600" b="1" i="0">
-                <a:solidFill>
-                  <a:srgbClr val="1F3864"/>
-                </a:solidFill>
-                <a:latin typeface="Calibri"/>
-              </a:rPr>
-              <a:t>$ 525,0 M</a:t>
-            </a:r>
+              <a:rPr sz="1000" b="0" i="0">
+                <a:solidFill>
+                  <a:srgbClr val="3A4457"/>
+                </a:solidFill>
+                <a:latin typeface="Calibri"/>
+              </a:rPr>
+              <a:t>Oferta vigente</a:t>
+            </a:r>
+          </a:p>
+        </p:txBody>
+      </p:sp>
+      <p:sp>
+        <p:nvSpPr>
+          <p:cNvPr id="16" name="Rectangle 15"/>
+          <p:cNvSpPr/>
+          <p:nvPr/>
+        </p:nvSpPr>
+        <p:spPr>
+          <a:xfrm>
+            <a:off x="2743200" y="5870448"/>
+            <a:ext cx="164592" cy="164592"/>
+          </a:xfrm>
+          <a:prstGeom prst="rect">
+            <a:avLst/>
+          </a:prstGeom>
+          <a:solidFill>
+            <a:srgbClr val="BFBFBF"/>
+          </a:solidFill>
+          <a:ln>
+            <a:noFill/>
+          </a:ln>
+          <a:effectLst/>
+        </p:spPr>
+        <p:style>
+          <a:lnRef idx="1">
+            <a:schemeClr val="accent1"/>
+          </a:lnRef>
+          <a:fillRef idx="3">
+            <a:schemeClr val="accent1"/>
+          </a:fillRef>
+          <a:effectRef idx="2">
+            <a:schemeClr val="accent1"/>
+          </a:effectRef>
+          <a:fontRef idx="minor">
+            <a:schemeClr val="lt1"/>
+          </a:fontRef>
+        </p:style>
+        <p:txBody>
+          <a:bodyPr rtlCol="0" anchor="ctr"/>
+          <a:lstStyle/>
+          <a:p>
+            <a:pPr algn="ctr"/>
           </a:p>
         </p:txBody>
       </p:sp>
@@ -17641,8 +15683,8 @@
         </p:nvSpPr>
         <p:spPr>
           <a:xfrm>
-            <a:off x="1371600" y="2404872"/>
-            <a:ext cx="2651760" cy="320040"/>
+            <a:off x="2953512" y="5815584"/>
+            <a:ext cx="2286000" cy="274320"/>
           </a:xfrm>
           <a:prstGeom prst="rect">
             <a:avLst/>
@@ -17659,11 +15701,11 @@
             <a:r>
               <a:rPr sz="1000" b="0" i="0">
                 <a:solidFill>
-                  <a:srgbClr val="6B7280"/>
-                </a:solidFill>
-                <a:latin typeface="Calibri"/>
-              </a:rPr>
-              <a:t>Combinación 3 · ofertas 5, 3, 4</a:t>
+                  <a:srgbClr val="3A4457"/>
+                </a:solidFill>
+                <a:latin typeface="Calibri"/>
+              </a:rPr>
+              <a:t>Oferta descartada</a:t>
             </a:r>
           </a:p>
         </p:txBody>
@@ -17676,8 +15718,8 @@
         </p:nvSpPr>
         <p:spPr>
           <a:xfrm>
-            <a:off x="4297680" y="1463040"/>
-            <a:ext cx="3566160" cy="1325880"/>
+            <a:off x="8001000" y="1417320"/>
+            <a:ext cx="1783080" cy="914400"/>
           </a:xfrm>
           <a:prstGeom prst="roundRect">
             <a:avLst>
@@ -17730,7 +15772,7 @@
         </p:nvSpPr>
         <p:spPr>
           <a:xfrm>
-            <a:off x="4462272" y="1463040"/>
+            <a:off x="8165592" y="1417320"/>
             <a:ext cx="548640" cy="54864"/>
           </a:xfrm>
           <a:prstGeom prst="rect">
@@ -17768,67 +15810,14 @@
       </p:sp>
       <p:sp>
         <p:nvSpPr>
-          <p:cNvPr id="20" name="Oval 19"/>
-          <p:cNvSpPr/>
-          <p:nvPr/>
-        </p:nvSpPr>
-        <p:spPr>
-          <a:xfrm>
-            <a:off x="4498848" y="1691640"/>
-            <a:ext cx="502920" cy="502920"/>
-          </a:xfrm>
-          <a:prstGeom prst="ellipse">
-            <a:avLst/>
-          </a:prstGeom>
-          <a:solidFill>
-            <a:srgbClr val="1F3864"/>
-          </a:solidFill>
-          <a:ln>
-            <a:noFill/>
-          </a:ln>
-          <a:effectLst/>
-        </p:spPr>
-        <p:style>
-          <a:lnRef idx="1">
-            <a:schemeClr val="accent1"/>
-          </a:lnRef>
-          <a:fillRef idx="3">
-            <a:schemeClr val="accent1"/>
-          </a:fillRef>
-          <a:effectRef idx="2">
-            <a:schemeClr val="accent1"/>
-          </a:effectRef>
-          <a:fontRef idx="minor">
-            <a:schemeClr val="lt1"/>
-          </a:fontRef>
-        </p:style>
-        <p:txBody>
-          <a:bodyPr rtlCol="0" anchor="ctr" lIns="0" rIns="0" tIns="0" bIns="0"/>
-          <a:lstStyle/>
-          <a:p>
-            <a:pPr algn="ctr"/>
-            <a:r>
-              <a:rPr sz="1500" b="1">
-                <a:solidFill>
-                  <a:srgbClr val="FFFFFF"/>
-                </a:solidFill>
-                <a:latin typeface="Calibri"/>
-              </a:rPr>
-              <a:t>↑</a:t>
-            </a:r>
-          </a:p>
-        </p:txBody>
-      </p:sp>
-      <p:sp>
-        <p:nvSpPr>
-          <p:cNvPr id="21" name="TextBox 20"/>
+          <p:cNvPr id="20" name="TextBox 19"/>
           <p:cNvSpPr txBox="1"/>
           <p:nvPr/>
         </p:nvSpPr>
         <p:spPr>
           <a:xfrm>
-            <a:off x="5120640" y="1645920"/>
-            <a:ext cx="2651760" cy="274320"/>
+            <a:off x="8092440" y="1527048"/>
+            <a:ext cx="1645920" cy="320040"/>
           </a:xfrm>
           <a:prstGeom prst="rect">
             <a:avLst/>
@@ -17843,27 +15832,27 @@
           <a:p>
             <a:pPr algn="l"/>
             <a:r>
-              <a:rPr sz="1000" b="1" i="0" spc="100">
+              <a:rPr sz="900" b="1" i="0">
                 <a:solidFill>
                   <a:srgbClr val="6B7280"/>
                 </a:solidFill>
                 <a:latin typeface="Calibri"/>
               </a:rPr>
-              <a:t>REFERENCIA ALTA · $/ha</a:t>
-            </a:r>
-          </a:p>
-        </p:txBody>
-      </p:sp>
-      <p:sp>
-        <p:nvSpPr>
-          <p:cNvPr id="22" name="TextBox 21"/>
+              <a:t>Promedio</a:t>
+            </a:r>
+          </a:p>
+        </p:txBody>
+      </p:sp>
+      <p:sp>
+        <p:nvSpPr>
+          <p:cNvPr id="21" name="TextBox 20"/>
           <p:cNvSpPr txBox="1"/>
           <p:nvPr/>
         </p:nvSpPr>
         <p:spPr>
           <a:xfrm>
-            <a:off x="5120640" y="1883664"/>
-            <a:ext cx="2651760" cy="548640"/>
+            <a:off x="8092440" y="1801368"/>
+            <a:ext cx="1645920" cy="457200"/>
           </a:xfrm>
           <a:prstGeom prst="rect">
             <a:avLst/>
@@ -17878,62 +15867,27 @@
           <a:p>
             <a:pPr algn="l"/>
             <a:r>
-              <a:rPr sz="2600" b="1" i="0">
+              <a:rPr sz="1700" b="1" i="0">
                 <a:solidFill>
                   <a:srgbClr val="1F3864"/>
                 </a:solidFill>
                 <a:latin typeface="Calibri"/>
               </a:rPr>
-              <a:t>$ 630,0 M</a:t>
-            </a:r>
-          </a:p>
-        </p:txBody>
-      </p:sp>
-      <p:sp>
-        <p:nvSpPr>
-          <p:cNvPr id="23" name="TextBox 22"/>
-          <p:cNvSpPr txBox="1"/>
-          <p:nvPr/>
-        </p:nvSpPr>
-        <p:spPr>
-          <a:xfrm>
-            <a:off x="5120640" y="2404872"/>
-            <a:ext cx="2651760" cy="320040"/>
-          </a:xfrm>
-          <a:prstGeom prst="rect">
-            <a:avLst/>
-          </a:prstGeom>
-          <a:noFill/>
-        </p:spPr>
-        <p:txBody>
-          <a:bodyPr wrap="square" anchor="t" lIns="36576" rIns="36576" tIns="18288" bIns="18288">
-            <a:spAutoFit/>
-          </a:bodyPr>
-          <a:lstStyle/>
-          <a:p>
-            <a:pPr algn="l"/>
-            <a:r>
-              <a:rPr sz="1000" b="0" i="0">
-                <a:solidFill>
-                  <a:srgbClr val="6B7280"/>
-                </a:solidFill>
-                <a:latin typeface="Calibri"/>
-              </a:rPr>
-              <a:t>Combinación 1 · ofertas 3, 4, 6</a:t>
-            </a:r>
-          </a:p>
-        </p:txBody>
-      </p:sp>
-      <p:sp>
-        <p:nvSpPr>
-          <p:cNvPr id="24" name="Rounded Rectangle 23"/>
+              <a:t>$ 449,6 M</a:t>
+            </a:r>
+          </a:p>
+        </p:txBody>
+      </p:sp>
+      <p:sp>
+        <p:nvSpPr>
+          <p:cNvPr id="22" name="Rounded Rectangle 21"/>
           <p:cNvSpPr/>
           <p:nvPr/>
         </p:nvSpPr>
         <p:spPr>
           <a:xfrm>
-            <a:off x="8046720" y="1463040"/>
-            <a:ext cx="3611880" cy="1325880"/>
+            <a:off x="9875520" y="1417320"/>
+            <a:ext cx="1783080" cy="914400"/>
           </a:xfrm>
           <a:prstGeom prst="roundRect">
             <a:avLst>
@@ -17980,13 +15934,13 @@
       </p:sp>
       <p:sp>
         <p:nvSpPr>
-          <p:cNvPr id="25" name="Rectangle 24"/>
+          <p:cNvPr id="23" name="Rectangle 22"/>
           <p:cNvSpPr/>
           <p:nvPr/>
         </p:nvSpPr>
         <p:spPr>
           <a:xfrm>
-            <a:off x="8211312" y="1463040"/>
+            <a:off x="10040112" y="1417320"/>
             <a:ext cx="548640" cy="54864"/>
           </a:xfrm>
           <a:prstGeom prst="rect">
@@ -18024,67 +15978,14 @@
       </p:sp>
       <p:sp>
         <p:nvSpPr>
-          <p:cNvPr id="26" name="Oval 25"/>
-          <p:cNvSpPr/>
-          <p:nvPr/>
-        </p:nvSpPr>
-        <p:spPr>
-          <a:xfrm>
-            <a:off x="8247888" y="1691640"/>
-            <a:ext cx="502920" cy="502920"/>
-          </a:xfrm>
-          <a:prstGeom prst="ellipse">
-            <a:avLst/>
-          </a:prstGeom>
-          <a:solidFill>
-            <a:srgbClr val="1F3864"/>
-          </a:solidFill>
-          <a:ln>
-            <a:noFill/>
-          </a:ln>
-          <a:effectLst/>
-        </p:spPr>
-        <p:style>
-          <a:lnRef idx="1">
-            <a:schemeClr val="accent1"/>
-          </a:lnRef>
-          <a:fillRef idx="3">
-            <a:schemeClr val="accent1"/>
-          </a:fillRef>
-          <a:effectRef idx="2">
-            <a:schemeClr val="accent1"/>
-          </a:effectRef>
-          <a:fontRef idx="minor">
-            <a:schemeClr val="lt1"/>
-          </a:fontRef>
-        </p:style>
-        <p:txBody>
-          <a:bodyPr rtlCol="0" anchor="ctr" lIns="0" rIns="0" tIns="0" bIns="0"/>
-          <a:lstStyle/>
-          <a:p>
-            <a:pPr algn="ctr"/>
-            <a:r>
-              <a:rPr sz="1500" b="1">
-                <a:solidFill>
-                  <a:srgbClr val="FFFFFF"/>
-                </a:solidFill>
-                <a:latin typeface="Calibri"/>
-              </a:rPr>
-              <a:t>↔</a:t>
-            </a:r>
-          </a:p>
-        </p:txBody>
-      </p:sp>
-      <p:sp>
-        <p:nvSpPr>
-          <p:cNvPr id="27" name="TextBox 26"/>
+          <p:cNvPr id="24" name="TextBox 23"/>
           <p:cNvSpPr txBox="1"/>
           <p:nvPr/>
         </p:nvSpPr>
         <p:spPr>
           <a:xfrm>
-            <a:off x="8869680" y="1645920"/>
-            <a:ext cx="2697480" cy="274320"/>
+            <a:off x="9966960" y="1527048"/>
+            <a:ext cx="1645920" cy="320040"/>
           </a:xfrm>
           <a:prstGeom prst="rect">
             <a:avLst/>
@@ -18099,27 +16000,27 @@
           <a:p>
             <a:pPr algn="l"/>
             <a:r>
-              <a:rPr sz="1000" b="1" i="0" spc="100">
+              <a:rPr sz="900" b="1" i="0">
                 <a:solidFill>
                   <a:srgbClr val="6B7280"/>
                 </a:solidFill>
                 <a:latin typeface="Calibri"/>
               </a:rPr>
-              <a:t>AMPLITUD DEL RANGO</a:t>
-            </a:r>
-          </a:p>
-        </p:txBody>
-      </p:sp>
-      <p:sp>
-        <p:nvSpPr>
-          <p:cNvPr id="28" name="TextBox 27"/>
+              <a:t>Desviación estándar</a:t>
+            </a:r>
+          </a:p>
+        </p:txBody>
+      </p:sp>
+      <p:sp>
+        <p:nvSpPr>
+          <p:cNvPr id="25" name="TextBox 24"/>
           <p:cNvSpPr txBox="1"/>
           <p:nvPr/>
         </p:nvSpPr>
         <p:spPr>
           <a:xfrm>
-            <a:off x="8869680" y="1883664"/>
-            <a:ext cx="2697480" cy="548640"/>
+            <a:off x="9966960" y="1801368"/>
+            <a:ext cx="1645920" cy="457200"/>
           </a:xfrm>
           <a:prstGeom prst="rect">
             <a:avLst/>
@@ -18134,62 +16035,27 @@
           <a:p>
             <a:pPr algn="l"/>
             <a:r>
-              <a:rPr sz="2600" b="1" i="0">
+              <a:rPr sz="1700" b="1" i="0">
                 <a:solidFill>
                   <a:srgbClr val="1F3864"/>
                 </a:solidFill>
                 <a:latin typeface="Calibri"/>
               </a:rPr>
-              <a:t>$ 105,0 M</a:t>
-            </a:r>
-          </a:p>
-        </p:txBody>
-      </p:sp>
-      <p:sp>
-        <p:nvSpPr>
-          <p:cNvPr id="29" name="TextBox 28"/>
-          <p:cNvSpPr txBox="1"/>
-          <p:nvPr/>
-        </p:nvSpPr>
-        <p:spPr>
-          <a:xfrm>
-            <a:off x="8869680" y="2404872"/>
-            <a:ext cx="2697480" cy="320040"/>
-          </a:xfrm>
-          <a:prstGeom prst="rect">
-            <a:avLst/>
-          </a:prstGeom>
-          <a:noFill/>
-        </p:spPr>
-        <p:txBody>
-          <a:bodyPr wrap="square" anchor="t" lIns="36576" rIns="36576" tIns="18288" bIns="18288">
-            <a:spAutoFit/>
-          </a:bodyPr>
-          <a:lstStyle/>
-          <a:p>
-            <a:pPr algn="l"/>
-            <a:r>
-              <a:rPr sz="1000" b="0" i="0">
-                <a:solidFill>
-                  <a:srgbClr val="6B7280"/>
-                </a:solidFill>
-                <a:latin typeface="Calibri"/>
-              </a:rPr>
-              <a:t>20 % de la referencia baja</a:t>
-            </a:r>
-          </a:p>
-        </p:txBody>
-      </p:sp>
-      <p:sp>
-        <p:nvSpPr>
-          <p:cNvPr id="30" name="Rounded Rectangle 29"/>
+              <a:t>$ 435,8 M</a:t>
+            </a:r>
+          </a:p>
+        </p:txBody>
+      </p:sp>
+      <p:sp>
+        <p:nvSpPr>
+          <p:cNvPr id="26" name="Rounded Rectangle 25"/>
           <p:cNvSpPr/>
           <p:nvPr/>
         </p:nvSpPr>
         <p:spPr>
           <a:xfrm>
-            <a:off x="548640" y="2971800"/>
-            <a:ext cx="11109960" cy="1828800"/>
+            <a:off x="8001000" y="2441448"/>
+            <a:ext cx="1783080" cy="914400"/>
           </a:xfrm>
           <a:prstGeom prst="roundRect">
             <a:avLst>
@@ -18236,57 +16102,20 @@
       </p:sp>
       <p:sp>
         <p:nvSpPr>
-          <p:cNvPr id="31" name="TextBox 30"/>
-          <p:cNvSpPr txBox="1"/>
-          <p:nvPr/>
-        </p:nvSpPr>
-        <p:spPr>
-          <a:xfrm>
-            <a:off x="777240" y="3063240"/>
-            <a:ext cx="7315200" cy="274320"/>
-          </a:xfrm>
-          <a:prstGeom prst="rect">
-            <a:avLst/>
-          </a:prstGeom>
-          <a:noFill/>
-        </p:spPr>
-        <p:txBody>
-          <a:bodyPr wrap="square" anchor="t" lIns="36576" rIns="36576" tIns="18288" bIns="18288">
-            <a:spAutoFit/>
-          </a:bodyPr>
-          <a:lstStyle/>
-          <a:p>
-            <a:pPr algn="l"/>
-            <a:r>
-              <a:rPr sz="1000" b="1" i="0" spc="100">
-                <a:solidFill>
-                  <a:srgbClr val="6B7280"/>
-                </a:solidFill>
-                <a:latin typeface="Calibri"/>
-              </a:rPr>
-              <a:t>POSICIÓN DEL VALOR ADOPTADO FRENTE AL RANGO · $ millones por ha</a:t>
-            </a:r>
-          </a:p>
-        </p:txBody>
-      </p:sp>
-      <p:sp>
-        <p:nvSpPr>
-          <p:cNvPr id="32" name="Rounded Rectangle 31"/>
+          <p:cNvPr id="27" name="Rectangle 26"/>
           <p:cNvSpPr/>
           <p:nvPr/>
         </p:nvSpPr>
         <p:spPr>
           <a:xfrm>
-            <a:off x="914400" y="3931920"/>
-            <a:ext cx="10424160" cy="329184"/>
-          </a:xfrm>
-          <a:prstGeom prst="roundRect">
-            <a:avLst>
-              <a:gd name="adj" fmla="val 50000"/>
-            </a:avLst>
+            <a:off x="8165592" y="2441448"/>
+            <a:ext cx="548640" cy="54864"/>
+          </a:xfrm>
+          <a:prstGeom prst="rect">
+            <a:avLst/>
           </a:prstGeom>
           <a:solidFill>
-            <a:srgbClr val="D9D9D9"/>
+            <a:srgbClr val="C0392B"/>
           </a:solidFill>
           <a:ln>
             <a:noFill/>
@@ -18317,35 +16146,105 @@
       </p:sp>
       <p:sp>
         <p:nvSpPr>
-          <p:cNvPr id="33" name="Rounded Rectangle 32"/>
+          <p:cNvPr id="28" name="TextBox 27"/>
+          <p:cNvSpPr txBox="1"/>
+          <p:nvPr/>
+        </p:nvSpPr>
+        <p:spPr>
+          <a:xfrm>
+            <a:off x="8092440" y="2551176"/>
+            <a:ext cx="1645920" cy="320040"/>
+          </a:xfrm>
+          <a:prstGeom prst="rect">
+            <a:avLst/>
+          </a:prstGeom>
+          <a:noFill/>
+        </p:spPr>
+        <p:txBody>
+          <a:bodyPr wrap="square" anchor="t" lIns="36576" rIns="36576" tIns="18288" bIns="18288">
+            <a:spAutoFit/>
+          </a:bodyPr>
+          <a:lstStyle/>
+          <a:p>
+            <a:pPr algn="l"/>
+            <a:r>
+              <a:rPr sz="900" b="1" i="0">
+                <a:solidFill>
+                  <a:srgbClr val="6B7280"/>
+                </a:solidFill>
+                <a:latin typeface="Calibri"/>
+              </a:rPr>
+              <a:t>Coeficiente de variación</a:t>
+            </a:r>
+          </a:p>
+        </p:txBody>
+      </p:sp>
+      <p:sp>
+        <p:nvSpPr>
+          <p:cNvPr id="29" name="TextBox 28"/>
+          <p:cNvSpPr txBox="1"/>
+          <p:nvPr/>
+        </p:nvSpPr>
+        <p:spPr>
+          <a:xfrm>
+            <a:off x="8092440" y="2825496"/>
+            <a:ext cx="1645920" cy="457200"/>
+          </a:xfrm>
+          <a:prstGeom prst="rect">
+            <a:avLst/>
+          </a:prstGeom>
+          <a:noFill/>
+        </p:spPr>
+        <p:txBody>
+          <a:bodyPr wrap="square" anchor="ctr" lIns="36576" rIns="36576" tIns="18288" bIns="18288">
+            <a:spAutoFit/>
+          </a:bodyPr>
+          <a:lstStyle/>
+          <a:p>
+            <a:pPr algn="l"/>
+            <a:r>
+              <a:rPr sz="1700" b="1" i="0">
+                <a:solidFill>
+                  <a:srgbClr val="C0392B"/>
+                </a:solidFill>
+                <a:latin typeface="Calibri"/>
+              </a:rPr>
+              <a:t>96,9 %</a:t>
+            </a:r>
+          </a:p>
+        </p:txBody>
+      </p:sp>
+      <p:sp>
+        <p:nvSpPr>
+          <p:cNvPr id="30" name="Rounded Rectangle 29"/>
           <p:cNvSpPr/>
           <p:nvPr/>
         </p:nvSpPr>
         <p:spPr>
           <a:xfrm>
-            <a:off x="5262441" y="3931920"/>
-            <a:ext cx="2761872" cy="329184"/>
+            <a:off x="9875520" y="2441448"/>
+            <a:ext cx="1783080" cy="914400"/>
           </a:xfrm>
           <a:prstGeom prst="roundRect">
             <a:avLst>
-              <a:gd name="adj" fmla="val 50000"/>
+              <a:gd name="adj" fmla="val 5000"/>
             </a:avLst>
           </a:prstGeom>
-          <a:gradFill rotWithShape="1">
-            <a:gsLst>
-              <a:gs pos="0">
-                <a:srgbClr val="1F3864"/>
-              </a:gs>
-              <a:gs pos="100000">
-                <a:srgbClr val="2F5597"/>
-              </a:gs>
-            </a:gsLst>
-            <a:lin scaled="0" ang="0"/>
-          </a:gradFill>
-          <a:ln>
-            <a:noFill/>
+          <a:solidFill>
+            <a:srgbClr val="FFFFFF"/>
+          </a:solidFill>
+          <a:ln w="9525">
+            <a:solidFill>
+              <a:srgbClr val="E1E6EF"/>
+            </a:solidFill>
           </a:ln>
-          <a:effectLst/>
+          <a:effectLst>
+            <a:outerShdw blurRad="114300" dist="38100" dir="5400000" algn="t" rotWithShape="0">
+              <a:srgbClr val="0F1F3D">
+                <a:alpha val="18000"/>
+              </a:srgbClr>
+            </a:outerShdw>
+          </a:effectLst>
         </p:spPr>
         <p:style>
           <a:lnRef idx="1">
@@ -18371,236 +16270,16 @@
       </p:sp>
       <p:sp>
         <p:nvSpPr>
-          <p:cNvPr id="34" name="Oval 33"/>
+          <p:cNvPr id="31" name="Rectangle 30"/>
           <p:cNvSpPr/>
           <p:nvPr/>
         </p:nvSpPr>
         <p:spPr>
           <a:xfrm>
-            <a:off x="5134425" y="3968496"/>
-            <a:ext cx="256032" cy="256032"/>
-          </a:xfrm>
-          <a:prstGeom prst="ellipse">
-            <a:avLst/>
-          </a:prstGeom>
-          <a:solidFill>
-            <a:srgbClr val="FFFFFF"/>
-          </a:solidFill>
-          <a:ln>
-            <a:noFill/>
-          </a:ln>
-          <a:effectLst/>
-        </p:spPr>
-        <p:style>
-          <a:lnRef idx="1">
-            <a:schemeClr val="accent1"/>
-          </a:lnRef>
-          <a:fillRef idx="3">
-            <a:schemeClr val="accent1"/>
-          </a:fillRef>
-          <a:effectRef idx="2">
-            <a:schemeClr val="accent1"/>
-          </a:effectRef>
-          <a:fontRef idx="minor">
-            <a:schemeClr val="lt1"/>
-          </a:fontRef>
-        </p:style>
-        <p:txBody>
-          <a:bodyPr rtlCol="0" anchor="ctr" lIns="0" rIns="0" tIns="0" bIns="0"/>
-          <a:lstStyle/>
-          <a:p>
-            <a:pPr algn="ctr"/>
-            <a:r>
-              <a:rPr sz="1400" b="1">
-                <a:solidFill>
-                  <a:srgbClr val="1F3864"/>
-                </a:solidFill>
-                <a:latin typeface="Calibri"/>
-              </a:rPr>
-              <a:t/>
-            </a:r>
-          </a:p>
-        </p:txBody>
-      </p:sp>
-      <p:sp>
-        <p:nvSpPr>
-          <p:cNvPr id="35" name="TextBox 34"/>
-          <p:cNvSpPr txBox="1"/>
-          <p:nvPr/>
-        </p:nvSpPr>
-        <p:spPr>
-          <a:xfrm>
-            <a:off x="4439481" y="4343400"/>
-            <a:ext cx="1645920" cy="320040"/>
-          </a:xfrm>
-          <a:prstGeom prst="rect">
-            <a:avLst/>
-          </a:prstGeom>
-          <a:noFill/>
-        </p:spPr>
-        <p:txBody>
-          <a:bodyPr wrap="square" anchor="t" lIns="36576" rIns="36576" tIns="18288" bIns="18288">
-            <a:spAutoFit/>
-          </a:bodyPr>
-          <a:lstStyle/>
-          <a:p>
-            <a:pPr algn="ctr"/>
-            <a:r>
-              <a:rPr sz="1200" b="1" i="0">
-                <a:solidFill>
-                  <a:srgbClr val="1F3864"/>
-                </a:solidFill>
-                <a:latin typeface="Calibri"/>
-              </a:rPr>
-              <a:t>Baja 525,0</a:t>
-            </a:r>
-          </a:p>
-        </p:txBody>
-      </p:sp>
-      <p:sp>
-        <p:nvSpPr>
-          <p:cNvPr id="36" name="Oval 35"/>
-          <p:cNvSpPr/>
-          <p:nvPr/>
-        </p:nvSpPr>
-        <p:spPr>
-          <a:xfrm>
-            <a:off x="7896297" y="3968496"/>
-            <a:ext cx="256032" cy="256032"/>
-          </a:xfrm>
-          <a:prstGeom prst="ellipse">
-            <a:avLst/>
-          </a:prstGeom>
-          <a:solidFill>
-            <a:srgbClr val="FFFFFF"/>
-          </a:solidFill>
-          <a:ln>
-            <a:noFill/>
-          </a:ln>
-          <a:effectLst/>
-        </p:spPr>
-        <p:style>
-          <a:lnRef idx="1">
-            <a:schemeClr val="accent1"/>
-          </a:lnRef>
-          <a:fillRef idx="3">
-            <a:schemeClr val="accent1"/>
-          </a:fillRef>
-          <a:effectRef idx="2">
-            <a:schemeClr val="accent1"/>
-          </a:effectRef>
-          <a:fontRef idx="minor">
-            <a:schemeClr val="lt1"/>
-          </a:fontRef>
-        </p:style>
-        <p:txBody>
-          <a:bodyPr rtlCol="0" anchor="ctr" lIns="0" rIns="0" tIns="0" bIns="0"/>
-          <a:lstStyle/>
-          <a:p>
-            <a:pPr algn="ctr"/>
-            <a:r>
-              <a:rPr sz="1400" b="1">
-                <a:solidFill>
-                  <a:srgbClr val="1F3864"/>
-                </a:solidFill>
-                <a:latin typeface="Calibri"/>
-              </a:rPr>
-              <a:t/>
-            </a:r>
-          </a:p>
-        </p:txBody>
-      </p:sp>
-      <p:sp>
-        <p:nvSpPr>
-          <p:cNvPr id="37" name="TextBox 36"/>
-          <p:cNvSpPr txBox="1"/>
-          <p:nvPr/>
-        </p:nvSpPr>
-        <p:spPr>
-          <a:xfrm>
-            <a:off x="7201353" y="4343400"/>
-            <a:ext cx="1645920" cy="320040"/>
-          </a:xfrm>
-          <a:prstGeom prst="rect">
-            <a:avLst/>
-          </a:prstGeom>
-          <a:noFill/>
-        </p:spPr>
-        <p:txBody>
-          <a:bodyPr wrap="square" anchor="t" lIns="36576" rIns="36576" tIns="18288" bIns="18288">
-            <a:spAutoFit/>
-          </a:bodyPr>
-          <a:lstStyle/>
-          <a:p>
-            <a:pPr algn="ctr"/>
-            <a:r>
-              <a:rPr sz="1200" b="1" i="0">
-                <a:solidFill>
-                  <a:srgbClr val="1F3864"/>
-                </a:solidFill>
-                <a:latin typeface="Calibri"/>
-              </a:rPr>
-              <a:t>Alta 630,0</a:t>
-            </a:r>
-          </a:p>
-        </p:txBody>
-      </p:sp>
-      <p:sp>
-        <p:nvSpPr>
-          <p:cNvPr id="38" name="Rectangle 37"/>
-          <p:cNvSpPr/>
-          <p:nvPr/>
-        </p:nvSpPr>
-        <p:spPr>
-          <a:xfrm>
-            <a:off x="3264729" y="3611880"/>
-            <a:ext cx="30000" cy="320040"/>
-          </a:xfrm>
-          <a:prstGeom prst="rect">
-            <a:avLst/>
-          </a:prstGeom>
-          <a:solidFill>
-            <a:srgbClr val="37863C"/>
-          </a:solidFill>
-          <a:ln>
-            <a:noFill/>
-          </a:ln>
-          <a:effectLst/>
-        </p:spPr>
-        <p:style>
-          <a:lnRef idx="1">
-            <a:schemeClr val="accent1"/>
-          </a:lnRef>
-          <a:fillRef idx="3">
-            <a:schemeClr val="accent1"/>
-          </a:fillRef>
-          <a:effectRef idx="2">
-            <a:schemeClr val="accent1"/>
-          </a:effectRef>
-          <a:fontRef idx="minor">
-            <a:schemeClr val="lt1"/>
-          </a:fontRef>
-        </p:style>
-        <p:txBody>
-          <a:bodyPr rtlCol="0" anchor="ctr"/>
-          <a:lstStyle/>
-          <a:p>
-            <a:pPr algn="ctr"/>
-          </a:p>
-        </p:txBody>
-      </p:sp>
-      <p:sp>
-        <p:nvSpPr>
-          <p:cNvPr id="39" name="Oval 38"/>
-          <p:cNvSpPr/>
-          <p:nvPr/>
-        </p:nvSpPr>
-        <p:spPr>
-          <a:xfrm>
-            <a:off x="3124281" y="3941064"/>
-            <a:ext cx="310896" cy="310896"/>
-          </a:xfrm>
-          <a:prstGeom prst="ellipse">
+            <a:off x="10040112" y="2441448"/>
+            <a:ext cx="548640" cy="54864"/>
+          </a:xfrm>
+          <a:prstGeom prst="rect">
             <a:avLst/>
           </a:prstGeom>
           <a:solidFill>
@@ -18626,32 +16305,23 @@
           </a:fontRef>
         </p:style>
         <p:txBody>
-          <a:bodyPr rtlCol="0" anchor="ctr" lIns="0" rIns="0" tIns="0" bIns="0"/>
+          <a:bodyPr rtlCol="0" anchor="ctr"/>
           <a:lstStyle/>
           <a:p>
             <a:pPr algn="ctr"/>
-            <a:r>
-              <a:rPr sz="1400" b="1">
-                <a:solidFill>
-                  <a:srgbClr val="1F3864"/>
-                </a:solidFill>
-                <a:latin typeface="Calibri"/>
-              </a:rPr>
-              <a:t/>
-            </a:r>
-          </a:p>
-        </p:txBody>
-      </p:sp>
-      <p:sp>
-        <p:nvSpPr>
-          <p:cNvPr id="40" name="TextBox 39"/>
+          </a:p>
+        </p:txBody>
+      </p:sp>
+      <p:sp>
+        <p:nvSpPr>
+          <p:cNvPr id="32" name="TextBox 31"/>
           <p:cNvSpPr txBox="1"/>
           <p:nvPr/>
         </p:nvSpPr>
         <p:spPr>
           <a:xfrm>
-            <a:off x="2091009" y="3291840"/>
-            <a:ext cx="2377440" cy="320040"/>
+            <a:off x="9966960" y="2551176"/>
+            <a:ext cx="1645920" cy="320040"/>
           </a:xfrm>
           <a:prstGeom prst="rect">
             <a:avLst/>
@@ -18664,549 +16334,162 @@
           </a:bodyPr>
           <a:lstStyle/>
           <a:p>
+            <a:pPr algn="l"/>
+            <a:r>
+              <a:rPr sz="900" b="1" i="0">
+                <a:solidFill>
+                  <a:srgbClr val="6B7280"/>
+                </a:solidFill>
+                <a:latin typeface="Calibri"/>
+              </a:rPr>
+              <a:t>Coeficiente de asimetría</a:t>
+            </a:r>
+          </a:p>
+        </p:txBody>
+      </p:sp>
+      <p:sp>
+        <p:nvSpPr>
+          <p:cNvPr id="33" name="TextBox 32"/>
+          <p:cNvSpPr txBox="1"/>
+          <p:nvPr/>
+        </p:nvSpPr>
+        <p:spPr>
+          <a:xfrm>
+            <a:off x="9966960" y="2825496"/>
+            <a:ext cx="1645920" cy="457200"/>
+          </a:xfrm>
+          <a:prstGeom prst="rect">
+            <a:avLst/>
+          </a:prstGeom>
+          <a:noFill/>
+        </p:spPr>
+        <p:txBody>
+          <a:bodyPr wrap="square" anchor="ctr" lIns="36576" rIns="36576" tIns="18288" bIns="18288">
+            <a:spAutoFit/>
+          </a:bodyPr>
+          <a:lstStyle/>
+          <a:p>
+            <a:pPr algn="l"/>
+            <a:r>
+              <a:rPr sz="1700" b="1" i="0">
+                <a:solidFill>
+                  <a:srgbClr val="1F3864"/>
+                </a:solidFill>
+                <a:latin typeface="Calibri"/>
+              </a:rPr>
+              <a:t>0,69</a:t>
+            </a:r>
+          </a:p>
+        </p:txBody>
+      </p:sp>
+      <p:sp>
+        <p:nvSpPr>
+          <p:cNvPr id="34" name="Rounded Rectangle 33"/>
+          <p:cNvSpPr/>
+          <p:nvPr/>
+        </p:nvSpPr>
+        <p:spPr>
+          <a:xfrm>
+            <a:off x="8001000" y="3465576"/>
+            <a:ext cx="1783080" cy="914400"/>
+          </a:xfrm>
+          <a:prstGeom prst="roundRect">
+            <a:avLst>
+              <a:gd name="adj" fmla="val 5000"/>
+            </a:avLst>
+          </a:prstGeom>
+          <a:solidFill>
+            <a:srgbClr val="FFFFFF"/>
+          </a:solidFill>
+          <a:ln w="9525">
+            <a:solidFill>
+              <a:srgbClr val="E1E6EF"/>
+            </a:solidFill>
+          </a:ln>
+          <a:effectLst>
+            <a:outerShdw blurRad="114300" dist="38100" dir="5400000" algn="t" rotWithShape="0">
+              <a:srgbClr val="0F1F3D">
+                <a:alpha val="18000"/>
+              </a:srgbClr>
+            </a:outerShdw>
+          </a:effectLst>
+        </p:spPr>
+        <p:style>
+          <a:lnRef idx="1">
+            <a:schemeClr val="accent1"/>
+          </a:lnRef>
+          <a:fillRef idx="3">
+            <a:schemeClr val="accent1"/>
+          </a:fillRef>
+          <a:effectRef idx="2">
+            <a:schemeClr val="accent1"/>
+          </a:effectRef>
+          <a:fontRef idx="minor">
+            <a:schemeClr val="lt1"/>
+          </a:fontRef>
+        </p:style>
+        <p:txBody>
+          <a:bodyPr rtlCol="0" anchor="ctr"/>
+          <a:lstStyle/>
+          <a:p>
             <a:pPr algn="ctr"/>
-            <a:r>
-              <a:rPr sz="1200" b="1" i="0">
-                <a:solidFill>
-                  <a:srgbClr val="37863C"/>
-                </a:solidFill>
-                <a:latin typeface="Calibri"/>
-              </a:rPr>
-              <a:t>Adoptado 449,6</a:t>
-            </a:r>
-          </a:p>
-        </p:txBody>
-      </p:sp>
-      <p:graphicFrame>
-        <p:nvGraphicFramePr>
-          <p:cNvPr id="41" name="Table 40"/>
-          <p:cNvGraphicFramePr>
-            <a:graphicFrameLocks noGrp="1"/>
-          </p:cNvGraphicFramePr>
-          <p:nvPr/>
-        </p:nvGraphicFramePr>
-        <p:xfrm>
-          <a:off x="548640" y="4983480"/>
-          <a:ext cx="11109955" cy="932688"/>
-        </p:xfrm>
-        <a:graphic>
-          <a:graphicData uri="http://schemas.openxmlformats.org/drawingml/2006/table">
-            <a:tbl>
-              <a:tblPr firstRow="0" bandRow="0">
-                <a:tableStyleId>{5C22544A-7EE6-4342-B048-85BDC9FD1C3A}</a:tableStyleId>
-              </a:tblPr>
-              <a:tblGrid>
-                <a:gridCol w="1932166"/>
-                <a:gridCol w="1932166"/>
-                <a:gridCol w="1569885"/>
-                <a:gridCol w="1932166"/>
-                <a:gridCol w="1449125"/>
-                <a:gridCol w="1086843"/>
-                <a:gridCol w="1207604"/>
-              </a:tblGrid>
-              <a:tr h="310896">
-                <a:tc>
-                  <a:txBody>
-                    <a:bodyPr wrap="square"/>
-                    <a:lstStyle/>
-                    <a:p>
-                      <a:pPr algn="ctr"/>
-                      <a:r>
-                        <a:rPr sz="1050" b="1">
-                          <a:solidFill>
-                            <a:srgbClr val="FFFFFF"/>
-                          </a:solidFill>
-                          <a:latin typeface="Calibri"/>
-                        </a:rPr>
-                        <a:t>Referencia</a:t>
-                      </a:r>
-                    </a:p>
-                  </a:txBody>
-                  <a:tcPr marL="73152" marR="73152" marT="18288" marB="18288" anchor="ctr">
-                    <a:solidFill>
-                      <a:srgbClr val="1F3864"/>
-                    </a:solidFill>
-                  </a:tcPr>
-                </a:tc>
-                <a:tc>
-                  <a:txBody>
-                    <a:bodyPr wrap="square"/>
-                    <a:lstStyle/>
-                    <a:p>
-                      <a:pPr algn="ctr"/>
-                      <a:r>
-                        <a:rPr sz="1050" b="1">
-                          <a:solidFill>
-                            <a:srgbClr val="FFFFFF"/>
-                          </a:solidFill>
-                          <a:latin typeface="Calibri"/>
-                        </a:rPr>
-                        <a:t>Combinación</a:t>
-                      </a:r>
-                    </a:p>
-                  </a:txBody>
-                  <a:tcPr marL="73152" marR="73152" marT="18288" marB="18288" anchor="ctr">
-                    <a:solidFill>
-                      <a:srgbClr val="1F3864"/>
-                    </a:solidFill>
-                  </a:tcPr>
-                </a:tc>
-                <a:tc>
-                  <a:txBody>
-                    <a:bodyPr wrap="square"/>
-                    <a:lstStyle/>
-                    <a:p>
-                      <a:pPr algn="ctr"/>
-                      <a:r>
-                        <a:rPr sz="1050" b="1">
-                          <a:solidFill>
-                            <a:srgbClr val="FFFFFF"/>
-                          </a:solidFill>
-                          <a:latin typeface="Calibri"/>
-                        </a:rPr>
-                        <a:t>Ofertas</a:t>
-                      </a:r>
-                    </a:p>
-                  </a:txBody>
-                  <a:tcPr marL="73152" marR="73152" marT="18288" marB="18288" anchor="ctr">
-                    <a:solidFill>
-                      <a:srgbClr val="1F3864"/>
-                    </a:solidFill>
-                  </a:tcPr>
-                </a:tc>
-                <a:tc>
-                  <a:txBody>
-                    <a:bodyPr wrap="square"/>
-                    <a:lstStyle/>
-                    <a:p>
-                      <a:pPr algn="ctr"/>
-                      <a:r>
-                        <a:rPr sz="1050" b="1">
-                          <a:solidFill>
-                            <a:srgbClr val="FFFFFF"/>
-                          </a:solidFill>
-                          <a:latin typeface="Calibri"/>
-                        </a:rPr>
-                        <a:t>Promedio $/ha</a:t>
-                      </a:r>
-                    </a:p>
-                  </a:txBody>
-                  <a:tcPr marL="73152" marR="73152" marT="18288" marB="18288" anchor="ctr">
-                    <a:solidFill>
-                      <a:srgbClr val="1F3864"/>
-                    </a:solidFill>
-                  </a:tcPr>
-                </a:tc>
-                <a:tc>
-                  <a:txBody>
-                    <a:bodyPr wrap="square"/>
-                    <a:lstStyle/>
-                    <a:p>
-                      <a:pPr algn="ctr"/>
-                      <a:r>
-                        <a:rPr sz="1050" b="1">
-                          <a:solidFill>
-                            <a:srgbClr val="FFFFFF"/>
-                          </a:solidFill>
-                          <a:latin typeface="Calibri"/>
-                        </a:rPr>
-                        <a:t>$/m²</a:t>
-                      </a:r>
-                    </a:p>
-                  </a:txBody>
-                  <a:tcPr marL="73152" marR="73152" marT="18288" marB="18288" anchor="ctr">
-                    <a:solidFill>
-                      <a:srgbClr val="1F3864"/>
-                    </a:solidFill>
-                  </a:tcPr>
-                </a:tc>
-                <a:tc>
-                  <a:txBody>
-                    <a:bodyPr wrap="square"/>
-                    <a:lstStyle/>
-                    <a:p>
-                      <a:pPr algn="ctr"/>
-                      <a:r>
-                        <a:rPr sz="1050" b="1">
-                          <a:solidFill>
-                            <a:srgbClr val="FFFFFF"/>
-                          </a:solidFill>
-                          <a:latin typeface="Calibri"/>
-                        </a:rPr>
-                        <a:t>CV</a:t>
-                      </a:r>
-                    </a:p>
-                  </a:txBody>
-                  <a:tcPr marL="73152" marR="73152" marT="18288" marB="18288" anchor="ctr">
-                    <a:solidFill>
-                      <a:srgbClr val="1F3864"/>
-                    </a:solidFill>
-                  </a:tcPr>
-                </a:tc>
-                <a:tc>
-                  <a:txBody>
-                    <a:bodyPr wrap="square"/>
-                    <a:lstStyle/>
-                    <a:p>
-                      <a:pPr algn="ctr"/>
-                      <a:r>
-                        <a:rPr sz="1050" b="1">
-                          <a:solidFill>
-                            <a:srgbClr val="FFFFFF"/>
-                          </a:solidFill>
-                          <a:latin typeface="Calibri"/>
-                        </a:rPr>
-                        <a:t>¿Cumple?</a:t>
-                      </a:r>
-                    </a:p>
-                  </a:txBody>
-                  <a:tcPr marL="73152" marR="73152" marT="18288" marB="18288" anchor="ctr">
-                    <a:solidFill>
-                      <a:srgbClr val="1F3864"/>
-                    </a:solidFill>
-                  </a:tcPr>
-                </a:tc>
-              </a:tr>
-              <a:tr h="310896">
-                <a:tc>
-                  <a:txBody>
-                    <a:bodyPr wrap="square"/>
-                    <a:lstStyle/>
-                    <a:p>
-                      <a:pPr algn="l"/>
-                      <a:r>
-                        <a:rPr sz="1050" b="0">
-                          <a:solidFill>
-                            <a:srgbClr val="262B33"/>
-                          </a:solidFill>
-                          <a:latin typeface="Calibri"/>
-                        </a:rPr>
-                        <a:t>REFERENCIA BAJA</a:t>
-                      </a:r>
-                    </a:p>
-                  </a:txBody>
-                  <a:tcPr marL="73152" marR="73152" marT="18288" marB="18288" anchor="ctr">
-                    <a:solidFill>
-                      <a:srgbClr val="FFFFFF"/>
-                    </a:solidFill>
-                  </a:tcPr>
-                </a:tc>
-                <a:tc>
-                  <a:txBody>
-                    <a:bodyPr wrap="square"/>
-                    <a:lstStyle/>
-                    <a:p>
-                      <a:pPr algn="l"/>
-                      <a:r>
-                        <a:rPr sz="1050" b="0">
-                          <a:solidFill>
-                            <a:srgbClr val="262B33"/>
-                          </a:solidFill>
-                          <a:latin typeface="Calibri"/>
-                        </a:rPr>
-                        <a:t>Combinación 3</a:t>
-                      </a:r>
-                    </a:p>
-                  </a:txBody>
-                  <a:tcPr marL="73152" marR="73152" marT="18288" marB="18288" anchor="ctr">
-                    <a:solidFill>
-                      <a:srgbClr val="FFFFFF"/>
-                    </a:solidFill>
-                  </a:tcPr>
-                </a:tc>
-                <a:tc>
-                  <a:txBody>
-                    <a:bodyPr wrap="square"/>
-                    <a:lstStyle/>
-                    <a:p>
-                      <a:pPr algn="ctr"/>
-                      <a:r>
-                        <a:rPr sz="1050" b="0">
-                          <a:solidFill>
-                            <a:srgbClr val="262B33"/>
-                          </a:solidFill>
-                          <a:latin typeface="Calibri"/>
-                        </a:rPr>
-                        <a:t>5, 3, 4</a:t>
-                      </a:r>
-                    </a:p>
-                  </a:txBody>
-                  <a:tcPr marL="73152" marR="73152" marT="18288" marB="18288" anchor="ctr">
-                    <a:solidFill>
-                      <a:srgbClr val="FFFFFF"/>
-                    </a:solidFill>
-                  </a:tcPr>
-                </a:tc>
-                <a:tc>
-                  <a:txBody>
-                    <a:bodyPr wrap="square"/>
-                    <a:lstStyle/>
-                    <a:p>
-                      <a:pPr algn="r"/>
-                      <a:r>
-                        <a:rPr sz="1050" b="0">
-                          <a:solidFill>
-                            <a:srgbClr val="262B33"/>
-                          </a:solidFill>
-                          <a:latin typeface="Calibri"/>
-                        </a:rPr>
-                        <a:t>$ 525,0 M</a:t>
-                      </a:r>
-                    </a:p>
-                  </a:txBody>
-                  <a:tcPr marL="73152" marR="73152" marT="18288" marB="18288" anchor="ctr">
-                    <a:solidFill>
-                      <a:srgbClr val="FFFFFF"/>
-                    </a:solidFill>
-                  </a:tcPr>
-                </a:tc>
-                <a:tc>
-                  <a:txBody>
-                    <a:bodyPr wrap="square"/>
-                    <a:lstStyle/>
-                    <a:p>
-                      <a:pPr algn="r"/>
-                      <a:r>
-                        <a:rPr sz="1050" b="0">
-                          <a:solidFill>
-                            <a:srgbClr val="262B33"/>
-                          </a:solidFill>
-                          <a:latin typeface="Calibri"/>
-                        </a:rPr>
-                        <a:t>$ 52.500</a:t>
-                      </a:r>
-                    </a:p>
-                  </a:txBody>
-                  <a:tcPr marL="73152" marR="73152" marT="18288" marB="18288" anchor="ctr">
-                    <a:solidFill>
-                      <a:srgbClr val="FFFFFF"/>
-                    </a:solidFill>
-                  </a:tcPr>
-                </a:tc>
-                <a:tc>
-                  <a:txBody>
-                    <a:bodyPr wrap="square"/>
-                    <a:lstStyle/>
-                    <a:p>
-                      <a:pPr algn="r"/>
-                      <a:r>
-                        <a:rPr sz="1050" b="0">
-                          <a:solidFill>
-                            <a:srgbClr val="262B33"/>
-                          </a:solidFill>
-                          <a:latin typeface="Calibri"/>
-                        </a:rPr>
-                        <a:t>26,2 %</a:t>
-                      </a:r>
-                    </a:p>
-                  </a:txBody>
-                  <a:tcPr marL="73152" marR="73152" marT="18288" marB="18288" anchor="ctr">
-                    <a:solidFill>
-                      <a:srgbClr val="FFFFFF"/>
-                    </a:solidFill>
-                  </a:tcPr>
-                </a:tc>
-                <a:tc>
-                  <a:txBody>
-                    <a:bodyPr wrap="square"/>
-                    <a:lstStyle/>
-                    <a:p>
-                      <a:pPr algn="ctr"/>
-                      <a:r>
-                        <a:rPr sz="1050" b="0">
-                          <a:solidFill>
-                            <a:srgbClr val="C0392B"/>
-                          </a:solidFill>
-                          <a:latin typeface="Calibri"/>
-                        </a:rPr>
-                        <a:t>NO</a:t>
-                      </a:r>
-                    </a:p>
-                  </a:txBody>
-                  <a:tcPr marL="73152" marR="73152" marT="18288" marB="18288" anchor="ctr">
-                    <a:solidFill>
-                      <a:srgbClr val="FFFFFF"/>
-                    </a:solidFill>
-                  </a:tcPr>
-                </a:tc>
-              </a:tr>
-              <a:tr h="310896">
-                <a:tc>
-                  <a:txBody>
-                    <a:bodyPr wrap="square"/>
-                    <a:lstStyle/>
-                    <a:p>
-                      <a:pPr algn="l"/>
-                      <a:r>
-                        <a:rPr sz="1050" b="0">
-                          <a:solidFill>
-                            <a:srgbClr val="262B33"/>
-                          </a:solidFill>
-                          <a:latin typeface="Calibri"/>
-                        </a:rPr>
-                        <a:t>REFERENCIA ALTA</a:t>
-                      </a:r>
-                    </a:p>
-                  </a:txBody>
-                  <a:tcPr marL="73152" marR="73152" marT="18288" marB="18288" anchor="ctr">
-                    <a:solidFill>
-                      <a:srgbClr val="F7F9FC"/>
-                    </a:solidFill>
-                  </a:tcPr>
-                </a:tc>
-                <a:tc>
-                  <a:txBody>
-                    <a:bodyPr wrap="square"/>
-                    <a:lstStyle/>
-                    <a:p>
-                      <a:pPr algn="l"/>
-                      <a:r>
-                        <a:rPr sz="1050" b="0">
-                          <a:solidFill>
-                            <a:srgbClr val="262B33"/>
-                          </a:solidFill>
-                          <a:latin typeface="Calibri"/>
-                        </a:rPr>
-                        <a:t>Combinación 1</a:t>
-                      </a:r>
-                    </a:p>
-                  </a:txBody>
-                  <a:tcPr marL="73152" marR="73152" marT="18288" marB="18288" anchor="ctr">
-                    <a:solidFill>
-                      <a:srgbClr val="F7F9FC"/>
-                    </a:solidFill>
-                  </a:tcPr>
-                </a:tc>
-                <a:tc>
-                  <a:txBody>
-                    <a:bodyPr wrap="square"/>
-                    <a:lstStyle/>
-                    <a:p>
-                      <a:pPr algn="ctr"/>
-                      <a:r>
-                        <a:rPr sz="1050" b="0">
-                          <a:solidFill>
-                            <a:srgbClr val="262B33"/>
-                          </a:solidFill>
-                          <a:latin typeface="Calibri"/>
-                        </a:rPr>
-                        <a:t>3, 4, 6</a:t>
-                      </a:r>
-                    </a:p>
-                  </a:txBody>
-                  <a:tcPr marL="73152" marR="73152" marT="18288" marB="18288" anchor="ctr">
-                    <a:solidFill>
-                      <a:srgbClr val="F7F9FC"/>
-                    </a:solidFill>
-                  </a:tcPr>
-                </a:tc>
-                <a:tc>
-                  <a:txBody>
-                    <a:bodyPr wrap="square"/>
-                    <a:lstStyle/>
-                    <a:p>
-                      <a:pPr algn="r"/>
-                      <a:r>
-                        <a:rPr sz="1050" b="0">
-                          <a:solidFill>
-                            <a:srgbClr val="262B33"/>
-                          </a:solidFill>
-                          <a:latin typeface="Calibri"/>
-                        </a:rPr>
-                        <a:t>$ 630,0 M</a:t>
-                      </a:r>
-                    </a:p>
-                  </a:txBody>
-                  <a:tcPr marL="73152" marR="73152" marT="18288" marB="18288" anchor="ctr">
-                    <a:solidFill>
-                      <a:srgbClr val="F7F9FC"/>
-                    </a:solidFill>
-                  </a:tcPr>
-                </a:tc>
-                <a:tc>
-                  <a:txBody>
-                    <a:bodyPr wrap="square"/>
-                    <a:lstStyle/>
-                    <a:p>
-                      <a:pPr algn="r"/>
-                      <a:r>
-                        <a:rPr sz="1050" b="0">
-                          <a:solidFill>
-                            <a:srgbClr val="262B33"/>
-                          </a:solidFill>
-                          <a:latin typeface="Calibri"/>
-                        </a:rPr>
-                        <a:t>$ 63.000</a:t>
-                      </a:r>
-                    </a:p>
-                  </a:txBody>
-                  <a:tcPr marL="73152" marR="73152" marT="18288" marB="18288" anchor="ctr">
-                    <a:solidFill>
-                      <a:srgbClr val="F7F9FC"/>
-                    </a:solidFill>
-                  </a:tcPr>
-                </a:tc>
-                <a:tc>
-                  <a:txBody>
-                    <a:bodyPr wrap="square"/>
-                    <a:lstStyle/>
-                    <a:p>
-                      <a:pPr algn="r"/>
-                      <a:r>
-                        <a:rPr sz="1050" b="0">
-                          <a:solidFill>
-                            <a:srgbClr val="262B33"/>
-                          </a:solidFill>
-                          <a:latin typeface="Calibri"/>
-                        </a:rPr>
-                        <a:t>18,9 %</a:t>
-                      </a:r>
-                    </a:p>
-                  </a:txBody>
-                  <a:tcPr marL="73152" marR="73152" marT="18288" marB="18288" anchor="ctr">
-                    <a:solidFill>
-                      <a:srgbClr val="F7F9FC"/>
-                    </a:solidFill>
-                  </a:tcPr>
-                </a:tc>
-                <a:tc>
-                  <a:txBody>
-                    <a:bodyPr wrap="square"/>
-                    <a:lstStyle/>
-                    <a:p>
-                      <a:pPr algn="ctr"/>
-                      <a:r>
-                        <a:rPr sz="1050" b="0">
-                          <a:solidFill>
-                            <a:srgbClr val="C0392B"/>
-                          </a:solidFill>
-                          <a:latin typeface="Calibri"/>
-                        </a:rPr>
-                        <a:t>NO</a:t>
-                      </a:r>
-                    </a:p>
-                  </a:txBody>
-                  <a:tcPr marL="73152" marR="73152" marT="18288" marB="18288" anchor="ctr">
-                    <a:solidFill>
-                      <a:srgbClr val="F7F9FC"/>
-                    </a:solidFill>
-                  </a:tcPr>
-                </a:tc>
-              </a:tr>
-            </a:tbl>
-          </a:graphicData>
-        </a:graphic>
-      </p:graphicFrame>
-      <p:sp>
-        <p:nvSpPr>
-          <p:cNvPr id="42" name="TextBox 41"/>
+          </a:p>
+        </p:txBody>
+      </p:sp>
+      <p:sp>
+        <p:nvSpPr>
+          <p:cNvPr id="35" name="Rectangle 34"/>
+          <p:cNvSpPr/>
+          <p:nvPr/>
+        </p:nvSpPr>
+        <p:spPr>
+          <a:xfrm>
+            <a:off x="8165592" y="3465576"/>
+            <a:ext cx="548640" cy="54864"/>
+          </a:xfrm>
+          <a:prstGeom prst="rect">
+            <a:avLst/>
+          </a:prstGeom>
+          <a:solidFill>
+            <a:srgbClr val="92D050"/>
+          </a:solidFill>
+          <a:ln>
+            <a:noFill/>
+          </a:ln>
+          <a:effectLst/>
+        </p:spPr>
+        <p:style>
+          <a:lnRef idx="1">
+            <a:schemeClr val="accent1"/>
+          </a:lnRef>
+          <a:fillRef idx="3">
+            <a:schemeClr val="accent1"/>
+          </a:fillRef>
+          <a:effectRef idx="2">
+            <a:schemeClr val="accent1"/>
+          </a:effectRef>
+          <a:fontRef idx="minor">
+            <a:schemeClr val="lt1"/>
+          </a:fontRef>
+        </p:style>
+        <p:txBody>
+          <a:bodyPr rtlCol="0" anchor="ctr"/>
+          <a:lstStyle/>
+          <a:p>
+            <a:pPr algn="ctr"/>
+          </a:p>
+        </p:txBody>
+      </p:sp>
+      <p:sp>
+        <p:nvSpPr>
+          <p:cNvPr id="36" name="TextBox 35"/>
           <p:cNvSpPr txBox="1"/>
           <p:nvPr/>
         </p:nvSpPr>
         <p:spPr>
           <a:xfrm>
-            <a:off x="548640" y="5989320"/>
-            <a:ext cx="11109960" cy="457200"/>
+            <a:off x="8092440" y="3575304"/>
+            <a:ext cx="1645920" cy="320040"/>
           </a:xfrm>
           <a:prstGeom prst="rect">
             <a:avLst/>
@@ -19221,13 +16504,381 @@
           <a:p>
             <a:pPr algn="l"/>
             <a:r>
-              <a:rPr sz="1000" b="0" i="1">
+              <a:rPr sz="900" b="1" i="0">
                 <a:solidFill>
                   <a:srgbClr val="6B7280"/>
                 </a:solidFill>
                 <a:latin typeface="Calibri"/>
               </a:rPr>
-              <a:t>Ninguna combinación de 3 o más ofertas alcanza CV ≤ 10% (mejor CV: 18,9%). Los valores son solo ORIENTATIVOS y no sustentan un valor adoptado; se requieren más ofertas del mismo segmento, dentro de la banda admisible de la combinación elegida.</a:t>
+              <a:t>Límite inferior</a:t>
+            </a:r>
+          </a:p>
+        </p:txBody>
+      </p:sp>
+      <p:sp>
+        <p:nvSpPr>
+          <p:cNvPr id="37" name="TextBox 36"/>
+          <p:cNvSpPr txBox="1"/>
+          <p:nvPr/>
+        </p:nvSpPr>
+        <p:spPr>
+          <a:xfrm>
+            <a:off x="8092440" y="3849624"/>
+            <a:ext cx="1645920" cy="457200"/>
+          </a:xfrm>
+          <a:prstGeom prst="rect">
+            <a:avLst/>
+          </a:prstGeom>
+          <a:noFill/>
+        </p:spPr>
+        <p:txBody>
+          <a:bodyPr wrap="square" anchor="ctr" lIns="36576" rIns="36576" tIns="18288" bIns="18288">
+            <a:spAutoFit/>
+          </a:bodyPr>
+          <a:lstStyle/>
+          <a:p>
+            <a:pPr algn="l"/>
+            <a:r>
+              <a:rPr sz="1700" b="1" i="0">
+                <a:solidFill>
+                  <a:srgbClr val="1F3864"/>
+                </a:solidFill>
+                <a:latin typeface="Calibri"/>
+              </a:rPr>
+              <a:t>$ 13,8 M</a:t>
+            </a:r>
+          </a:p>
+        </p:txBody>
+      </p:sp>
+      <p:sp>
+        <p:nvSpPr>
+          <p:cNvPr id="38" name="Rounded Rectangle 37"/>
+          <p:cNvSpPr/>
+          <p:nvPr/>
+        </p:nvSpPr>
+        <p:spPr>
+          <a:xfrm>
+            <a:off x="9875520" y="3465576"/>
+            <a:ext cx="1783080" cy="914400"/>
+          </a:xfrm>
+          <a:prstGeom prst="roundRect">
+            <a:avLst>
+              <a:gd name="adj" fmla="val 5000"/>
+            </a:avLst>
+          </a:prstGeom>
+          <a:solidFill>
+            <a:srgbClr val="FFFFFF"/>
+          </a:solidFill>
+          <a:ln w="9525">
+            <a:solidFill>
+              <a:srgbClr val="E1E6EF"/>
+            </a:solidFill>
+          </a:ln>
+          <a:effectLst>
+            <a:outerShdw blurRad="114300" dist="38100" dir="5400000" algn="t" rotWithShape="0">
+              <a:srgbClr val="0F1F3D">
+                <a:alpha val="18000"/>
+              </a:srgbClr>
+            </a:outerShdw>
+          </a:effectLst>
+        </p:spPr>
+        <p:style>
+          <a:lnRef idx="1">
+            <a:schemeClr val="accent1"/>
+          </a:lnRef>
+          <a:fillRef idx="3">
+            <a:schemeClr val="accent1"/>
+          </a:fillRef>
+          <a:effectRef idx="2">
+            <a:schemeClr val="accent1"/>
+          </a:effectRef>
+          <a:fontRef idx="minor">
+            <a:schemeClr val="lt1"/>
+          </a:fontRef>
+        </p:style>
+        <p:txBody>
+          <a:bodyPr rtlCol="0" anchor="ctr"/>
+          <a:lstStyle/>
+          <a:p>
+            <a:pPr algn="ctr"/>
+          </a:p>
+        </p:txBody>
+      </p:sp>
+      <p:sp>
+        <p:nvSpPr>
+          <p:cNvPr id="39" name="Rectangle 38"/>
+          <p:cNvSpPr/>
+          <p:nvPr/>
+        </p:nvSpPr>
+        <p:spPr>
+          <a:xfrm>
+            <a:off x="10040112" y="3465576"/>
+            <a:ext cx="548640" cy="54864"/>
+          </a:xfrm>
+          <a:prstGeom prst="rect">
+            <a:avLst/>
+          </a:prstGeom>
+          <a:solidFill>
+            <a:srgbClr val="92D050"/>
+          </a:solidFill>
+          <a:ln>
+            <a:noFill/>
+          </a:ln>
+          <a:effectLst/>
+        </p:spPr>
+        <p:style>
+          <a:lnRef idx="1">
+            <a:schemeClr val="accent1"/>
+          </a:lnRef>
+          <a:fillRef idx="3">
+            <a:schemeClr val="accent1"/>
+          </a:fillRef>
+          <a:effectRef idx="2">
+            <a:schemeClr val="accent1"/>
+          </a:effectRef>
+          <a:fontRef idx="minor">
+            <a:schemeClr val="lt1"/>
+          </a:fontRef>
+        </p:style>
+        <p:txBody>
+          <a:bodyPr rtlCol="0" anchor="ctr"/>
+          <a:lstStyle/>
+          <a:p>
+            <a:pPr algn="ctr"/>
+          </a:p>
+        </p:txBody>
+      </p:sp>
+      <p:sp>
+        <p:nvSpPr>
+          <p:cNvPr id="40" name="TextBox 39"/>
+          <p:cNvSpPr txBox="1"/>
+          <p:nvPr/>
+        </p:nvSpPr>
+        <p:spPr>
+          <a:xfrm>
+            <a:off x="9966960" y="3575304"/>
+            <a:ext cx="1645920" cy="320040"/>
+          </a:xfrm>
+          <a:prstGeom prst="rect">
+            <a:avLst/>
+          </a:prstGeom>
+          <a:noFill/>
+        </p:spPr>
+        <p:txBody>
+          <a:bodyPr wrap="square" anchor="t" lIns="36576" rIns="36576" tIns="18288" bIns="18288">
+            <a:spAutoFit/>
+          </a:bodyPr>
+          <a:lstStyle/>
+          <a:p>
+            <a:pPr algn="l"/>
+            <a:r>
+              <a:rPr sz="900" b="1" i="0">
+                <a:solidFill>
+                  <a:srgbClr val="6B7280"/>
+                </a:solidFill>
+                <a:latin typeface="Calibri"/>
+              </a:rPr>
+              <a:t>Límite superior</a:t>
+            </a:r>
+          </a:p>
+        </p:txBody>
+      </p:sp>
+      <p:sp>
+        <p:nvSpPr>
+          <p:cNvPr id="41" name="TextBox 40"/>
+          <p:cNvSpPr txBox="1"/>
+          <p:nvPr/>
+        </p:nvSpPr>
+        <p:spPr>
+          <a:xfrm>
+            <a:off x="9966960" y="3849624"/>
+            <a:ext cx="1645920" cy="457200"/>
+          </a:xfrm>
+          <a:prstGeom prst="rect">
+            <a:avLst/>
+          </a:prstGeom>
+          <a:noFill/>
+        </p:spPr>
+        <p:txBody>
+          <a:bodyPr wrap="square" anchor="ctr" lIns="36576" rIns="36576" tIns="18288" bIns="18288">
+            <a:spAutoFit/>
+          </a:bodyPr>
+          <a:lstStyle/>
+          <a:p>
+            <a:pPr algn="l"/>
+            <a:r>
+              <a:rPr sz="1700" b="1" i="0">
+                <a:solidFill>
+                  <a:srgbClr val="1F3864"/>
+                </a:solidFill>
+                <a:latin typeface="Calibri"/>
+              </a:rPr>
+              <a:t>$ 885,4 M</a:t>
+            </a:r>
+          </a:p>
+        </p:txBody>
+      </p:sp>
+      <p:sp>
+        <p:nvSpPr>
+          <p:cNvPr id="42" name="Rounded Rectangle 41"/>
+          <p:cNvSpPr/>
+          <p:nvPr/>
+        </p:nvSpPr>
+        <p:spPr>
+          <a:xfrm>
+            <a:off x="8001000" y="4526280"/>
+            <a:ext cx="3657600" cy="1645920"/>
+          </a:xfrm>
+          <a:prstGeom prst="roundRect">
+            <a:avLst>
+              <a:gd name="adj" fmla="val 7000"/>
+            </a:avLst>
+          </a:prstGeom>
+          <a:gradFill rotWithShape="1">
+            <a:gsLst>
+              <a:gs pos="0">
+                <a:srgbClr val="0F1F3D"/>
+              </a:gs>
+              <a:gs pos="100000">
+                <a:srgbClr val="2F5597"/>
+              </a:gs>
+            </a:gsLst>
+            <a:lin scaled="0" ang="18900000"/>
+          </a:gradFill>
+          <a:ln>
+            <a:noFill/>
+          </a:ln>
+          <a:effectLst>
+            <a:outerShdw blurRad="114300" dist="38100" dir="5400000" algn="t" rotWithShape="0">
+              <a:srgbClr val="0F1F3D">
+                <a:alpha val="18000"/>
+              </a:srgbClr>
+            </a:outerShdw>
+          </a:effectLst>
+        </p:spPr>
+        <p:style>
+          <a:lnRef idx="1">
+            <a:schemeClr val="accent1"/>
+          </a:lnRef>
+          <a:fillRef idx="3">
+            <a:schemeClr val="accent1"/>
+          </a:fillRef>
+          <a:effectRef idx="2">
+            <a:schemeClr val="accent1"/>
+          </a:effectRef>
+          <a:fontRef idx="minor">
+            <a:schemeClr val="lt1"/>
+          </a:fontRef>
+        </p:style>
+        <p:txBody>
+          <a:bodyPr rtlCol="0" anchor="ctr"/>
+          <a:lstStyle/>
+          <a:p>
+            <a:pPr algn="ctr"/>
+          </a:p>
+        </p:txBody>
+      </p:sp>
+      <p:sp>
+        <p:nvSpPr>
+          <p:cNvPr id="43" name="TextBox 42"/>
+          <p:cNvSpPr txBox="1"/>
+          <p:nvPr/>
+        </p:nvSpPr>
+        <p:spPr>
+          <a:xfrm>
+            <a:off x="8229600" y="4663440"/>
+            <a:ext cx="3291840" cy="274320"/>
+          </a:xfrm>
+          <a:prstGeom prst="rect">
+            <a:avLst/>
+          </a:prstGeom>
+          <a:noFill/>
+        </p:spPr>
+        <p:txBody>
+          <a:bodyPr wrap="square" anchor="t" lIns="36576" rIns="36576" tIns="18288" bIns="18288">
+            <a:spAutoFit/>
+          </a:bodyPr>
+          <a:lstStyle/>
+          <a:p>
+            <a:pPr algn="l"/>
+            <a:r>
+              <a:rPr sz="1000" b="1" i="0" spc="250">
+                <a:solidFill>
+                  <a:srgbClr val="92D050"/>
+                </a:solidFill>
+                <a:latin typeface="Calibri"/>
+              </a:rPr>
+              <a:t>VALOR ADOPTADO</a:t>
+            </a:r>
+          </a:p>
+        </p:txBody>
+      </p:sp>
+      <p:sp>
+        <p:nvSpPr>
+          <p:cNvPr id="44" name="TextBox 43"/>
+          <p:cNvSpPr txBox="1"/>
+          <p:nvPr/>
+        </p:nvSpPr>
+        <p:spPr>
+          <a:xfrm>
+            <a:off x="8229600" y="4983480"/>
+            <a:ext cx="3291840" cy="731520"/>
+          </a:xfrm>
+          <a:prstGeom prst="rect">
+            <a:avLst/>
+          </a:prstGeom>
+          <a:noFill/>
+        </p:spPr>
+        <p:txBody>
+          <a:bodyPr wrap="square" anchor="t" lIns="36576" rIns="36576" tIns="18288" bIns="18288">
+            <a:spAutoFit/>
+          </a:bodyPr>
+          <a:lstStyle/>
+          <a:p>
+            <a:pPr algn="l"/>
+            <a:r>
+              <a:rPr sz="3600" b="1" i="0">
+                <a:solidFill>
+                  <a:srgbClr val="FFFFFF"/>
+                </a:solidFill>
+                <a:latin typeface="Calibri"/>
+              </a:rPr>
+              <a:t>$ 449,6 M</a:t>
+            </a:r>
+          </a:p>
+        </p:txBody>
+      </p:sp>
+      <p:sp>
+        <p:nvSpPr>
+          <p:cNvPr id="45" name="TextBox 44"/>
+          <p:cNvSpPr txBox="1"/>
+          <p:nvPr/>
+        </p:nvSpPr>
+        <p:spPr>
+          <a:xfrm>
+            <a:off x="8229600" y="5669280"/>
+            <a:ext cx="3291840" cy="365760"/>
+          </a:xfrm>
+          <a:prstGeom prst="rect">
+            <a:avLst/>
+          </a:prstGeom>
+          <a:noFill/>
+        </p:spPr>
+        <p:txBody>
+          <a:bodyPr wrap="square" anchor="t" lIns="36576" rIns="36576" tIns="18288" bIns="18288">
+            <a:spAutoFit/>
+          </a:bodyPr>
+          <a:lstStyle/>
+          <a:p>
+            <a:pPr algn="l"/>
+            <a:r>
+              <a:rPr sz="1100" b="0" i="0">
+                <a:solidFill>
+                  <a:srgbClr val="D9D9D9"/>
+                </a:solidFill>
+                <a:latin typeface="Calibri"/>
+              </a:rPr>
+              <a:t>por hectárea · muestra general</a:t>
             </a:r>
           </a:p>
         </p:txBody>
